--- a/IdeaStream_updated.pptx
+++ b/IdeaStream_updated.pptx
@@ -6,11 +6,10 @@
   </p:sldMasterIdLst>
   <p:sldIdLst>
     <p:sldId id="256" r:id="rId2"/>
-    <p:sldId id="257" r:id="rId3"/>
-    <p:sldId id="258" r:id="rId4"/>
-    <p:sldId id="259" r:id="rId5"/>
-    <p:sldId id="260" r:id="rId10"/>
-    <p:sldId id="261" r:id="rId11"/>
+    <p:sldId id="261" r:id="rId3"/>
+    <p:sldId id="257" r:id="rId4"/>
+    <p:sldId id="258" r:id="rId5"/>
+    <p:sldId id="259" r:id="rId6"/>
   </p:sldIdLst>
   <p:sldSz cx="12192000" cy="6858000"/>
   <p:notesSz cx="6858000" cy="9144000"/>
@@ -109,7 +108,3212 @@
       </a:defRPr>
     </a:lvl9pPr>
   </p:defaultTextStyle>
+  <p:extLst>
+    <p:ext uri="{EFAFB233-063F-42B5-8137-9DF3F51BA10A}">
+      <p15:sldGuideLst xmlns:p15="http://schemas.microsoft.com/office/powerpoint/2012/main"/>
+    </p:ext>
+  </p:extLst>
 </p:presentation>
+</file>
+
+<file path=ppt/diagrams/colors1.xml><?xml version="1.0" encoding="utf-8"?>
+<dgm:colorsDef xmlns:dgm="http://schemas.openxmlformats.org/drawingml/2006/diagram" xmlns:a="http://schemas.openxmlformats.org/drawingml/2006/main" uniqueId="urn:microsoft.com/office/officeart/2005/8/colors/accent0_3">
+  <dgm:title val=""/>
+  <dgm:desc val=""/>
+  <dgm:catLst>
+    <dgm:cat type="mainScheme" pri="10300"/>
+  </dgm:catLst>
+  <dgm:styleLbl name="node0">
+    <dgm:fillClrLst meth="repeat">
+      <a:schemeClr val="dk2"/>
+    </dgm:fillClrLst>
+    <dgm:linClrLst meth="repeat">
+      <a:schemeClr val="lt2"/>
+    </dgm:linClrLst>
+    <dgm:effectClrLst/>
+    <dgm:txLinClrLst/>
+    <dgm:txFillClrLst/>
+    <dgm:txEffectClrLst/>
+  </dgm:styleLbl>
+  <dgm:styleLbl name="alignNode1">
+    <dgm:fillClrLst meth="repeat">
+      <a:schemeClr val="dk2"/>
+    </dgm:fillClrLst>
+    <dgm:linClrLst meth="repeat">
+      <a:schemeClr val="dk2"/>
+    </dgm:linClrLst>
+    <dgm:effectClrLst/>
+    <dgm:txLinClrLst/>
+    <dgm:txFillClrLst/>
+    <dgm:txEffectClrLst/>
+  </dgm:styleLbl>
+  <dgm:styleLbl name="node1">
+    <dgm:fillClrLst meth="repeat">
+      <a:schemeClr val="dk2"/>
+    </dgm:fillClrLst>
+    <dgm:linClrLst meth="repeat">
+      <a:schemeClr val="lt2"/>
+    </dgm:linClrLst>
+    <dgm:effectClrLst/>
+    <dgm:txLinClrLst/>
+    <dgm:txFillClrLst/>
+    <dgm:txEffectClrLst/>
+  </dgm:styleLbl>
+  <dgm:styleLbl name="lnNode1">
+    <dgm:fillClrLst meth="repeat">
+      <a:schemeClr val="dk2"/>
+    </dgm:fillClrLst>
+    <dgm:linClrLst meth="repeat">
+      <a:schemeClr val="lt2"/>
+    </dgm:linClrLst>
+    <dgm:effectClrLst/>
+    <dgm:txLinClrLst/>
+    <dgm:txFillClrLst/>
+    <dgm:txEffectClrLst/>
+  </dgm:styleLbl>
+  <dgm:styleLbl name="vennNode1">
+    <dgm:fillClrLst meth="repeat">
+      <a:schemeClr val="dk2">
+        <a:alpha val="50000"/>
+      </a:schemeClr>
+    </dgm:fillClrLst>
+    <dgm:linClrLst meth="repeat">
+      <a:schemeClr val="lt2"/>
+    </dgm:linClrLst>
+    <dgm:effectClrLst/>
+    <dgm:txLinClrLst/>
+    <dgm:txFillClrLst/>
+    <dgm:txEffectClrLst/>
+  </dgm:styleLbl>
+  <dgm:styleLbl name="node2">
+    <dgm:fillClrLst meth="repeat">
+      <a:schemeClr val="dk2"/>
+    </dgm:fillClrLst>
+    <dgm:linClrLst meth="repeat">
+      <a:schemeClr val="lt2"/>
+    </dgm:linClrLst>
+    <dgm:effectClrLst/>
+    <dgm:txLinClrLst/>
+    <dgm:txFillClrLst/>
+    <dgm:txEffectClrLst/>
+  </dgm:styleLbl>
+  <dgm:styleLbl name="node3">
+    <dgm:fillClrLst meth="repeat">
+      <a:schemeClr val="dk2"/>
+    </dgm:fillClrLst>
+    <dgm:linClrLst meth="repeat">
+      <a:schemeClr val="lt2"/>
+    </dgm:linClrLst>
+    <dgm:effectClrLst/>
+    <dgm:txLinClrLst/>
+    <dgm:txFillClrLst/>
+    <dgm:txEffectClrLst/>
+  </dgm:styleLbl>
+  <dgm:styleLbl name="node4">
+    <dgm:fillClrLst meth="repeat">
+      <a:schemeClr val="dk2"/>
+    </dgm:fillClrLst>
+    <dgm:linClrLst meth="repeat">
+      <a:schemeClr val="lt2"/>
+    </dgm:linClrLst>
+    <dgm:effectClrLst/>
+    <dgm:txLinClrLst/>
+    <dgm:txFillClrLst/>
+    <dgm:txEffectClrLst/>
+  </dgm:styleLbl>
+  <dgm:styleLbl name="fgImgPlace1">
+    <dgm:fillClrLst meth="repeat">
+      <a:schemeClr val="dk2">
+        <a:tint val="50000"/>
+      </a:schemeClr>
+    </dgm:fillClrLst>
+    <dgm:linClrLst meth="repeat">
+      <a:schemeClr val="lt2"/>
+    </dgm:linClrLst>
+    <dgm:effectClrLst/>
+    <dgm:txLinClrLst/>
+    <dgm:txFillClrLst meth="repeat">
+      <a:schemeClr val="lt2"/>
+    </dgm:txFillClrLst>
+    <dgm:txEffectClrLst/>
+  </dgm:styleLbl>
+  <dgm:styleLbl name="alignImgPlace1">
+    <dgm:fillClrLst meth="repeat">
+      <a:schemeClr val="dk2">
+        <a:tint val="50000"/>
+      </a:schemeClr>
+    </dgm:fillClrLst>
+    <dgm:linClrLst meth="repeat">
+      <a:schemeClr val="dk2">
+        <a:shade val="80000"/>
+      </a:schemeClr>
+    </dgm:linClrLst>
+    <dgm:effectClrLst/>
+    <dgm:txLinClrLst/>
+    <dgm:txFillClrLst meth="repeat">
+      <a:schemeClr val="lt2"/>
+    </dgm:txFillClrLst>
+    <dgm:txEffectClrLst/>
+  </dgm:styleLbl>
+  <dgm:styleLbl name="bgImgPlace1">
+    <dgm:fillClrLst meth="repeat">
+      <a:schemeClr val="dk2">
+        <a:tint val="50000"/>
+      </a:schemeClr>
+    </dgm:fillClrLst>
+    <dgm:linClrLst meth="repeat">
+      <a:schemeClr val="dk2">
+        <a:shade val="80000"/>
+      </a:schemeClr>
+    </dgm:linClrLst>
+    <dgm:effectClrLst/>
+    <dgm:txLinClrLst/>
+    <dgm:txFillClrLst meth="repeat">
+      <a:schemeClr val="lt2"/>
+    </dgm:txFillClrLst>
+    <dgm:txEffectClrLst/>
+  </dgm:styleLbl>
+  <dgm:styleLbl name="sibTrans2D1">
+    <dgm:fillClrLst meth="repeat">
+      <a:schemeClr val="dk2">
+        <a:tint val="60000"/>
+      </a:schemeClr>
+    </dgm:fillClrLst>
+    <dgm:linClrLst meth="repeat">
+      <a:schemeClr val="dk2">
+        <a:tint val="60000"/>
+      </a:schemeClr>
+    </dgm:linClrLst>
+    <dgm:effectClrLst/>
+    <dgm:txLinClrLst/>
+    <dgm:txFillClrLst/>
+    <dgm:txEffectClrLst/>
+  </dgm:styleLbl>
+  <dgm:styleLbl name="fgSibTrans2D1">
+    <dgm:fillClrLst meth="repeat">
+      <a:schemeClr val="dk2">
+        <a:tint val="60000"/>
+      </a:schemeClr>
+    </dgm:fillClrLst>
+    <dgm:linClrLst meth="repeat">
+      <a:schemeClr val="dk2">
+        <a:tint val="60000"/>
+      </a:schemeClr>
+    </dgm:linClrLst>
+    <dgm:effectClrLst/>
+    <dgm:txLinClrLst/>
+    <dgm:txFillClrLst/>
+    <dgm:txEffectClrLst/>
+  </dgm:styleLbl>
+  <dgm:styleLbl name="bgSibTrans2D1">
+    <dgm:fillClrLst meth="repeat">
+      <a:schemeClr val="dk2">
+        <a:tint val="60000"/>
+      </a:schemeClr>
+    </dgm:fillClrLst>
+    <dgm:linClrLst meth="repeat">
+      <a:schemeClr val="dk2">
+        <a:tint val="60000"/>
+      </a:schemeClr>
+    </dgm:linClrLst>
+    <dgm:effectClrLst/>
+    <dgm:txLinClrLst/>
+    <dgm:txFillClrLst/>
+    <dgm:txEffectClrLst/>
+  </dgm:styleLbl>
+  <dgm:styleLbl name="sibTrans1D1">
+    <dgm:fillClrLst meth="repeat">
+      <a:schemeClr val="dk2"/>
+    </dgm:fillClrLst>
+    <dgm:linClrLst meth="repeat">
+      <a:schemeClr val="dk2"/>
+    </dgm:linClrLst>
+    <dgm:effectClrLst/>
+    <dgm:txLinClrLst/>
+    <dgm:txFillClrLst meth="repeat">
+      <a:schemeClr val="lt2"/>
+    </dgm:txFillClrLst>
+    <dgm:txEffectClrLst/>
+  </dgm:styleLbl>
+  <dgm:styleLbl name="callout">
+    <dgm:fillClrLst meth="repeat">
+      <a:schemeClr val="dk2"/>
+    </dgm:fillClrLst>
+    <dgm:linClrLst meth="repeat">
+      <a:schemeClr val="dk2">
+        <a:tint val="50000"/>
+      </a:schemeClr>
+    </dgm:linClrLst>
+    <dgm:effectClrLst/>
+    <dgm:txLinClrLst/>
+    <dgm:txFillClrLst meth="repeat">
+      <a:schemeClr val="lt2"/>
+    </dgm:txFillClrLst>
+    <dgm:txEffectClrLst/>
+  </dgm:styleLbl>
+  <dgm:styleLbl name="asst0">
+    <dgm:fillClrLst meth="repeat">
+      <a:schemeClr val="dk2"/>
+    </dgm:fillClrLst>
+    <dgm:linClrLst meth="repeat">
+      <a:schemeClr val="lt2"/>
+    </dgm:linClrLst>
+    <dgm:effectClrLst/>
+    <dgm:txLinClrLst/>
+    <dgm:txFillClrLst/>
+    <dgm:txEffectClrLst/>
+  </dgm:styleLbl>
+  <dgm:styleLbl name="asst1">
+    <dgm:fillClrLst meth="repeat">
+      <a:schemeClr val="dk2"/>
+    </dgm:fillClrLst>
+    <dgm:linClrLst meth="repeat">
+      <a:schemeClr val="lt2"/>
+    </dgm:linClrLst>
+    <dgm:effectClrLst/>
+    <dgm:txLinClrLst/>
+    <dgm:txFillClrLst/>
+    <dgm:txEffectClrLst/>
+  </dgm:styleLbl>
+  <dgm:styleLbl name="asst2">
+    <dgm:fillClrLst meth="repeat">
+      <a:schemeClr val="dk2"/>
+    </dgm:fillClrLst>
+    <dgm:linClrLst meth="repeat">
+      <a:schemeClr val="lt2"/>
+    </dgm:linClrLst>
+    <dgm:effectClrLst/>
+    <dgm:txLinClrLst/>
+    <dgm:txFillClrLst/>
+    <dgm:txEffectClrLst/>
+  </dgm:styleLbl>
+  <dgm:styleLbl name="asst3">
+    <dgm:fillClrLst meth="repeat">
+      <a:schemeClr val="dk2"/>
+    </dgm:fillClrLst>
+    <dgm:linClrLst meth="repeat">
+      <a:schemeClr val="lt2"/>
+    </dgm:linClrLst>
+    <dgm:effectClrLst/>
+    <dgm:txLinClrLst/>
+    <dgm:txFillClrLst/>
+    <dgm:txEffectClrLst/>
+  </dgm:styleLbl>
+  <dgm:styleLbl name="asst4">
+    <dgm:fillClrLst meth="repeat">
+      <a:schemeClr val="dk2"/>
+    </dgm:fillClrLst>
+    <dgm:linClrLst meth="repeat">
+      <a:schemeClr val="lt2"/>
+    </dgm:linClrLst>
+    <dgm:effectClrLst/>
+    <dgm:txLinClrLst/>
+    <dgm:txFillClrLst/>
+    <dgm:txEffectClrLst/>
+  </dgm:styleLbl>
+  <dgm:styleLbl name="parChTrans2D1">
+    <dgm:fillClrLst meth="repeat">
+      <a:schemeClr val="dk2">
+        <a:tint val="60000"/>
+      </a:schemeClr>
+    </dgm:fillClrLst>
+    <dgm:linClrLst meth="repeat">
+      <a:schemeClr val="dk2">
+        <a:tint val="60000"/>
+      </a:schemeClr>
+    </dgm:linClrLst>
+    <dgm:effectClrLst/>
+    <dgm:txLinClrLst/>
+    <dgm:txFillClrLst meth="repeat">
+      <a:schemeClr val="lt2"/>
+    </dgm:txFillClrLst>
+    <dgm:txEffectClrLst/>
+  </dgm:styleLbl>
+  <dgm:styleLbl name="parChTrans2D2">
+    <dgm:fillClrLst meth="repeat">
+      <a:schemeClr val="dk2"/>
+    </dgm:fillClrLst>
+    <dgm:linClrLst meth="repeat">
+      <a:schemeClr val="dk2"/>
+    </dgm:linClrLst>
+    <dgm:effectClrLst/>
+    <dgm:txLinClrLst/>
+    <dgm:txFillClrLst meth="repeat">
+      <a:schemeClr val="lt2"/>
+    </dgm:txFillClrLst>
+    <dgm:txEffectClrLst/>
+  </dgm:styleLbl>
+  <dgm:styleLbl name="parChTrans2D3">
+    <dgm:fillClrLst meth="repeat">
+      <a:schemeClr val="dk2"/>
+    </dgm:fillClrLst>
+    <dgm:linClrLst meth="repeat">
+      <a:schemeClr val="dk2"/>
+    </dgm:linClrLst>
+    <dgm:effectClrLst/>
+    <dgm:txLinClrLst/>
+    <dgm:txFillClrLst meth="repeat">
+      <a:schemeClr val="lt2"/>
+    </dgm:txFillClrLst>
+    <dgm:txEffectClrLst/>
+  </dgm:styleLbl>
+  <dgm:styleLbl name="parChTrans2D4">
+    <dgm:fillClrLst meth="repeat">
+      <a:schemeClr val="dk2"/>
+    </dgm:fillClrLst>
+    <dgm:linClrLst meth="repeat">
+      <a:schemeClr val="dk2"/>
+    </dgm:linClrLst>
+    <dgm:effectClrLst/>
+    <dgm:txLinClrLst/>
+    <dgm:txFillClrLst meth="repeat">
+      <a:schemeClr val="lt2"/>
+    </dgm:txFillClrLst>
+    <dgm:txEffectClrLst/>
+  </dgm:styleLbl>
+  <dgm:styleLbl name="parChTrans1D1">
+    <dgm:fillClrLst meth="repeat">
+      <a:schemeClr val="dk2"/>
+    </dgm:fillClrLst>
+    <dgm:linClrLst meth="repeat">
+      <a:schemeClr val="dk2">
+        <a:shade val="60000"/>
+      </a:schemeClr>
+    </dgm:linClrLst>
+    <dgm:effectClrLst/>
+    <dgm:txLinClrLst/>
+    <dgm:txFillClrLst meth="repeat">
+      <a:schemeClr val="tx1"/>
+    </dgm:txFillClrLst>
+    <dgm:txEffectClrLst/>
+  </dgm:styleLbl>
+  <dgm:styleLbl name="parChTrans1D2">
+    <dgm:fillClrLst meth="repeat">
+      <a:schemeClr val="dk2"/>
+    </dgm:fillClrLst>
+    <dgm:linClrLst meth="repeat">
+      <a:schemeClr val="dk2">
+        <a:shade val="60000"/>
+      </a:schemeClr>
+    </dgm:linClrLst>
+    <dgm:effectClrLst/>
+    <dgm:txLinClrLst/>
+    <dgm:txFillClrLst meth="repeat">
+      <a:schemeClr val="tx1"/>
+    </dgm:txFillClrLst>
+    <dgm:txEffectClrLst/>
+  </dgm:styleLbl>
+  <dgm:styleLbl name="parChTrans1D3">
+    <dgm:fillClrLst meth="repeat">
+      <a:schemeClr val="dk2"/>
+    </dgm:fillClrLst>
+    <dgm:linClrLst meth="repeat">
+      <a:schemeClr val="dk2">
+        <a:shade val="80000"/>
+      </a:schemeClr>
+    </dgm:linClrLst>
+    <dgm:effectClrLst/>
+    <dgm:txLinClrLst/>
+    <dgm:txFillClrLst meth="repeat">
+      <a:schemeClr val="tx1"/>
+    </dgm:txFillClrLst>
+    <dgm:txEffectClrLst/>
+  </dgm:styleLbl>
+  <dgm:styleLbl name="parChTrans1D4">
+    <dgm:fillClrLst meth="repeat">
+      <a:schemeClr val="dk2"/>
+    </dgm:fillClrLst>
+    <dgm:linClrLst meth="repeat">
+      <a:schemeClr val="dk2">
+        <a:shade val="80000"/>
+      </a:schemeClr>
+    </dgm:linClrLst>
+    <dgm:effectClrLst/>
+    <dgm:txLinClrLst/>
+    <dgm:txFillClrLst meth="repeat">
+      <a:schemeClr val="tx1"/>
+    </dgm:txFillClrLst>
+    <dgm:txEffectClrLst/>
+  </dgm:styleLbl>
+  <dgm:styleLbl name="fgAcc1">
+    <dgm:fillClrLst meth="repeat">
+      <a:schemeClr val="lt2">
+        <a:alpha val="90000"/>
+      </a:schemeClr>
+    </dgm:fillClrLst>
+    <dgm:linClrLst meth="repeat">
+      <a:schemeClr val="dk2"/>
+    </dgm:linClrLst>
+    <dgm:effectClrLst/>
+    <dgm:txLinClrLst/>
+    <dgm:txFillClrLst meth="repeat">
+      <a:schemeClr val="dk1"/>
+    </dgm:txFillClrLst>
+    <dgm:txEffectClrLst/>
+  </dgm:styleLbl>
+  <dgm:styleLbl name="conFgAcc1">
+    <dgm:fillClrLst meth="repeat">
+      <a:schemeClr val="lt2">
+        <a:alpha val="90000"/>
+      </a:schemeClr>
+    </dgm:fillClrLst>
+    <dgm:linClrLst meth="repeat">
+      <a:schemeClr val="dk2"/>
+    </dgm:linClrLst>
+    <dgm:effectClrLst/>
+    <dgm:txLinClrLst/>
+    <dgm:txFillClrLst meth="repeat">
+      <a:schemeClr val="dk1"/>
+    </dgm:txFillClrLst>
+    <dgm:txEffectClrLst/>
+  </dgm:styleLbl>
+  <dgm:styleLbl name="alignAcc1">
+    <dgm:fillClrLst meth="repeat">
+      <a:schemeClr val="lt2">
+        <a:alpha val="90000"/>
+      </a:schemeClr>
+    </dgm:fillClrLst>
+    <dgm:linClrLst meth="repeat">
+      <a:schemeClr val="dk2"/>
+    </dgm:linClrLst>
+    <dgm:effectClrLst/>
+    <dgm:txLinClrLst/>
+    <dgm:txFillClrLst meth="repeat">
+      <a:schemeClr val="dk1"/>
+    </dgm:txFillClrLst>
+    <dgm:txEffectClrLst/>
+  </dgm:styleLbl>
+  <dgm:styleLbl name="trAlignAcc1">
+    <dgm:fillClrLst meth="repeat">
+      <a:schemeClr val="lt2">
+        <a:alpha val="40000"/>
+      </a:schemeClr>
+    </dgm:fillClrLst>
+    <dgm:linClrLst meth="repeat">
+      <a:schemeClr val="dk2"/>
+    </dgm:linClrLst>
+    <dgm:effectClrLst/>
+    <dgm:txLinClrLst/>
+    <dgm:txFillClrLst meth="repeat">
+      <a:schemeClr val="dk1"/>
+    </dgm:txFillClrLst>
+    <dgm:txEffectClrLst/>
+  </dgm:styleLbl>
+  <dgm:styleLbl name="bgAcc1">
+    <dgm:fillClrLst meth="repeat">
+      <a:schemeClr val="lt2">
+        <a:alpha val="90000"/>
+      </a:schemeClr>
+    </dgm:fillClrLst>
+    <dgm:linClrLst meth="repeat">
+      <a:schemeClr val="dk2"/>
+    </dgm:linClrLst>
+    <dgm:effectClrLst/>
+    <dgm:txLinClrLst/>
+    <dgm:txFillClrLst meth="repeat">
+      <a:schemeClr val="dk1"/>
+    </dgm:txFillClrLst>
+    <dgm:txEffectClrLst/>
+  </dgm:styleLbl>
+  <dgm:styleLbl name="solidFgAcc1">
+    <dgm:fillClrLst meth="repeat">
+      <a:schemeClr val="lt2"/>
+    </dgm:fillClrLst>
+    <dgm:linClrLst meth="repeat">
+      <a:schemeClr val="dk2"/>
+    </dgm:linClrLst>
+    <dgm:effectClrLst/>
+    <dgm:txLinClrLst/>
+    <dgm:txFillClrLst meth="repeat">
+      <a:schemeClr val="dk1"/>
+    </dgm:txFillClrLst>
+    <dgm:txEffectClrLst/>
+  </dgm:styleLbl>
+  <dgm:styleLbl name="solidAlignAcc1">
+    <dgm:fillClrLst meth="repeat">
+      <a:schemeClr val="lt2"/>
+    </dgm:fillClrLst>
+    <dgm:linClrLst meth="repeat">
+      <a:schemeClr val="dk2"/>
+    </dgm:linClrLst>
+    <dgm:effectClrLst/>
+    <dgm:txLinClrLst/>
+    <dgm:txFillClrLst meth="repeat">
+      <a:schemeClr val="dk1"/>
+    </dgm:txFillClrLst>
+    <dgm:txEffectClrLst/>
+  </dgm:styleLbl>
+  <dgm:styleLbl name="solidBgAcc1">
+    <dgm:fillClrLst meth="repeat">
+      <a:schemeClr val="lt2"/>
+    </dgm:fillClrLst>
+    <dgm:linClrLst meth="repeat">
+      <a:schemeClr val="dk2"/>
+    </dgm:linClrLst>
+    <dgm:effectClrLst/>
+    <dgm:txLinClrLst/>
+    <dgm:txFillClrLst meth="repeat">
+      <a:schemeClr val="dk1"/>
+    </dgm:txFillClrLst>
+    <dgm:txEffectClrLst/>
+  </dgm:styleLbl>
+  <dgm:styleLbl name="fgAccFollowNode1">
+    <dgm:fillClrLst meth="repeat">
+      <a:schemeClr val="dk2">
+        <a:alpha val="90000"/>
+        <a:tint val="40000"/>
+      </a:schemeClr>
+    </dgm:fillClrLst>
+    <dgm:linClrLst meth="repeat">
+      <a:schemeClr val="dk2">
+        <a:alpha val="90000"/>
+        <a:tint val="40000"/>
+      </a:schemeClr>
+    </dgm:linClrLst>
+    <dgm:effectClrLst/>
+    <dgm:txLinClrLst/>
+    <dgm:txFillClrLst meth="repeat">
+      <a:schemeClr val="dk1"/>
+    </dgm:txFillClrLst>
+    <dgm:txEffectClrLst/>
+  </dgm:styleLbl>
+  <dgm:styleLbl name="alignAccFollowNode1">
+    <dgm:fillClrLst meth="repeat">
+      <a:schemeClr val="dk2">
+        <a:alpha val="90000"/>
+        <a:tint val="40000"/>
+      </a:schemeClr>
+    </dgm:fillClrLst>
+    <dgm:linClrLst meth="repeat">
+      <a:schemeClr val="dk2">
+        <a:alpha val="90000"/>
+        <a:tint val="40000"/>
+      </a:schemeClr>
+    </dgm:linClrLst>
+    <dgm:effectClrLst/>
+    <dgm:txLinClrLst/>
+    <dgm:txFillClrLst meth="repeat">
+      <a:schemeClr val="dk1"/>
+    </dgm:txFillClrLst>
+    <dgm:txEffectClrLst/>
+  </dgm:styleLbl>
+  <dgm:styleLbl name="bgAccFollowNode1">
+    <dgm:fillClrLst meth="repeat">
+      <a:schemeClr val="dk2">
+        <a:alpha val="90000"/>
+        <a:tint val="40000"/>
+      </a:schemeClr>
+    </dgm:fillClrLst>
+    <dgm:linClrLst meth="repeat">
+      <a:schemeClr val="dk2">
+        <a:alpha val="90000"/>
+        <a:tint val="40000"/>
+      </a:schemeClr>
+    </dgm:linClrLst>
+    <dgm:effectClrLst/>
+    <dgm:txLinClrLst/>
+    <dgm:txFillClrLst meth="repeat">
+      <a:schemeClr val="dk1"/>
+    </dgm:txFillClrLst>
+    <dgm:txEffectClrLst/>
+  </dgm:styleLbl>
+  <dgm:styleLbl name="fgAcc0">
+    <dgm:fillClrLst meth="repeat">
+      <a:schemeClr val="lt2">
+        <a:alpha val="90000"/>
+      </a:schemeClr>
+    </dgm:fillClrLst>
+    <dgm:linClrLst meth="repeat">
+      <a:schemeClr val="dk2"/>
+    </dgm:linClrLst>
+    <dgm:effectClrLst/>
+    <dgm:txLinClrLst/>
+    <dgm:txFillClrLst meth="repeat">
+      <a:schemeClr val="dk1"/>
+    </dgm:txFillClrLst>
+    <dgm:txEffectClrLst/>
+  </dgm:styleLbl>
+  <dgm:styleLbl name="fgAcc2">
+    <dgm:fillClrLst meth="repeat">
+      <a:schemeClr val="lt2">
+        <a:alpha val="90000"/>
+      </a:schemeClr>
+    </dgm:fillClrLst>
+    <dgm:linClrLst meth="repeat">
+      <a:schemeClr val="dk2"/>
+    </dgm:linClrLst>
+    <dgm:effectClrLst/>
+    <dgm:txLinClrLst/>
+    <dgm:txFillClrLst meth="repeat">
+      <a:schemeClr val="dk1"/>
+    </dgm:txFillClrLst>
+    <dgm:txEffectClrLst/>
+  </dgm:styleLbl>
+  <dgm:styleLbl name="fgAcc3">
+    <dgm:fillClrLst meth="repeat">
+      <a:schemeClr val="lt2">
+        <a:alpha val="90000"/>
+      </a:schemeClr>
+    </dgm:fillClrLst>
+    <dgm:linClrLst meth="repeat">
+      <a:schemeClr val="dk2"/>
+    </dgm:linClrLst>
+    <dgm:effectClrLst/>
+    <dgm:txLinClrLst/>
+    <dgm:txFillClrLst meth="repeat">
+      <a:schemeClr val="dk1"/>
+    </dgm:txFillClrLst>
+    <dgm:txEffectClrLst/>
+  </dgm:styleLbl>
+  <dgm:styleLbl name="fgAcc4">
+    <dgm:fillClrLst meth="repeat">
+      <a:schemeClr val="lt2">
+        <a:alpha val="90000"/>
+      </a:schemeClr>
+    </dgm:fillClrLst>
+    <dgm:linClrLst meth="repeat">
+      <a:schemeClr val="dk2"/>
+    </dgm:linClrLst>
+    <dgm:effectClrLst/>
+    <dgm:txLinClrLst/>
+    <dgm:txFillClrLst meth="repeat">
+      <a:schemeClr val="dk1"/>
+    </dgm:txFillClrLst>
+    <dgm:txEffectClrLst/>
+  </dgm:styleLbl>
+  <dgm:styleLbl name="bgShp">
+    <dgm:fillClrLst meth="repeat">
+      <a:schemeClr val="dk2">
+        <a:tint val="40000"/>
+      </a:schemeClr>
+    </dgm:fillClrLst>
+    <dgm:linClrLst meth="repeat">
+      <a:schemeClr val="dk2"/>
+    </dgm:linClrLst>
+    <dgm:effectClrLst/>
+    <dgm:txLinClrLst/>
+    <dgm:txFillClrLst meth="repeat">
+      <a:schemeClr val="dk1"/>
+    </dgm:txFillClrLst>
+    <dgm:txEffectClrLst/>
+  </dgm:styleLbl>
+  <dgm:styleLbl name="dkBgShp">
+    <dgm:fillClrLst meth="repeat">
+      <a:schemeClr val="dk2">
+        <a:shade val="80000"/>
+      </a:schemeClr>
+    </dgm:fillClrLst>
+    <dgm:linClrLst meth="repeat">
+      <a:schemeClr val="dk2"/>
+    </dgm:linClrLst>
+    <dgm:effectClrLst/>
+    <dgm:txLinClrLst/>
+    <dgm:txFillClrLst meth="repeat">
+      <a:schemeClr val="lt1"/>
+    </dgm:txFillClrLst>
+    <dgm:txEffectClrLst/>
+  </dgm:styleLbl>
+  <dgm:styleLbl name="trBgShp">
+    <dgm:fillClrLst meth="repeat">
+      <a:schemeClr val="dk2">
+        <a:tint val="50000"/>
+        <a:alpha val="40000"/>
+      </a:schemeClr>
+    </dgm:fillClrLst>
+    <dgm:linClrLst meth="repeat">
+      <a:schemeClr val="dk2"/>
+    </dgm:linClrLst>
+    <dgm:effectClrLst/>
+    <dgm:txLinClrLst/>
+    <dgm:txFillClrLst meth="repeat">
+      <a:schemeClr val="lt1"/>
+    </dgm:txFillClrLst>
+    <dgm:txEffectClrLst/>
+  </dgm:styleLbl>
+  <dgm:styleLbl name="fgShp">
+    <dgm:fillClrLst meth="repeat">
+      <a:schemeClr val="dk2">
+        <a:tint val="60000"/>
+      </a:schemeClr>
+    </dgm:fillClrLst>
+    <dgm:linClrLst meth="repeat">
+      <a:schemeClr val="lt2"/>
+    </dgm:linClrLst>
+    <dgm:effectClrLst/>
+    <dgm:txLinClrLst/>
+    <dgm:txFillClrLst meth="repeat">
+      <a:schemeClr val="dk1"/>
+    </dgm:txFillClrLst>
+    <dgm:txEffectClrLst/>
+  </dgm:styleLbl>
+  <dgm:styleLbl name="revTx">
+    <dgm:fillClrLst meth="repeat">
+      <a:schemeClr val="lt2">
+        <a:alpha val="0"/>
+      </a:schemeClr>
+    </dgm:fillClrLst>
+    <dgm:linClrLst meth="repeat">
+      <a:schemeClr val="dk1">
+        <a:alpha val="0"/>
+      </a:schemeClr>
+    </dgm:linClrLst>
+    <dgm:effectClrLst/>
+    <dgm:txLinClrLst/>
+    <dgm:txFillClrLst meth="repeat">
+      <a:schemeClr val="tx1"/>
+    </dgm:txFillClrLst>
+    <dgm:txEffectClrLst/>
+  </dgm:styleLbl>
+</dgm:colorsDef>
+</file>
+
+<file path=ppt/diagrams/data1.xml><?xml version="1.0" encoding="utf-8"?>
+<dgm:dataModel xmlns:dgm="http://schemas.openxmlformats.org/drawingml/2006/diagram" xmlns:a="http://schemas.openxmlformats.org/drawingml/2006/main">
+  <dgm:ptLst>
+    <dgm:pt modelId="{F8D06316-BE93-447D-A238-3F65F047D87D}" type="doc">
+      <dgm:prSet loTypeId="urn:microsoft.com/office/officeart/2005/8/layout/hierarchy1" loCatId="hierarchy" qsTypeId="urn:microsoft.com/office/officeart/2005/8/quickstyle/simple1" qsCatId="simple" csTypeId="urn:microsoft.com/office/officeart/2005/8/colors/accent0_3" csCatId="mainScheme"/>
+      <dgm:spPr/>
+      <dgm:t>
+        <a:bodyPr/>
+        <a:lstStyle/>
+        <a:p>
+          <a:endParaRPr lang="en-US"/>
+        </a:p>
+      </dgm:t>
+    </dgm:pt>
+    <dgm:pt modelId="{23F17799-ACEA-4EF6-8865-D3DB6966DD9C}">
+      <dgm:prSet/>
+      <dgm:spPr/>
+      <dgm:t>
+        <a:bodyPr/>
+        <a:lstStyle/>
+        <a:p>
+          <a:r>
+            <a:rPr kumimoji="1" lang="en-US"/>
+            <a:t>VSCode:1.119.0</a:t>
+          </a:r>
+          <a:endParaRPr lang="en-US"/>
+        </a:p>
+      </dgm:t>
+    </dgm:pt>
+    <dgm:pt modelId="{103E48A3-7AD5-4439-B86A-DF086D9BA7B6}" type="parTrans" cxnId="{B208ED54-061A-485E-9686-D96ED8CF9D63}">
+      <dgm:prSet/>
+      <dgm:spPr/>
+      <dgm:t>
+        <a:bodyPr/>
+        <a:lstStyle/>
+        <a:p>
+          <a:endParaRPr lang="en-US"/>
+        </a:p>
+      </dgm:t>
+    </dgm:pt>
+    <dgm:pt modelId="{245ABC37-F644-4F95-864B-760503060E55}" type="sibTrans" cxnId="{B208ED54-061A-485E-9686-D96ED8CF9D63}">
+      <dgm:prSet/>
+      <dgm:spPr/>
+      <dgm:t>
+        <a:bodyPr/>
+        <a:lstStyle/>
+        <a:p>
+          <a:endParaRPr lang="en-US"/>
+        </a:p>
+      </dgm:t>
+    </dgm:pt>
+    <dgm:pt modelId="{7CF634AD-030C-47AB-8C2B-F503FAF60874}">
+      <dgm:prSet/>
+      <dgm:spPr/>
+      <dgm:t>
+        <a:bodyPr/>
+        <a:lstStyle/>
+        <a:p>
+          <a:r>
+            <a:rPr kumimoji="1" lang="en-US"/>
+            <a:t>Android SDK:36.1.0</a:t>
+          </a:r>
+          <a:endParaRPr lang="en-US"/>
+        </a:p>
+      </dgm:t>
+    </dgm:pt>
+    <dgm:pt modelId="{1E710AA1-F3AF-4869-BB6F-215EEBB0B6AD}" type="parTrans" cxnId="{9D26132C-B6AA-434E-86DC-1CEFB1EB8199}">
+      <dgm:prSet/>
+      <dgm:spPr/>
+      <dgm:t>
+        <a:bodyPr/>
+        <a:lstStyle/>
+        <a:p>
+          <a:endParaRPr lang="en-US"/>
+        </a:p>
+      </dgm:t>
+    </dgm:pt>
+    <dgm:pt modelId="{52EA22E9-1DDA-4B28-82D1-A28F490F654B}" type="sibTrans" cxnId="{9D26132C-B6AA-434E-86DC-1CEFB1EB8199}">
+      <dgm:prSet/>
+      <dgm:spPr/>
+      <dgm:t>
+        <a:bodyPr/>
+        <a:lstStyle/>
+        <a:p>
+          <a:endParaRPr lang="en-US"/>
+        </a:p>
+      </dgm:t>
+    </dgm:pt>
+    <dgm:pt modelId="{99660CA2-3DFE-489C-A312-4564CC87F561}">
+      <dgm:prSet/>
+      <dgm:spPr/>
+      <dgm:t>
+        <a:bodyPr/>
+        <a:lstStyle/>
+        <a:p>
+          <a:r>
+            <a:rPr kumimoji="1" lang="en-US"/>
+            <a:t>Flutter:3.35.6</a:t>
+          </a:r>
+          <a:endParaRPr lang="en-US"/>
+        </a:p>
+      </dgm:t>
+    </dgm:pt>
+    <dgm:pt modelId="{65224825-94AC-4ED2-82C5-6DB15B8F637B}" type="parTrans" cxnId="{844D85F0-1F29-4973-8C6B-E1B4EE25CE59}">
+      <dgm:prSet/>
+      <dgm:spPr/>
+      <dgm:t>
+        <a:bodyPr/>
+        <a:lstStyle/>
+        <a:p>
+          <a:endParaRPr lang="en-US"/>
+        </a:p>
+      </dgm:t>
+    </dgm:pt>
+    <dgm:pt modelId="{5FA0481E-7D97-43ED-BD25-21DE87C2D850}" type="sibTrans" cxnId="{844D85F0-1F29-4973-8C6B-E1B4EE25CE59}">
+      <dgm:prSet/>
+      <dgm:spPr/>
+      <dgm:t>
+        <a:bodyPr/>
+        <a:lstStyle/>
+        <a:p>
+          <a:endParaRPr lang="en-US"/>
+        </a:p>
+      </dgm:t>
+    </dgm:pt>
+    <dgm:pt modelId="{18E02408-1ED6-43EE-9504-DB08A5DE70DD}">
+      <dgm:prSet/>
+      <dgm:spPr/>
+      <dgm:t>
+        <a:bodyPr/>
+        <a:lstStyle/>
+        <a:p>
+          <a:r>
+            <a:rPr kumimoji="1" lang="en-US"/>
+            <a:t>Dart:3.9.2</a:t>
+          </a:r>
+          <a:endParaRPr lang="en-US"/>
+        </a:p>
+      </dgm:t>
+    </dgm:pt>
+    <dgm:pt modelId="{6BE36A6D-3062-4447-9BB7-4308B9327604}" type="parTrans" cxnId="{BA19D3B2-2412-4224-9548-08580F7BEFB1}">
+      <dgm:prSet/>
+      <dgm:spPr/>
+      <dgm:t>
+        <a:bodyPr/>
+        <a:lstStyle/>
+        <a:p>
+          <a:endParaRPr lang="en-US"/>
+        </a:p>
+      </dgm:t>
+    </dgm:pt>
+    <dgm:pt modelId="{8A841CA2-305B-422F-A8DF-97D0056BA89E}" type="sibTrans" cxnId="{BA19D3B2-2412-4224-9548-08580F7BEFB1}">
+      <dgm:prSet/>
+      <dgm:spPr/>
+      <dgm:t>
+        <a:bodyPr/>
+        <a:lstStyle/>
+        <a:p>
+          <a:endParaRPr lang="en-US"/>
+        </a:p>
+      </dgm:t>
+    </dgm:pt>
+    <dgm:pt modelId="{DD1BE34E-5BDD-44B1-A4C0-39A1D1852969}" type="pres">
+      <dgm:prSet presAssocID="{F8D06316-BE93-447D-A238-3F65F047D87D}" presName="hierChild1" presStyleCnt="0">
+        <dgm:presLayoutVars>
+          <dgm:chPref val="1"/>
+          <dgm:dir/>
+          <dgm:animOne val="branch"/>
+          <dgm:animLvl val="lvl"/>
+          <dgm:resizeHandles/>
+        </dgm:presLayoutVars>
+      </dgm:prSet>
+      <dgm:spPr/>
+    </dgm:pt>
+    <dgm:pt modelId="{E1699A36-8935-4D79-8A3C-916583C216BF}" type="pres">
+      <dgm:prSet presAssocID="{23F17799-ACEA-4EF6-8865-D3DB6966DD9C}" presName="hierRoot1" presStyleCnt="0"/>
+      <dgm:spPr/>
+    </dgm:pt>
+    <dgm:pt modelId="{BA6D0681-AE09-4F99-9FA2-9956DAF50634}" type="pres">
+      <dgm:prSet presAssocID="{23F17799-ACEA-4EF6-8865-D3DB6966DD9C}" presName="composite" presStyleCnt="0"/>
+      <dgm:spPr/>
+    </dgm:pt>
+    <dgm:pt modelId="{CE33BE05-8F4E-4731-8120-B414B8844F89}" type="pres">
+      <dgm:prSet presAssocID="{23F17799-ACEA-4EF6-8865-D3DB6966DD9C}" presName="background" presStyleLbl="node0" presStyleIdx="0" presStyleCnt="4"/>
+      <dgm:spPr/>
+    </dgm:pt>
+    <dgm:pt modelId="{1E8B8720-488D-44E8-80BF-BF0E2DE95C77}" type="pres">
+      <dgm:prSet presAssocID="{23F17799-ACEA-4EF6-8865-D3DB6966DD9C}" presName="text" presStyleLbl="fgAcc0" presStyleIdx="0" presStyleCnt="4">
+        <dgm:presLayoutVars>
+          <dgm:chPref val="3"/>
+        </dgm:presLayoutVars>
+      </dgm:prSet>
+      <dgm:spPr/>
+    </dgm:pt>
+    <dgm:pt modelId="{F3CBA4C6-3A39-456E-9C56-D37C2061924C}" type="pres">
+      <dgm:prSet presAssocID="{23F17799-ACEA-4EF6-8865-D3DB6966DD9C}" presName="hierChild2" presStyleCnt="0"/>
+      <dgm:spPr/>
+    </dgm:pt>
+    <dgm:pt modelId="{12241544-491E-4243-BD00-F32884EDA65F}" type="pres">
+      <dgm:prSet presAssocID="{7CF634AD-030C-47AB-8C2B-F503FAF60874}" presName="hierRoot1" presStyleCnt="0"/>
+      <dgm:spPr/>
+    </dgm:pt>
+    <dgm:pt modelId="{F7D16317-4D4E-4EF8-BEE5-709340D74609}" type="pres">
+      <dgm:prSet presAssocID="{7CF634AD-030C-47AB-8C2B-F503FAF60874}" presName="composite" presStyleCnt="0"/>
+      <dgm:spPr/>
+    </dgm:pt>
+    <dgm:pt modelId="{D2411782-8B33-4665-B950-125CDCC848D9}" type="pres">
+      <dgm:prSet presAssocID="{7CF634AD-030C-47AB-8C2B-F503FAF60874}" presName="background" presStyleLbl="node0" presStyleIdx="1" presStyleCnt="4"/>
+      <dgm:spPr/>
+    </dgm:pt>
+    <dgm:pt modelId="{D0457C55-BD64-467F-B7E2-52D7C45C6C15}" type="pres">
+      <dgm:prSet presAssocID="{7CF634AD-030C-47AB-8C2B-F503FAF60874}" presName="text" presStyleLbl="fgAcc0" presStyleIdx="1" presStyleCnt="4">
+        <dgm:presLayoutVars>
+          <dgm:chPref val="3"/>
+        </dgm:presLayoutVars>
+      </dgm:prSet>
+      <dgm:spPr/>
+    </dgm:pt>
+    <dgm:pt modelId="{4E8E0374-8763-4EF1-A955-357A2187F53A}" type="pres">
+      <dgm:prSet presAssocID="{7CF634AD-030C-47AB-8C2B-F503FAF60874}" presName="hierChild2" presStyleCnt="0"/>
+      <dgm:spPr/>
+    </dgm:pt>
+    <dgm:pt modelId="{E5BA4DE2-6336-4C7D-9D3C-972CF9C4EAD2}" type="pres">
+      <dgm:prSet presAssocID="{99660CA2-3DFE-489C-A312-4564CC87F561}" presName="hierRoot1" presStyleCnt="0"/>
+      <dgm:spPr/>
+    </dgm:pt>
+    <dgm:pt modelId="{D1C48940-200A-4CF4-A409-234CB9E3C205}" type="pres">
+      <dgm:prSet presAssocID="{99660CA2-3DFE-489C-A312-4564CC87F561}" presName="composite" presStyleCnt="0"/>
+      <dgm:spPr/>
+    </dgm:pt>
+    <dgm:pt modelId="{88BD83B2-679D-405B-8AAB-C661569543C1}" type="pres">
+      <dgm:prSet presAssocID="{99660CA2-3DFE-489C-A312-4564CC87F561}" presName="background" presStyleLbl="node0" presStyleIdx="2" presStyleCnt="4"/>
+      <dgm:spPr/>
+    </dgm:pt>
+    <dgm:pt modelId="{49CC765B-24B2-4371-9139-3B2B13870B71}" type="pres">
+      <dgm:prSet presAssocID="{99660CA2-3DFE-489C-A312-4564CC87F561}" presName="text" presStyleLbl="fgAcc0" presStyleIdx="2" presStyleCnt="4">
+        <dgm:presLayoutVars>
+          <dgm:chPref val="3"/>
+        </dgm:presLayoutVars>
+      </dgm:prSet>
+      <dgm:spPr/>
+    </dgm:pt>
+    <dgm:pt modelId="{E94430B7-F5BE-47B6-8BBE-AB7F4579C3AF}" type="pres">
+      <dgm:prSet presAssocID="{99660CA2-3DFE-489C-A312-4564CC87F561}" presName="hierChild2" presStyleCnt="0"/>
+      <dgm:spPr/>
+    </dgm:pt>
+    <dgm:pt modelId="{AACF7BA5-6BD3-42AF-96D9-DAD7311C0A0D}" type="pres">
+      <dgm:prSet presAssocID="{18E02408-1ED6-43EE-9504-DB08A5DE70DD}" presName="hierRoot1" presStyleCnt="0"/>
+      <dgm:spPr/>
+    </dgm:pt>
+    <dgm:pt modelId="{8DC66A4C-F498-4D82-A280-F087BF7A872B}" type="pres">
+      <dgm:prSet presAssocID="{18E02408-1ED6-43EE-9504-DB08A5DE70DD}" presName="composite" presStyleCnt="0"/>
+      <dgm:spPr/>
+    </dgm:pt>
+    <dgm:pt modelId="{86056DB4-D82D-4FCC-9C2D-C149C6231201}" type="pres">
+      <dgm:prSet presAssocID="{18E02408-1ED6-43EE-9504-DB08A5DE70DD}" presName="background" presStyleLbl="node0" presStyleIdx="3" presStyleCnt="4"/>
+      <dgm:spPr/>
+    </dgm:pt>
+    <dgm:pt modelId="{54A8B0C9-0F52-448A-A97B-6E3B59FA9E77}" type="pres">
+      <dgm:prSet presAssocID="{18E02408-1ED6-43EE-9504-DB08A5DE70DD}" presName="text" presStyleLbl="fgAcc0" presStyleIdx="3" presStyleCnt="4">
+        <dgm:presLayoutVars>
+          <dgm:chPref val="3"/>
+        </dgm:presLayoutVars>
+      </dgm:prSet>
+      <dgm:spPr/>
+    </dgm:pt>
+    <dgm:pt modelId="{6163CDF2-B45F-40F1-B0CF-2F69FC48D273}" type="pres">
+      <dgm:prSet presAssocID="{18E02408-1ED6-43EE-9504-DB08A5DE70DD}" presName="hierChild2" presStyleCnt="0"/>
+      <dgm:spPr/>
+    </dgm:pt>
+  </dgm:ptLst>
+  <dgm:cxnLst>
+    <dgm:cxn modelId="{9D26132C-B6AA-434E-86DC-1CEFB1EB8199}" srcId="{F8D06316-BE93-447D-A238-3F65F047D87D}" destId="{7CF634AD-030C-47AB-8C2B-F503FAF60874}" srcOrd="1" destOrd="0" parTransId="{1E710AA1-F3AF-4869-BB6F-215EEBB0B6AD}" sibTransId="{52EA22E9-1DDA-4B28-82D1-A28F490F654B}"/>
+    <dgm:cxn modelId="{FB85526B-EF82-43DA-B1FA-7E4B8D04955E}" type="presOf" srcId="{7CF634AD-030C-47AB-8C2B-F503FAF60874}" destId="{D0457C55-BD64-467F-B7E2-52D7C45C6C15}" srcOrd="0" destOrd="0" presId="urn:microsoft.com/office/officeart/2005/8/layout/hierarchy1"/>
+    <dgm:cxn modelId="{B208ED54-061A-485E-9686-D96ED8CF9D63}" srcId="{F8D06316-BE93-447D-A238-3F65F047D87D}" destId="{23F17799-ACEA-4EF6-8865-D3DB6966DD9C}" srcOrd="0" destOrd="0" parTransId="{103E48A3-7AD5-4439-B86A-DF086D9BA7B6}" sibTransId="{245ABC37-F644-4F95-864B-760503060E55}"/>
+    <dgm:cxn modelId="{F0ED5358-1140-46F8-88DA-73DF800C3418}" type="presOf" srcId="{F8D06316-BE93-447D-A238-3F65F047D87D}" destId="{DD1BE34E-5BDD-44B1-A4C0-39A1D1852969}" srcOrd="0" destOrd="0" presId="urn:microsoft.com/office/officeart/2005/8/layout/hierarchy1"/>
+    <dgm:cxn modelId="{3FBDE859-B561-486D-8780-B9D731781402}" type="presOf" srcId="{23F17799-ACEA-4EF6-8865-D3DB6966DD9C}" destId="{1E8B8720-488D-44E8-80BF-BF0E2DE95C77}" srcOrd="0" destOrd="0" presId="urn:microsoft.com/office/officeart/2005/8/layout/hierarchy1"/>
+    <dgm:cxn modelId="{BA19D3B2-2412-4224-9548-08580F7BEFB1}" srcId="{F8D06316-BE93-447D-A238-3F65F047D87D}" destId="{18E02408-1ED6-43EE-9504-DB08A5DE70DD}" srcOrd="3" destOrd="0" parTransId="{6BE36A6D-3062-4447-9BB7-4308B9327604}" sibTransId="{8A841CA2-305B-422F-A8DF-97D0056BA89E}"/>
+    <dgm:cxn modelId="{9E5E42BE-791B-4ABC-BB7D-5AC2E46B1042}" type="presOf" srcId="{99660CA2-3DFE-489C-A312-4564CC87F561}" destId="{49CC765B-24B2-4371-9139-3B2B13870B71}" srcOrd="0" destOrd="0" presId="urn:microsoft.com/office/officeart/2005/8/layout/hierarchy1"/>
+    <dgm:cxn modelId="{81DE5DD4-1490-45A9-8448-F3503C141FDC}" type="presOf" srcId="{18E02408-1ED6-43EE-9504-DB08A5DE70DD}" destId="{54A8B0C9-0F52-448A-A97B-6E3B59FA9E77}" srcOrd="0" destOrd="0" presId="urn:microsoft.com/office/officeart/2005/8/layout/hierarchy1"/>
+    <dgm:cxn modelId="{844D85F0-1F29-4973-8C6B-E1B4EE25CE59}" srcId="{F8D06316-BE93-447D-A238-3F65F047D87D}" destId="{99660CA2-3DFE-489C-A312-4564CC87F561}" srcOrd="2" destOrd="0" parTransId="{65224825-94AC-4ED2-82C5-6DB15B8F637B}" sibTransId="{5FA0481E-7D97-43ED-BD25-21DE87C2D850}"/>
+    <dgm:cxn modelId="{828704BA-054E-4E1D-860B-B5770CEAA0B0}" type="presParOf" srcId="{DD1BE34E-5BDD-44B1-A4C0-39A1D1852969}" destId="{E1699A36-8935-4D79-8A3C-916583C216BF}" srcOrd="0" destOrd="0" presId="urn:microsoft.com/office/officeart/2005/8/layout/hierarchy1"/>
+    <dgm:cxn modelId="{70E2D96F-9669-4D8A-BA50-628541D86CDD}" type="presParOf" srcId="{E1699A36-8935-4D79-8A3C-916583C216BF}" destId="{BA6D0681-AE09-4F99-9FA2-9956DAF50634}" srcOrd="0" destOrd="0" presId="urn:microsoft.com/office/officeart/2005/8/layout/hierarchy1"/>
+    <dgm:cxn modelId="{9E91EA22-F312-400E-B0D1-1B37DE448816}" type="presParOf" srcId="{BA6D0681-AE09-4F99-9FA2-9956DAF50634}" destId="{CE33BE05-8F4E-4731-8120-B414B8844F89}" srcOrd="0" destOrd="0" presId="urn:microsoft.com/office/officeart/2005/8/layout/hierarchy1"/>
+    <dgm:cxn modelId="{50E2E2D0-984F-4284-95A0-F5D7D534FA38}" type="presParOf" srcId="{BA6D0681-AE09-4F99-9FA2-9956DAF50634}" destId="{1E8B8720-488D-44E8-80BF-BF0E2DE95C77}" srcOrd="1" destOrd="0" presId="urn:microsoft.com/office/officeart/2005/8/layout/hierarchy1"/>
+    <dgm:cxn modelId="{F2139CA0-E4DD-4E81-92BE-4A82A13FA2AA}" type="presParOf" srcId="{E1699A36-8935-4D79-8A3C-916583C216BF}" destId="{F3CBA4C6-3A39-456E-9C56-D37C2061924C}" srcOrd="1" destOrd="0" presId="urn:microsoft.com/office/officeart/2005/8/layout/hierarchy1"/>
+    <dgm:cxn modelId="{D79B728B-BB13-48F4-952C-77193D107BD8}" type="presParOf" srcId="{DD1BE34E-5BDD-44B1-A4C0-39A1D1852969}" destId="{12241544-491E-4243-BD00-F32884EDA65F}" srcOrd="1" destOrd="0" presId="urn:microsoft.com/office/officeart/2005/8/layout/hierarchy1"/>
+    <dgm:cxn modelId="{58121B27-D28C-47EA-9949-2AD7CCAD323D}" type="presParOf" srcId="{12241544-491E-4243-BD00-F32884EDA65F}" destId="{F7D16317-4D4E-4EF8-BEE5-709340D74609}" srcOrd="0" destOrd="0" presId="urn:microsoft.com/office/officeart/2005/8/layout/hierarchy1"/>
+    <dgm:cxn modelId="{475BAF82-C17B-4739-9B53-45BA6C7E08EF}" type="presParOf" srcId="{F7D16317-4D4E-4EF8-BEE5-709340D74609}" destId="{D2411782-8B33-4665-B950-125CDCC848D9}" srcOrd="0" destOrd="0" presId="urn:microsoft.com/office/officeart/2005/8/layout/hierarchy1"/>
+    <dgm:cxn modelId="{C4F6611E-6FAF-48DF-B574-7DD9927AC876}" type="presParOf" srcId="{F7D16317-4D4E-4EF8-BEE5-709340D74609}" destId="{D0457C55-BD64-467F-B7E2-52D7C45C6C15}" srcOrd="1" destOrd="0" presId="urn:microsoft.com/office/officeart/2005/8/layout/hierarchy1"/>
+    <dgm:cxn modelId="{121E959A-AAAB-45FD-A1AB-E46E48D69A5A}" type="presParOf" srcId="{12241544-491E-4243-BD00-F32884EDA65F}" destId="{4E8E0374-8763-4EF1-A955-357A2187F53A}" srcOrd="1" destOrd="0" presId="urn:microsoft.com/office/officeart/2005/8/layout/hierarchy1"/>
+    <dgm:cxn modelId="{3E6C98EF-E10F-4016-BC4A-976CD5A4CF14}" type="presParOf" srcId="{DD1BE34E-5BDD-44B1-A4C0-39A1D1852969}" destId="{E5BA4DE2-6336-4C7D-9D3C-972CF9C4EAD2}" srcOrd="2" destOrd="0" presId="urn:microsoft.com/office/officeart/2005/8/layout/hierarchy1"/>
+    <dgm:cxn modelId="{008598A9-DAB4-4271-BF79-7E8C03B914B2}" type="presParOf" srcId="{E5BA4DE2-6336-4C7D-9D3C-972CF9C4EAD2}" destId="{D1C48940-200A-4CF4-A409-234CB9E3C205}" srcOrd="0" destOrd="0" presId="urn:microsoft.com/office/officeart/2005/8/layout/hierarchy1"/>
+    <dgm:cxn modelId="{87BEB6FF-A325-4C25-BD0A-A39FD238D060}" type="presParOf" srcId="{D1C48940-200A-4CF4-A409-234CB9E3C205}" destId="{88BD83B2-679D-405B-8AAB-C661569543C1}" srcOrd="0" destOrd="0" presId="urn:microsoft.com/office/officeart/2005/8/layout/hierarchy1"/>
+    <dgm:cxn modelId="{2BE94F23-FD07-4EE6-BB2F-03BBD5ED3F3D}" type="presParOf" srcId="{D1C48940-200A-4CF4-A409-234CB9E3C205}" destId="{49CC765B-24B2-4371-9139-3B2B13870B71}" srcOrd="1" destOrd="0" presId="urn:microsoft.com/office/officeart/2005/8/layout/hierarchy1"/>
+    <dgm:cxn modelId="{CD1E416F-9268-462D-A38A-0F2E8E153ED8}" type="presParOf" srcId="{E5BA4DE2-6336-4C7D-9D3C-972CF9C4EAD2}" destId="{E94430B7-F5BE-47B6-8BBE-AB7F4579C3AF}" srcOrd="1" destOrd="0" presId="urn:microsoft.com/office/officeart/2005/8/layout/hierarchy1"/>
+    <dgm:cxn modelId="{3FD4B7C0-7F58-498B-B42A-92AC29366AD7}" type="presParOf" srcId="{DD1BE34E-5BDD-44B1-A4C0-39A1D1852969}" destId="{AACF7BA5-6BD3-42AF-96D9-DAD7311C0A0D}" srcOrd="3" destOrd="0" presId="urn:microsoft.com/office/officeart/2005/8/layout/hierarchy1"/>
+    <dgm:cxn modelId="{B7926D3F-8241-4141-8F83-029442E7F350}" type="presParOf" srcId="{AACF7BA5-6BD3-42AF-96D9-DAD7311C0A0D}" destId="{8DC66A4C-F498-4D82-A280-F087BF7A872B}" srcOrd="0" destOrd="0" presId="urn:microsoft.com/office/officeart/2005/8/layout/hierarchy1"/>
+    <dgm:cxn modelId="{D0DC3965-1EAB-4718-9203-854FA5BE8A41}" type="presParOf" srcId="{8DC66A4C-F498-4D82-A280-F087BF7A872B}" destId="{86056DB4-D82D-4FCC-9C2D-C149C6231201}" srcOrd="0" destOrd="0" presId="urn:microsoft.com/office/officeart/2005/8/layout/hierarchy1"/>
+    <dgm:cxn modelId="{1F3A0A3B-5082-4910-8254-999E3484F5CA}" type="presParOf" srcId="{8DC66A4C-F498-4D82-A280-F087BF7A872B}" destId="{54A8B0C9-0F52-448A-A97B-6E3B59FA9E77}" srcOrd="1" destOrd="0" presId="urn:microsoft.com/office/officeart/2005/8/layout/hierarchy1"/>
+    <dgm:cxn modelId="{820BA22D-2DCE-44ED-AC22-35CA72AF1FBA}" type="presParOf" srcId="{AACF7BA5-6BD3-42AF-96D9-DAD7311C0A0D}" destId="{6163CDF2-B45F-40F1-B0CF-2F69FC48D273}" srcOrd="1" destOrd="0" presId="urn:microsoft.com/office/officeart/2005/8/layout/hierarchy1"/>
+  </dgm:cxnLst>
+  <dgm:bg/>
+  <dgm:whole/>
+  <dgm:extLst>
+    <a:ext uri="http://schemas.microsoft.com/office/drawing/2008/diagram">
+      <dsp:dataModelExt xmlns:dsp="http://schemas.microsoft.com/office/drawing/2008/diagram" relId="rId6" minVer="http://schemas.openxmlformats.org/drawingml/2006/diagram"/>
+    </a:ext>
+  </dgm:extLst>
+</dgm:dataModel>
+</file>
+
+<file path=ppt/diagrams/drawing1.xml><?xml version="1.0" encoding="utf-8"?>
+<dsp:drawing xmlns:dgm="http://schemas.openxmlformats.org/drawingml/2006/diagram" xmlns:dsp="http://schemas.microsoft.com/office/drawing/2008/diagram" xmlns:a="http://schemas.openxmlformats.org/drawingml/2006/main">
+  <dsp:spTree>
+    <dsp:nvGrpSpPr>
+      <dsp:cNvPr id="0" name=""/>
+      <dsp:cNvGrpSpPr/>
+    </dsp:nvGrpSpPr>
+    <dsp:grpSpPr/>
+    <dsp:sp modelId="{CE33BE05-8F4E-4731-8120-B414B8844F89}">
+      <dsp:nvSpPr>
+        <dsp:cNvPr id="0" name=""/>
+        <dsp:cNvSpPr/>
+      </dsp:nvSpPr>
+      <dsp:spPr>
+        <a:xfrm>
+          <a:off x="3040" y="801093"/>
+          <a:ext cx="2170958" cy="1378558"/>
+        </a:xfrm>
+        <a:prstGeom prst="roundRect">
+          <a:avLst>
+            <a:gd name="adj" fmla="val 10000"/>
+          </a:avLst>
+        </a:prstGeom>
+        <a:solidFill>
+          <a:schemeClr val="dk2">
+            <a:hueOff val="0"/>
+            <a:satOff val="0"/>
+            <a:lumOff val="0"/>
+            <a:alphaOff val="0"/>
+          </a:schemeClr>
+        </a:solidFill>
+        <a:ln w="19050" cap="flat" cmpd="sng" algn="ctr">
+          <a:solidFill>
+            <a:schemeClr val="lt2">
+              <a:hueOff val="0"/>
+              <a:satOff val="0"/>
+              <a:lumOff val="0"/>
+              <a:alphaOff val="0"/>
+            </a:schemeClr>
+          </a:solidFill>
+          <a:prstDash val="solid"/>
+          <a:miter lim="800000"/>
+        </a:ln>
+        <a:effectLst/>
+      </dsp:spPr>
+      <dsp:style>
+        <a:lnRef idx="2">
+          <a:scrgbClr r="0" g="0" b="0"/>
+        </a:lnRef>
+        <a:fillRef idx="1">
+          <a:scrgbClr r="0" g="0" b="0"/>
+        </a:fillRef>
+        <a:effectRef idx="0">
+          <a:scrgbClr r="0" g="0" b="0"/>
+        </a:effectRef>
+        <a:fontRef idx="minor">
+          <a:schemeClr val="lt1"/>
+        </a:fontRef>
+      </dsp:style>
+    </dsp:sp>
+    <dsp:sp modelId="{1E8B8720-488D-44E8-80BF-BF0E2DE95C77}">
+      <dsp:nvSpPr>
+        <dsp:cNvPr id="0" name=""/>
+        <dsp:cNvSpPr/>
+      </dsp:nvSpPr>
+      <dsp:spPr>
+        <a:xfrm>
+          <a:off x="244258" y="1030249"/>
+          <a:ext cx="2170958" cy="1378558"/>
+        </a:xfrm>
+        <a:prstGeom prst="roundRect">
+          <a:avLst>
+            <a:gd name="adj" fmla="val 10000"/>
+          </a:avLst>
+        </a:prstGeom>
+        <a:solidFill>
+          <a:schemeClr val="lt2">
+            <a:alpha val="90000"/>
+            <a:hueOff val="0"/>
+            <a:satOff val="0"/>
+            <a:lumOff val="0"/>
+            <a:alphaOff val="0"/>
+          </a:schemeClr>
+        </a:solidFill>
+        <a:ln w="19050" cap="flat" cmpd="sng" algn="ctr">
+          <a:solidFill>
+            <a:schemeClr val="dk2">
+              <a:hueOff val="0"/>
+              <a:satOff val="0"/>
+              <a:lumOff val="0"/>
+              <a:alphaOff val="0"/>
+            </a:schemeClr>
+          </a:solidFill>
+          <a:prstDash val="solid"/>
+          <a:miter lim="800000"/>
+        </a:ln>
+        <a:effectLst/>
+      </dsp:spPr>
+      <dsp:style>
+        <a:lnRef idx="2">
+          <a:scrgbClr r="0" g="0" b="0"/>
+        </a:lnRef>
+        <a:fillRef idx="1">
+          <a:scrgbClr r="0" g="0" b="0"/>
+        </a:fillRef>
+        <a:effectRef idx="0">
+          <a:scrgbClr r="0" g="0" b="0"/>
+        </a:effectRef>
+        <a:fontRef idx="minor"/>
+      </dsp:style>
+      <dsp:txBody>
+        <a:bodyPr spcFirstLastPara="0" vert="horz" wrap="square" lIns="80010" tIns="80010" rIns="80010" bIns="80010" numCol="1" spcCol="1270" anchor="ctr" anchorCtr="0">
+          <a:noAutofit/>
+        </a:bodyPr>
+        <a:lstStyle/>
+        <a:p>
+          <a:pPr marL="0" lvl="0" indent="0" algn="ctr" defTabSz="933450">
+            <a:lnSpc>
+              <a:spcPct val="90000"/>
+            </a:lnSpc>
+            <a:spcBef>
+              <a:spcPct val="0"/>
+            </a:spcBef>
+            <a:spcAft>
+              <a:spcPct val="35000"/>
+            </a:spcAft>
+            <a:buNone/>
+          </a:pPr>
+          <a:r>
+            <a:rPr kumimoji="1" lang="en-US" sz="2100" kern="1200"/>
+            <a:t>VSCode:1.119.0</a:t>
+          </a:r>
+          <a:endParaRPr lang="en-US" sz="2100" kern="1200"/>
+        </a:p>
+      </dsp:txBody>
+      <dsp:txXfrm>
+        <a:off x="284635" y="1070626"/>
+        <a:ext cx="2090204" cy="1297804"/>
+      </dsp:txXfrm>
+    </dsp:sp>
+    <dsp:sp modelId="{D2411782-8B33-4665-B950-125CDCC848D9}">
+      <dsp:nvSpPr>
+        <dsp:cNvPr id="0" name=""/>
+        <dsp:cNvSpPr/>
+      </dsp:nvSpPr>
+      <dsp:spPr>
+        <a:xfrm>
+          <a:off x="2656434" y="801093"/>
+          <a:ext cx="2170958" cy="1378558"/>
+        </a:xfrm>
+        <a:prstGeom prst="roundRect">
+          <a:avLst>
+            <a:gd name="adj" fmla="val 10000"/>
+          </a:avLst>
+        </a:prstGeom>
+        <a:solidFill>
+          <a:schemeClr val="dk2">
+            <a:hueOff val="0"/>
+            <a:satOff val="0"/>
+            <a:lumOff val="0"/>
+            <a:alphaOff val="0"/>
+          </a:schemeClr>
+        </a:solidFill>
+        <a:ln w="19050" cap="flat" cmpd="sng" algn="ctr">
+          <a:solidFill>
+            <a:schemeClr val="lt2">
+              <a:hueOff val="0"/>
+              <a:satOff val="0"/>
+              <a:lumOff val="0"/>
+              <a:alphaOff val="0"/>
+            </a:schemeClr>
+          </a:solidFill>
+          <a:prstDash val="solid"/>
+          <a:miter lim="800000"/>
+        </a:ln>
+        <a:effectLst/>
+      </dsp:spPr>
+      <dsp:style>
+        <a:lnRef idx="2">
+          <a:scrgbClr r="0" g="0" b="0"/>
+        </a:lnRef>
+        <a:fillRef idx="1">
+          <a:scrgbClr r="0" g="0" b="0"/>
+        </a:fillRef>
+        <a:effectRef idx="0">
+          <a:scrgbClr r="0" g="0" b="0"/>
+        </a:effectRef>
+        <a:fontRef idx="minor">
+          <a:schemeClr val="lt1"/>
+        </a:fontRef>
+      </dsp:style>
+    </dsp:sp>
+    <dsp:sp modelId="{D0457C55-BD64-467F-B7E2-52D7C45C6C15}">
+      <dsp:nvSpPr>
+        <dsp:cNvPr id="0" name=""/>
+        <dsp:cNvSpPr/>
+      </dsp:nvSpPr>
+      <dsp:spPr>
+        <a:xfrm>
+          <a:off x="2897652" y="1030249"/>
+          <a:ext cx="2170958" cy="1378558"/>
+        </a:xfrm>
+        <a:prstGeom prst="roundRect">
+          <a:avLst>
+            <a:gd name="adj" fmla="val 10000"/>
+          </a:avLst>
+        </a:prstGeom>
+        <a:solidFill>
+          <a:schemeClr val="lt2">
+            <a:alpha val="90000"/>
+            <a:hueOff val="0"/>
+            <a:satOff val="0"/>
+            <a:lumOff val="0"/>
+            <a:alphaOff val="0"/>
+          </a:schemeClr>
+        </a:solidFill>
+        <a:ln w="19050" cap="flat" cmpd="sng" algn="ctr">
+          <a:solidFill>
+            <a:schemeClr val="dk2">
+              <a:hueOff val="0"/>
+              <a:satOff val="0"/>
+              <a:lumOff val="0"/>
+              <a:alphaOff val="0"/>
+            </a:schemeClr>
+          </a:solidFill>
+          <a:prstDash val="solid"/>
+          <a:miter lim="800000"/>
+        </a:ln>
+        <a:effectLst/>
+      </dsp:spPr>
+      <dsp:style>
+        <a:lnRef idx="2">
+          <a:scrgbClr r="0" g="0" b="0"/>
+        </a:lnRef>
+        <a:fillRef idx="1">
+          <a:scrgbClr r="0" g="0" b="0"/>
+        </a:fillRef>
+        <a:effectRef idx="0">
+          <a:scrgbClr r="0" g="0" b="0"/>
+        </a:effectRef>
+        <a:fontRef idx="minor"/>
+      </dsp:style>
+      <dsp:txBody>
+        <a:bodyPr spcFirstLastPara="0" vert="horz" wrap="square" lIns="80010" tIns="80010" rIns="80010" bIns="80010" numCol="1" spcCol="1270" anchor="ctr" anchorCtr="0">
+          <a:noAutofit/>
+        </a:bodyPr>
+        <a:lstStyle/>
+        <a:p>
+          <a:pPr marL="0" lvl="0" indent="0" algn="ctr" defTabSz="933450">
+            <a:lnSpc>
+              <a:spcPct val="90000"/>
+            </a:lnSpc>
+            <a:spcBef>
+              <a:spcPct val="0"/>
+            </a:spcBef>
+            <a:spcAft>
+              <a:spcPct val="35000"/>
+            </a:spcAft>
+            <a:buNone/>
+          </a:pPr>
+          <a:r>
+            <a:rPr kumimoji="1" lang="en-US" sz="2100" kern="1200"/>
+            <a:t>Android SDK:36.1.0</a:t>
+          </a:r>
+          <a:endParaRPr lang="en-US" sz="2100" kern="1200"/>
+        </a:p>
+      </dsp:txBody>
+      <dsp:txXfrm>
+        <a:off x="2938029" y="1070626"/>
+        <a:ext cx="2090204" cy="1297804"/>
+      </dsp:txXfrm>
+    </dsp:sp>
+    <dsp:sp modelId="{88BD83B2-679D-405B-8AAB-C661569543C1}">
+      <dsp:nvSpPr>
+        <dsp:cNvPr id="0" name=""/>
+        <dsp:cNvSpPr/>
+      </dsp:nvSpPr>
+      <dsp:spPr>
+        <a:xfrm>
+          <a:off x="5309828" y="801093"/>
+          <a:ext cx="2170958" cy="1378558"/>
+        </a:xfrm>
+        <a:prstGeom prst="roundRect">
+          <a:avLst>
+            <a:gd name="adj" fmla="val 10000"/>
+          </a:avLst>
+        </a:prstGeom>
+        <a:solidFill>
+          <a:schemeClr val="dk2">
+            <a:hueOff val="0"/>
+            <a:satOff val="0"/>
+            <a:lumOff val="0"/>
+            <a:alphaOff val="0"/>
+          </a:schemeClr>
+        </a:solidFill>
+        <a:ln w="19050" cap="flat" cmpd="sng" algn="ctr">
+          <a:solidFill>
+            <a:schemeClr val="lt2">
+              <a:hueOff val="0"/>
+              <a:satOff val="0"/>
+              <a:lumOff val="0"/>
+              <a:alphaOff val="0"/>
+            </a:schemeClr>
+          </a:solidFill>
+          <a:prstDash val="solid"/>
+          <a:miter lim="800000"/>
+        </a:ln>
+        <a:effectLst/>
+      </dsp:spPr>
+      <dsp:style>
+        <a:lnRef idx="2">
+          <a:scrgbClr r="0" g="0" b="0"/>
+        </a:lnRef>
+        <a:fillRef idx="1">
+          <a:scrgbClr r="0" g="0" b="0"/>
+        </a:fillRef>
+        <a:effectRef idx="0">
+          <a:scrgbClr r="0" g="0" b="0"/>
+        </a:effectRef>
+        <a:fontRef idx="minor">
+          <a:schemeClr val="lt1"/>
+        </a:fontRef>
+      </dsp:style>
+    </dsp:sp>
+    <dsp:sp modelId="{49CC765B-24B2-4371-9139-3B2B13870B71}">
+      <dsp:nvSpPr>
+        <dsp:cNvPr id="0" name=""/>
+        <dsp:cNvSpPr/>
+      </dsp:nvSpPr>
+      <dsp:spPr>
+        <a:xfrm>
+          <a:off x="5551046" y="1030249"/>
+          <a:ext cx="2170958" cy="1378558"/>
+        </a:xfrm>
+        <a:prstGeom prst="roundRect">
+          <a:avLst>
+            <a:gd name="adj" fmla="val 10000"/>
+          </a:avLst>
+        </a:prstGeom>
+        <a:solidFill>
+          <a:schemeClr val="lt2">
+            <a:alpha val="90000"/>
+            <a:hueOff val="0"/>
+            <a:satOff val="0"/>
+            <a:lumOff val="0"/>
+            <a:alphaOff val="0"/>
+          </a:schemeClr>
+        </a:solidFill>
+        <a:ln w="19050" cap="flat" cmpd="sng" algn="ctr">
+          <a:solidFill>
+            <a:schemeClr val="dk2">
+              <a:hueOff val="0"/>
+              <a:satOff val="0"/>
+              <a:lumOff val="0"/>
+              <a:alphaOff val="0"/>
+            </a:schemeClr>
+          </a:solidFill>
+          <a:prstDash val="solid"/>
+          <a:miter lim="800000"/>
+        </a:ln>
+        <a:effectLst/>
+      </dsp:spPr>
+      <dsp:style>
+        <a:lnRef idx="2">
+          <a:scrgbClr r="0" g="0" b="0"/>
+        </a:lnRef>
+        <a:fillRef idx="1">
+          <a:scrgbClr r="0" g="0" b="0"/>
+        </a:fillRef>
+        <a:effectRef idx="0">
+          <a:scrgbClr r="0" g="0" b="0"/>
+        </a:effectRef>
+        <a:fontRef idx="minor"/>
+      </dsp:style>
+      <dsp:txBody>
+        <a:bodyPr spcFirstLastPara="0" vert="horz" wrap="square" lIns="80010" tIns="80010" rIns="80010" bIns="80010" numCol="1" spcCol="1270" anchor="ctr" anchorCtr="0">
+          <a:noAutofit/>
+        </a:bodyPr>
+        <a:lstStyle/>
+        <a:p>
+          <a:pPr marL="0" lvl="0" indent="0" algn="ctr" defTabSz="933450">
+            <a:lnSpc>
+              <a:spcPct val="90000"/>
+            </a:lnSpc>
+            <a:spcBef>
+              <a:spcPct val="0"/>
+            </a:spcBef>
+            <a:spcAft>
+              <a:spcPct val="35000"/>
+            </a:spcAft>
+            <a:buNone/>
+          </a:pPr>
+          <a:r>
+            <a:rPr kumimoji="1" lang="en-US" sz="2100" kern="1200"/>
+            <a:t>Flutter:3.35.6</a:t>
+          </a:r>
+          <a:endParaRPr lang="en-US" sz="2100" kern="1200"/>
+        </a:p>
+      </dsp:txBody>
+      <dsp:txXfrm>
+        <a:off x="5591423" y="1070626"/>
+        <a:ext cx="2090204" cy="1297804"/>
+      </dsp:txXfrm>
+    </dsp:sp>
+    <dsp:sp modelId="{86056DB4-D82D-4FCC-9C2D-C149C6231201}">
+      <dsp:nvSpPr>
+        <dsp:cNvPr id="0" name=""/>
+        <dsp:cNvSpPr/>
+      </dsp:nvSpPr>
+      <dsp:spPr>
+        <a:xfrm>
+          <a:off x="7963222" y="801093"/>
+          <a:ext cx="2170958" cy="1378558"/>
+        </a:xfrm>
+        <a:prstGeom prst="roundRect">
+          <a:avLst>
+            <a:gd name="adj" fmla="val 10000"/>
+          </a:avLst>
+        </a:prstGeom>
+        <a:solidFill>
+          <a:schemeClr val="dk2">
+            <a:hueOff val="0"/>
+            <a:satOff val="0"/>
+            <a:lumOff val="0"/>
+            <a:alphaOff val="0"/>
+          </a:schemeClr>
+        </a:solidFill>
+        <a:ln w="19050" cap="flat" cmpd="sng" algn="ctr">
+          <a:solidFill>
+            <a:schemeClr val="lt2">
+              <a:hueOff val="0"/>
+              <a:satOff val="0"/>
+              <a:lumOff val="0"/>
+              <a:alphaOff val="0"/>
+            </a:schemeClr>
+          </a:solidFill>
+          <a:prstDash val="solid"/>
+          <a:miter lim="800000"/>
+        </a:ln>
+        <a:effectLst/>
+      </dsp:spPr>
+      <dsp:style>
+        <a:lnRef idx="2">
+          <a:scrgbClr r="0" g="0" b="0"/>
+        </a:lnRef>
+        <a:fillRef idx="1">
+          <a:scrgbClr r="0" g="0" b="0"/>
+        </a:fillRef>
+        <a:effectRef idx="0">
+          <a:scrgbClr r="0" g="0" b="0"/>
+        </a:effectRef>
+        <a:fontRef idx="minor">
+          <a:schemeClr val="lt1"/>
+        </a:fontRef>
+      </dsp:style>
+    </dsp:sp>
+    <dsp:sp modelId="{54A8B0C9-0F52-448A-A97B-6E3B59FA9E77}">
+      <dsp:nvSpPr>
+        <dsp:cNvPr id="0" name=""/>
+        <dsp:cNvSpPr/>
+      </dsp:nvSpPr>
+      <dsp:spPr>
+        <a:xfrm>
+          <a:off x="8204440" y="1030249"/>
+          <a:ext cx="2170958" cy="1378558"/>
+        </a:xfrm>
+        <a:prstGeom prst="roundRect">
+          <a:avLst>
+            <a:gd name="adj" fmla="val 10000"/>
+          </a:avLst>
+        </a:prstGeom>
+        <a:solidFill>
+          <a:schemeClr val="lt2">
+            <a:alpha val="90000"/>
+            <a:hueOff val="0"/>
+            <a:satOff val="0"/>
+            <a:lumOff val="0"/>
+            <a:alphaOff val="0"/>
+          </a:schemeClr>
+        </a:solidFill>
+        <a:ln w="19050" cap="flat" cmpd="sng" algn="ctr">
+          <a:solidFill>
+            <a:schemeClr val="dk2">
+              <a:hueOff val="0"/>
+              <a:satOff val="0"/>
+              <a:lumOff val="0"/>
+              <a:alphaOff val="0"/>
+            </a:schemeClr>
+          </a:solidFill>
+          <a:prstDash val="solid"/>
+          <a:miter lim="800000"/>
+        </a:ln>
+        <a:effectLst/>
+      </dsp:spPr>
+      <dsp:style>
+        <a:lnRef idx="2">
+          <a:scrgbClr r="0" g="0" b="0"/>
+        </a:lnRef>
+        <a:fillRef idx="1">
+          <a:scrgbClr r="0" g="0" b="0"/>
+        </a:fillRef>
+        <a:effectRef idx="0">
+          <a:scrgbClr r="0" g="0" b="0"/>
+        </a:effectRef>
+        <a:fontRef idx="minor"/>
+      </dsp:style>
+      <dsp:txBody>
+        <a:bodyPr spcFirstLastPara="0" vert="horz" wrap="square" lIns="80010" tIns="80010" rIns="80010" bIns="80010" numCol="1" spcCol="1270" anchor="ctr" anchorCtr="0">
+          <a:noAutofit/>
+        </a:bodyPr>
+        <a:lstStyle/>
+        <a:p>
+          <a:pPr marL="0" lvl="0" indent="0" algn="ctr" defTabSz="933450">
+            <a:lnSpc>
+              <a:spcPct val="90000"/>
+            </a:lnSpc>
+            <a:spcBef>
+              <a:spcPct val="0"/>
+            </a:spcBef>
+            <a:spcAft>
+              <a:spcPct val="35000"/>
+            </a:spcAft>
+            <a:buNone/>
+          </a:pPr>
+          <a:r>
+            <a:rPr kumimoji="1" lang="en-US" sz="2100" kern="1200"/>
+            <a:t>Dart:3.9.2</a:t>
+          </a:r>
+          <a:endParaRPr lang="en-US" sz="2100" kern="1200"/>
+        </a:p>
+      </dsp:txBody>
+      <dsp:txXfrm>
+        <a:off x="8244817" y="1070626"/>
+        <a:ext cx="2090204" cy="1297804"/>
+      </dsp:txXfrm>
+    </dsp:sp>
+  </dsp:spTree>
+</dsp:drawing>
+</file>
+
+<file path=ppt/diagrams/layout1.xml><?xml version="1.0" encoding="utf-8"?>
+<dgm:layoutDef xmlns:dgm="http://schemas.openxmlformats.org/drawingml/2006/diagram" xmlns:a="http://schemas.openxmlformats.org/drawingml/2006/main" uniqueId="urn:microsoft.com/office/officeart/2005/8/layout/hierarchy1">
+  <dgm:title val=""/>
+  <dgm:desc val=""/>
+  <dgm:catLst>
+    <dgm:cat type="hierarchy" pri="2000"/>
+  </dgm:catLst>
+  <dgm:sampData>
+    <dgm:dataModel>
+      <dgm:ptLst>
+        <dgm:pt modelId="0" type="doc"/>
+        <dgm:pt modelId="1">
+          <dgm:prSet phldr="1"/>
+        </dgm:pt>
+        <dgm:pt modelId="2">
+          <dgm:prSet phldr="1"/>
+        </dgm:pt>
+        <dgm:pt modelId="21">
+          <dgm:prSet phldr="1"/>
+        </dgm:pt>
+        <dgm:pt modelId="22">
+          <dgm:prSet phldr="1"/>
+        </dgm:pt>
+        <dgm:pt modelId="3">
+          <dgm:prSet phldr="1"/>
+        </dgm:pt>
+        <dgm:pt modelId="31">
+          <dgm:prSet phldr="1"/>
+        </dgm:pt>
+      </dgm:ptLst>
+      <dgm:cxnLst>
+        <dgm:cxn modelId="4" srcId="0" destId="1" srcOrd="0" destOrd="0"/>
+        <dgm:cxn modelId="5" srcId="1" destId="2" srcOrd="0" destOrd="0"/>
+        <dgm:cxn modelId="6" srcId="1" destId="3" srcOrd="1" destOrd="0"/>
+        <dgm:cxn modelId="23" srcId="2" destId="21" srcOrd="0" destOrd="0"/>
+        <dgm:cxn modelId="24" srcId="2" destId="22" srcOrd="1" destOrd="0"/>
+        <dgm:cxn modelId="33" srcId="3" destId="31" srcOrd="0" destOrd="0"/>
+      </dgm:cxnLst>
+      <dgm:bg/>
+      <dgm:whole/>
+    </dgm:dataModel>
+  </dgm:sampData>
+  <dgm:styleData>
+    <dgm:dataModel>
+      <dgm:ptLst>
+        <dgm:pt modelId="0" type="doc"/>
+        <dgm:pt modelId="1"/>
+        <dgm:pt modelId="11"/>
+        <dgm:pt modelId="12"/>
+      </dgm:ptLst>
+      <dgm:cxnLst>
+        <dgm:cxn modelId="2" srcId="0" destId="1" srcOrd="0" destOrd="0"/>
+        <dgm:cxn modelId="13" srcId="1" destId="11" srcOrd="0" destOrd="0"/>
+        <dgm:cxn modelId="14" srcId="1" destId="12" srcOrd="1" destOrd="0"/>
+      </dgm:cxnLst>
+      <dgm:bg/>
+      <dgm:whole/>
+    </dgm:dataModel>
+  </dgm:styleData>
+  <dgm:clrData>
+    <dgm:dataModel>
+      <dgm:ptLst>
+        <dgm:pt modelId="0" type="doc"/>
+        <dgm:pt modelId="1"/>
+        <dgm:pt modelId="2"/>
+        <dgm:pt modelId="21"/>
+        <dgm:pt modelId="211"/>
+        <dgm:pt modelId="3"/>
+        <dgm:pt modelId="31"/>
+        <dgm:pt modelId="311"/>
+      </dgm:ptLst>
+      <dgm:cxnLst>
+        <dgm:cxn modelId="4" srcId="0" destId="1" srcOrd="0" destOrd="0"/>
+        <dgm:cxn modelId="5" srcId="1" destId="2" srcOrd="0" destOrd="0"/>
+        <dgm:cxn modelId="6" srcId="1" destId="3" srcOrd="1" destOrd="0"/>
+        <dgm:cxn modelId="23" srcId="2" destId="21" srcOrd="0" destOrd="0"/>
+        <dgm:cxn modelId="24" srcId="21" destId="211" srcOrd="0" destOrd="0"/>
+        <dgm:cxn modelId="33" srcId="3" destId="31" srcOrd="0" destOrd="0"/>
+        <dgm:cxn modelId="34" srcId="31" destId="311" srcOrd="0" destOrd="0"/>
+      </dgm:cxnLst>
+      <dgm:bg/>
+      <dgm:whole/>
+    </dgm:dataModel>
+  </dgm:clrData>
+  <dgm:layoutNode name="hierChild1">
+    <dgm:varLst>
+      <dgm:chPref val="1"/>
+      <dgm:dir/>
+      <dgm:animOne val="branch"/>
+      <dgm:animLvl val="lvl"/>
+      <dgm:resizeHandles/>
+    </dgm:varLst>
+    <dgm:choose name="Name0">
+      <dgm:if name="Name1" func="var" arg="dir" op="equ" val="norm">
+        <dgm:alg type="hierChild">
+          <dgm:param type="linDir" val="fromL"/>
+        </dgm:alg>
+      </dgm:if>
+      <dgm:else name="Name2">
+        <dgm:alg type="hierChild">
+          <dgm:param type="linDir" val="fromR"/>
+        </dgm:alg>
+      </dgm:else>
+    </dgm:choose>
+    <dgm:shape xmlns:r="http://schemas.openxmlformats.org/officeDocument/2006/relationships" r:blip="">
+      <dgm:adjLst/>
+    </dgm:shape>
+    <dgm:presOf/>
+    <dgm:constrLst>
+      <dgm:constr type="primFontSz" for="des" ptType="node" op="equ" val="65"/>
+      <dgm:constr type="w" for="des" forName="composite" refType="w"/>
+      <dgm:constr type="h" for="des" forName="composite" refType="w" refFor="des" refForName="composite" fact="0.667"/>
+      <dgm:constr type="w" for="des" forName="composite2" refType="w" refFor="des" refForName="composite"/>
+      <dgm:constr type="h" for="des" forName="composite2" refType="h" refFor="des" refForName="composite"/>
+      <dgm:constr type="w" for="des" forName="composite3" refType="w" refFor="des" refForName="composite"/>
+      <dgm:constr type="h" for="des" forName="composite3" refType="h" refFor="des" refForName="composite"/>
+      <dgm:constr type="w" for="des" forName="composite4" refType="w" refFor="des" refForName="composite"/>
+      <dgm:constr type="h" for="des" forName="composite4" refType="h" refFor="des" refForName="composite"/>
+      <dgm:constr type="w" for="des" forName="composite5" refType="w" refFor="des" refForName="composite"/>
+      <dgm:constr type="h" for="des" forName="composite5" refType="h" refFor="des" refForName="composite"/>
+      <dgm:constr type="sibSp" refType="w" refFor="des" refForName="composite" fact="0.1"/>
+      <dgm:constr type="sibSp" for="des" forName="hierChild2" refType="sibSp"/>
+      <dgm:constr type="sibSp" for="des" forName="hierChild3" refType="sibSp"/>
+      <dgm:constr type="sibSp" for="des" forName="hierChild4" refType="sibSp"/>
+      <dgm:constr type="sibSp" for="des" forName="hierChild5" refType="sibSp"/>
+      <dgm:constr type="sibSp" for="des" forName="hierChild6" refType="sibSp"/>
+      <dgm:constr type="sp" for="des" forName="hierRoot1" refType="h" refFor="des" refForName="composite" fact="0.25"/>
+      <dgm:constr type="sp" for="des" forName="hierRoot2" refType="sp" refFor="des" refForName="hierRoot1"/>
+      <dgm:constr type="sp" for="des" forName="hierRoot3" refType="sp" refFor="des" refForName="hierRoot1"/>
+      <dgm:constr type="sp" for="des" forName="hierRoot4" refType="sp" refFor="des" refForName="hierRoot1"/>
+      <dgm:constr type="sp" for="des" forName="hierRoot5" refType="sp" refFor="des" refForName="hierRoot1"/>
+    </dgm:constrLst>
+    <dgm:ruleLst/>
+    <dgm:forEach name="Name3" axis="ch">
+      <dgm:forEach name="Name4" axis="self" ptType="node">
+        <dgm:layoutNode name="hierRoot1">
+          <dgm:alg type="hierRoot"/>
+          <dgm:shape xmlns:r="http://schemas.openxmlformats.org/officeDocument/2006/relationships" r:blip="">
+            <dgm:adjLst/>
+          </dgm:shape>
+          <dgm:presOf/>
+          <dgm:constrLst>
+            <dgm:constr type="bendDist" for="des" ptType="parTrans" refType="sp" fact="0.5"/>
+          </dgm:constrLst>
+          <dgm:ruleLst/>
+          <dgm:layoutNode name="composite">
+            <dgm:alg type="composite"/>
+            <dgm:shape xmlns:r="http://schemas.openxmlformats.org/officeDocument/2006/relationships" r:blip="">
+              <dgm:adjLst/>
+            </dgm:shape>
+            <dgm:presOf/>
+            <dgm:constrLst>
+              <dgm:constr type="w" for="ch" forName="background" refType="w" fact="0.9"/>
+              <dgm:constr type="h" for="ch" forName="background" refType="w" refFor="ch" refForName="background" fact="0.635"/>
+              <dgm:constr type="t" for="ch" forName="background"/>
+              <dgm:constr type="l" for="ch" forName="background"/>
+              <dgm:constr type="w" for="ch" forName="text" refType="w" fact="0.9"/>
+              <dgm:constr type="h" for="ch" forName="text" refType="w" refFor="ch" refForName="text" fact="0.635"/>
+              <dgm:constr type="t" for="ch" forName="text" refType="w" fact="0.095"/>
+              <dgm:constr type="l" for="ch" forName="text" refType="w" fact="0.1"/>
+            </dgm:constrLst>
+            <dgm:ruleLst/>
+            <dgm:layoutNode name="background" styleLbl="node0" moveWith="text">
+              <dgm:alg type="sp"/>
+              <dgm:shape xmlns:r="http://schemas.openxmlformats.org/officeDocument/2006/relationships" type="roundRect" r:blip="">
+                <dgm:adjLst>
+                  <dgm:adj idx="1" val="0.1"/>
+                </dgm:adjLst>
+              </dgm:shape>
+              <dgm:presOf/>
+              <dgm:constrLst/>
+              <dgm:ruleLst/>
+            </dgm:layoutNode>
+            <dgm:layoutNode name="text" styleLbl="fgAcc0">
+              <dgm:varLst>
+                <dgm:chPref val="3"/>
+              </dgm:varLst>
+              <dgm:alg type="tx"/>
+              <dgm:shape xmlns:r="http://schemas.openxmlformats.org/officeDocument/2006/relationships" type="roundRect" r:blip="">
+                <dgm:adjLst>
+                  <dgm:adj idx="1" val="0.1"/>
+                </dgm:adjLst>
+              </dgm:shape>
+              <dgm:presOf axis="self"/>
+              <dgm:constrLst>
+                <dgm:constr type="tMarg" refType="primFontSz" fact="0.3"/>
+                <dgm:constr type="bMarg" refType="primFontSz" fact="0.3"/>
+                <dgm:constr type="lMarg" refType="primFontSz" fact="0.3"/>
+                <dgm:constr type="rMarg" refType="primFontSz" fact="0.3"/>
+              </dgm:constrLst>
+              <dgm:ruleLst>
+                <dgm:rule type="primFontSz" val="5" fact="NaN" max="NaN"/>
+              </dgm:ruleLst>
+            </dgm:layoutNode>
+          </dgm:layoutNode>
+          <dgm:layoutNode name="hierChild2">
+            <dgm:choose name="Name5">
+              <dgm:if name="Name6" func="var" arg="dir" op="equ" val="norm">
+                <dgm:alg type="hierChild">
+                  <dgm:param type="linDir" val="fromL"/>
+                </dgm:alg>
+              </dgm:if>
+              <dgm:else name="Name7">
+                <dgm:alg type="hierChild">
+                  <dgm:param type="linDir" val="fromR"/>
+                </dgm:alg>
+              </dgm:else>
+            </dgm:choose>
+            <dgm:shape xmlns:r="http://schemas.openxmlformats.org/officeDocument/2006/relationships" r:blip="">
+              <dgm:adjLst/>
+            </dgm:shape>
+            <dgm:presOf/>
+            <dgm:constrLst/>
+            <dgm:ruleLst/>
+            <dgm:forEach name="Name8" axis="ch">
+              <dgm:forEach name="Name9" axis="self" ptType="parTrans" cnt="1">
+                <dgm:layoutNode name="Name10">
+                  <dgm:alg type="conn">
+                    <dgm:param type="dim" val="1D"/>
+                    <dgm:param type="endSty" val="noArr"/>
+                    <dgm:param type="connRout" val="bend"/>
+                    <dgm:param type="bendPt" val="end"/>
+                    <dgm:param type="begPts" val="bCtr"/>
+                    <dgm:param type="endPts" val="tCtr"/>
+                    <dgm:param type="srcNode" val="background"/>
+                    <dgm:param type="dstNode" val="background2"/>
+                  </dgm:alg>
+                  <dgm:shape xmlns:r="http://schemas.openxmlformats.org/officeDocument/2006/relationships" type="conn" r:blip="" zOrderOff="-999">
+                    <dgm:adjLst/>
+                  </dgm:shape>
+                  <dgm:presOf axis="self"/>
+                  <dgm:constrLst>
+                    <dgm:constr type="begPad"/>
+                    <dgm:constr type="endPad"/>
+                  </dgm:constrLst>
+                  <dgm:ruleLst/>
+                </dgm:layoutNode>
+              </dgm:forEach>
+              <dgm:forEach name="Name11" axis="self" ptType="node">
+                <dgm:layoutNode name="hierRoot2">
+                  <dgm:alg type="hierRoot"/>
+                  <dgm:shape xmlns:r="http://schemas.openxmlformats.org/officeDocument/2006/relationships" r:blip="">
+                    <dgm:adjLst/>
+                  </dgm:shape>
+                  <dgm:presOf/>
+                  <dgm:constrLst>
+                    <dgm:constr type="bendDist" for="des" ptType="parTrans" refType="sp" fact="0.5"/>
+                  </dgm:constrLst>
+                  <dgm:ruleLst/>
+                  <dgm:layoutNode name="composite2">
+                    <dgm:alg type="composite"/>
+                    <dgm:shape xmlns:r="http://schemas.openxmlformats.org/officeDocument/2006/relationships" r:blip="">
+                      <dgm:adjLst/>
+                    </dgm:shape>
+                    <dgm:presOf/>
+                    <dgm:constrLst>
+                      <dgm:constr type="w" for="ch" forName="background2" refType="w" fact="0.9"/>
+                      <dgm:constr type="h" for="ch" forName="background2" refType="w" refFor="ch" refForName="background2" fact="0.635"/>
+                      <dgm:constr type="t" for="ch" forName="background2"/>
+                      <dgm:constr type="l" for="ch" forName="background2"/>
+                      <dgm:constr type="w" for="ch" forName="text2" refType="w" fact="0.9"/>
+                      <dgm:constr type="h" for="ch" forName="text2" refType="w" refFor="ch" refForName="text2" fact="0.635"/>
+                      <dgm:constr type="t" for="ch" forName="text2" refType="w" fact="0.095"/>
+                      <dgm:constr type="l" for="ch" forName="text2" refType="w" fact="0.1"/>
+                    </dgm:constrLst>
+                    <dgm:ruleLst/>
+                    <dgm:layoutNode name="background2" moveWith="text2">
+                      <dgm:alg type="sp"/>
+                      <dgm:shape xmlns:r="http://schemas.openxmlformats.org/officeDocument/2006/relationships" type="roundRect" r:blip="">
+                        <dgm:adjLst>
+                          <dgm:adj idx="1" val="0.1"/>
+                        </dgm:adjLst>
+                      </dgm:shape>
+                      <dgm:presOf/>
+                      <dgm:constrLst/>
+                      <dgm:ruleLst/>
+                    </dgm:layoutNode>
+                    <dgm:layoutNode name="text2" styleLbl="fgAcc2">
+                      <dgm:varLst>
+                        <dgm:chPref val="3"/>
+                      </dgm:varLst>
+                      <dgm:alg type="tx"/>
+                      <dgm:shape xmlns:r="http://schemas.openxmlformats.org/officeDocument/2006/relationships" type="roundRect" r:blip="">
+                        <dgm:adjLst>
+                          <dgm:adj idx="1" val="0.1"/>
+                        </dgm:adjLst>
+                      </dgm:shape>
+                      <dgm:presOf axis="self"/>
+                      <dgm:constrLst>
+                        <dgm:constr type="tMarg" refType="primFontSz" fact="0.3"/>
+                        <dgm:constr type="bMarg" refType="primFontSz" fact="0.3"/>
+                        <dgm:constr type="lMarg" refType="primFontSz" fact="0.3"/>
+                        <dgm:constr type="rMarg" refType="primFontSz" fact="0.3"/>
+                      </dgm:constrLst>
+                      <dgm:ruleLst>
+                        <dgm:rule type="primFontSz" val="5" fact="NaN" max="NaN"/>
+                      </dgm:ruleLst>
+                    </dgm:layoutNode>
+                  </dgm:layoutNode>
+                  <dgm:layoutNode name="hierChild3">
+                    <dgm:choose name="Name12">
+                      <dgm:if name="Name13" func="var" arg="dir" op="equ" val="norm">
+                        <dgm:alg type="hierChild">
+                          <dgm:param type="linDir" val="fromL"/>
+                        </dgm:alg>
+                      </dgm:if>
+                      <dgm:else name="Name14">
+                        <dgm:alg type="hierChild">
+                          <dgm:param type="linDir" val="fromR"/>
+                        </dgm:alg>
+                      </dgm:else>
+                    </dgm:choose>
+                    <dgm:shape xmlns:r="http://schemas.openxmlformats.org/officeDocument/2006/relationships" r:blip="">
+                      <dgm:adjLst/>
+                    </dgm:shape>
+                    <dgm:presOf/>
+                    <dgm:constrLst/>
+                    <dgm:ruleLst/>
+                    <dgm:forEach name="Name15" axis="ch">
+                      <dgm:forEach name="Name16" axis="self" ptType="parTrans" cnt="1">
+                        <dgm:layoutNode name="Name17">
+                          <dgm:alg type="conn">
+                            <dgm:param type="dim" val="1D"/>
+                            <dgm:param type="endSty" val="noArr"/>
+                            <dgm:param type="connRout" val="bend"/>
+                            <dgm:param type="bendPt" val="end"/>
+                            <dgm:param type="begPts" val="bCtr"/>
+                            <dgm:param type="endPts" val="tCtr"/>
+                            <dgm:param type="srcNode" val="background2"/>
+                            <dgm:param type="dstNode" val="background3"/>
+                          </dgm:alg>
+                          <dgm:shape xmlns:r="http://schemas.openxmlformats.org/officeDocument/2006/relationships" type="conn" r:blip="" zOrderOff="-999">
+                            <dgm:adjLst/>
+                          </dgm:shape>
+                          <dgm:presOf axis="self"/>
+                          <dgm:constrLst>
+                            <dgm:constr type="begPad"/>
+                            <dgm:constr type="endPad"/>
+                          </dgm:constrLst>
+                          <dgm:ruleLst/>
+                        </dgm:layoutNode>
+                      </dgm:forEach>
+                      <dgm:forEach name="Name18" axis="self" ptType="node">
+                        <dgm:layoutNode name="hierRoot3">
+                          <dgm:alg type="hierRoot"/>
+                          <dgm:shape xmlns:r="http://schemas.openxmlformats.org/officeDocument/2006/relationships" r:blip="">
+                            <dgm:adjLst/>
+                          </dgm:shape>
+                          <dgm:presOf/>
+                          <dgm:constrLst>
+                            <dgm:constr type="bendDist" for="des" ptType="parTrans" refType="sp" fact="0.5"/>
+                          </dgm:constrLst>
+                          <dgm:ruleLst/>
+                          <dgm:layoutNode name="composite3">
+                            <dgm:alg type="composite"/>
+                            <dgm:shape xmlns:r="http://schemas.openxmlformats.org/officeDocument/2006/relationships" r:blip="">
+                              <dgm:adjLst/>
+                            </dgm:shape>
+                            <dgm:presOf/>
+                            <dgm:constrLst>
+                              <dgm:constr type="w" for="ch" forName="background3" refType="w" fact="0.9"/>
+                              <dgm:constr type="h" for="ch" forName="background3" refType="w" refFor="ch" refForName="background3" fact="0.635"/>
+                              <dgm:constr type="t" for="ch" forName="background3"/>
+                              <dgm:constr type="l" for="ch" forName="background3"/>
+                              <dgm:constr type="w" for="ch" forName="text3" refType="w" fact="0.9"/>
+                              <dgm:constr type="h" for="ch" forName="text3" refType="w" refFor="ch" refForName="text3" fact="0.635"/>
+                              <dgm:constr type="t" for="ch" forName="text3" refType="w" fact="0.095"/>
+                              <dgm:constr type="l" for="ch" forName="text3" refType="w" fact="0.1"/>
+                            </dgm:constrLst>
+                            <dgm:ruleLst/>
+                            <dgm:layoutNode name="background3" moveWith="text3">
+                              <dgm:alg type="sp"/>
+                              <dgm:shape xmlns:r="http://schemas.openxmlformats.org/officeDocument/2006/relationships" type="roundRect" r:blip="">
+                                <dgm:adjLst>
+                                  <dgm:adj idx="1" val="0.1"/>
+                                </dgm:adjLst>
+                              </dgm:shape>
+                              <dgm:presOf/>
+                              <dgm:constrLst/>
+                              <dgm:ruleLst/>
+                            </dgm:layoutNode>
+                            <dgm:layoutNode name="text3" styleLbl="fgAcc3">
+                              <dgm:varLst>
+                                <dgm:chPref val="3"/>
+                              </dgm:varLst>
+                              <dgm:alg type="tx"/>
+                              <dgm:shape xmlns:r="http://schemas.openxmlformats.org/officeDocument/2006/relationships" type="roundRect" r:blip="">
+                                <dgm:adjLst>
+                                  <dgm:adj idx="1" val="0.1"/>
+                                </dgm:adjLst>
+                              </dgm:shape>
+                              <dgm:presOf axis="self"/>
+                              <dgm:constrLst>
+                                <dgm:constr type="tMarg" refType="primFontSz" fact="0.3"/>
+                                <dgm:constr type="bMarg" refType="primFontSz" fact="0.3"/>
+                                <dgm:constr type="lMarg" refType="primFontSz" fact="0.3"/>
+                                <dgm:constr type="rMarg" refType="primFontSz" fact="0.3"/>
+                              </dgm:constrLst>
+                              <dgm:ruleLst>
+                                <dgm:rule type="primFontSz" val="5" fact="NaN" max="NaN"/>
+                              </dgm:ruleLst>
+                            </dgm:layoutNode>
+                          </dgm:layoutNode>
+                          <dgm:layoutNode name="hierChild4">
+                            <dgm:choose name="Name19">
+                              <dgm:if name="Name20" func="var" arg="dir" op="equ" val="norm">
+                                <dgm:alg type="hierChild">
+                                  <dgm:param type="linDir" val="fromL"/>
+                                </dgm:alg>
+                              </dgm:if>
+                              <dgm:else name="Name21">
+                                <dgm:alg type="hierChild">
+                                  <dgm:param type="linDir" val="fromR"/>
+                                </dgm:alg>
+                              </dgm:else>
+                            </dgm:choose>
+                            <dgm:shape xmlns:r="http://schemas.openxmlformats.org/officeDocument/2006/relationships" r:blip="">
+                              <dgm:adjLst/>
+                            </dgm:shape>
+                            <dgm:presOf/>
+                            <dgm:constrLst/>
+                            <dgm:ruleLst/>
+                            <dgm:forEach name="repeat" axis="ch">
+                              <dgm:forEach name="Name22" axis="self" ptType="parTrans" cnt="1">
+                                <dgm:layoutNode name="Name23">
+                                  <dgm:choose name="Name24">
+                                    <dgm:if name="Name25" axis="self" func="depth" op="lte" val="4">
+                                      <dgm:alg type="conn">
+                                        <dgm:param type="dim" val="1D"/>
+                                        <dgm:param type="endSty" val="noArr"/>
+                                        <dgm:param type="connRout" val="bend"/>
+                                        <dgm:param type="bendPt" val="end"/>
+                                        <dgm:param type="begPts" val="bCtr"/>
+                                        <dgm:param type="endPts" val="tCtr"/>
+                                        <dgm:param type="srcNode" val="background3"/>
+                                        <dgm:param type="dstNode" val="background4"/>
+                                      </dgm:alg>
+                                    </dgm:if>
+                                    <dgm:else name="Name26">
+                                      <dgm:alg type="conn">
+                                        <dgm:param type="dim" val="1D"/>
+                                        <dgm:param type="endSty" val="noArr"/>
+                                        <dgm:param type="connRout" val="bend"/>
+                                        <dgm:param type="bendPt" val="end"/>
+                                        <dgm:param type="begPts" val="bCtr"/>
+                                        <dgm:param type="endPts" val="tCtr"/>
+                                        <dgm:param type="srcNode" val="background4"/>
+                                        <dgm:param type="dstNode" val="background4"/>
+                                      </dgm:alg>
+                                    </dgm:else>
+                                  </dgm:choose>
+                                  <dgm:shape xmlns:r="http://schemas.openxmlformats.org/officeDocument/2006/relationships" type="conn" r:blip="" zOrderOff="-999">
+                                    <dgm:adjLst/>
+                                  </dgm:shape>
+                                  <dgm:presOf axis="self"/>
+                                  <dgm:constrLst>
+                                    <dgm:constr type="begPad"/>
+                                    <dgm:constr type="endPad"/>
+                                  </dgm:constrLst>
+                                  <dgm:ruleLst/>
+                                </dgm:layoutNode>
+                              </dgm:forEach>
+                              <dgm:forEach name="Name27" axis="self" ptType="node">
+                                <dgm:layoutNode name="hierRoot4">
+                                  <dgm:alg type="hierRoot"/>
+                                  <dgm:shape xmlns:r="http://schemas.openxmlformats.org/officeDocument/2006/relationships" r:blip="">
+                                    <dgm:adjLst/>
+                                  </dgm:shape>
+                                  <dgm:presOf/>
+                                  <dgm:constrLst>
+                                    <dgm:constr type="bendDist" for="des" ptType="parTrans" refType="sp" fact="0.5"/>
+                                  </dgm:constrLst>
+                                  <dgm:ruleLst/>
+                                  <dgm:layoutNode name="composite4">
+                                    <dgm:alg type="composite"/>
+                                    <dgm:shape xmlns:r="http://schemas.openxmlformats.org/officeDocument/2006/relationships" r:blip="">
+                                      <dgm:adjLst/>
+                                    </dgm:shape>
+                                    <dgm:presOf/>
+                                    <dgm:constrLst>
+                                      <dgm:constr type="w" for="ch" forName="background4" refType="w" fact="0.9"/>
+                                      <dgm:constr type="h" for="ch" forName="background4" refType="w" refFor="ch" refForName="background4" fact="0.635"/>
+                                      <dgm:constr type="t" for="ch" forName="background4"/>
+                                      <dgm:constr type="l" for="ch" forName="background4"/>
+                                      <dgm:constr type="w" for="ch" forName="text4" refType="w" fact="0.9"/>
+                                      <dgm:constr type="h" for="ch" forName="text4" refType="w" refFor="ch" refForName="text4" fact="0.635"/>
+                                      <dgm:constr type="t" for="ch" forName="text4" refType="w" fact="0.095"/>
+                                      <dgm:constr type="l" for="ch" forName="text4" refType="w" fact="0.1"/>
+                                    </dgm:constrLst>
+                                    <dgm:ruleLst/>
+                                    <dgm:layoutNode name="background4" moveWith="text4">
+                                      <dgm:alg type="sp"/>
+                                      <dgm:shape xmlns:r="http://schemas.openxmlformats.org/officeDocument/2006/relationships" type="roundRect" r:blip="">
+                                        <dgm:adjLst>
+                                          <dgm:adj idx="1" val="0.1"/>
+                                        </dgm:adjLst>
+                                      </dgm:shape>
+                                      <dgm:presOf/>
+                                      <dgm:constrLst/>
+                                      <dgm:ruleLst/>
+                                    </dgm:layoutNode>
+                                    <dgm:layoutNode name="text4" styleLbl="fgAcc4">
+                                      <dgm:varLst>
+                                        <dgm:chPref val="3"/>
+                                      </dgm:varLst>
+                                      <dgm:alg type="tx"/>
+                                      <dgm:shape xmlns:r="http://schemas.openxmlformats.org/officeDocument/2006/relationships" type="roundRect" r:blip="">
+                                        <dgm:adjLst>
+                                          <dgm:adj idx="1" val="0.1"/>
+                                        </dgm:adjLst>
+                                      </dgm:shape>
+                                      <dgm:presOf axis="self"/>
+                                      <dgm:constrLst>
+                                        <dgm:constr type="tMarg" refType="primFontSz" fact="0.3"/>
+                                        <dgm:constr type="bMarg" refType="primFontSz" fact="0.3"/>
+                                        <dgm:constr type="lMarg" refType="primFontSz" fact="0.3"/>
+                                        <dgm:constr type="rMarg" refType="primFontSz" fact="0.3"/>
+                                      </dgm:constrLst>
+                                      <dgm:ruleLst>
+                                        <dgm:rule type="primFontSz" val="5" fact="NaN" max="NaN"/>
+                                      </dgm:ruleLst>
+                                    </dgm:layoutNode>
+                                  </dgm:layoutNode>
+                                  <dgm:layoutNode name="hierChild5">
+                                    <dgm:choose name="Name28">
+                                      <dgm:if name="Name29" func="var" arg="dir" op="equ" val="norm">
+                                        <dgm:alg type="hierChild">
+                                          <dgm:param type="linDir" val="fromL"/>
+                                        </dgm:alg>
+                                      </dgm:if>
+                                      <dgm:else name="Name30">
+                                        <dgm:alg type="hierChild">
+                                          <dgm:param type="linDir" val="fromR"/>
+                                        </dgm:alg>
+                                      </dgm:else>
+                                    </dgm:choose>
+                                    <dgm:shape xmlns:r="http://schemas.openxmlformats.org/officeDocument/2006/relationships" r:blip="">
+                                      <dgm:adjLst/>
+                                    </dgm:shape>
+                                    <dgm:presOf/>
+                                    <dgm:constrLst/>
+                                    <dgm:ruleLst/>
+                                    <dgm:forEach name="Name31" ref="repeat"/>
+                                  </dgm:layoutNode>
+                                </dgm:layoutNode>
+                              </dgm:forEach>
+                            </dgm:forEach>
+                          </dgm:layoutNode>
+                        </dgm:layoutNode>
+                      </dgm:forEach>
+                    </dgm:forEach>
+                  </dgm:layoutNode>
+                </dgm:layoutNode>
+              </dgm:forEach>
+            </dgm:forEach>
+          </dgm:layoutNode>
+        </dgm:layoutNode>
+      </dgm:forEach>
+    </dgm:forEach>
+  </dgm:layoutNode>
+</dgm:layoutDef>
+</file>
+
+<file path=ppt/diagrams/quickStyle1.xml><?xml version="1.0" encoding="utf-8"?>
+<dgm:styleDef xmlns:dgm="http://schemas.openxmlformats.org/drawingml/2006/diagram" xmlns:a="http://schemas.openxmlformats.org/drawingml/2006/main" uniqueId="urn:microsoft.com/office/officeart/2005/8/quickstyle/simple1">
+  <dgm:title val=""/>
+  <dgm:desc val=""/>
+  <dgm:catLst>
+    <dgm:cat type="simple" pri="10100"/>
+  </dgm:catLst>
+  <dgm:scene3d>
+    <a:camera prst="orthographicFront"/>
+    <a:lightRig rig="threePt" dir="t"/>
+  </dgm:scene3d>
+  <dgm:styleLbl name="node0">
+    <dgm:scene3d>
+      <a:camera prst="orthographicFront"/>
+      <a:lightRig rig="threePt" dir="t"/>
+    </dgm:scene3d>
+    <dgm:sp3d/>
+    <dgm:txPr/>
+    <dgm:style>
+      <a:lnRef idx="2">
+        <a:scrgbClr r="0" g="0" b="0"/>
+      </a:lnRef>
+      <a:fillRef idx="1">
+        <a:scrgbClr r="0" g="0" b="0"/>
+      </a:fillRef>
+      <a:effectRef idx="0">
+        <a:scrgbClr r="0" g="0" b="0"/>
+      </a:effectRef>
+      <a:fontRef idx="minor">
+        <a:schemeClr val="lt1"/>
+      </a:fontRef>
+    </dgm:style>
+  </dgm:styleLbl>
+  <dgm:styleLbl name="lnNode1">
+    <dgm:scene3d>
+      <a:camera prst="orthographicFront"/>
+      <a:lightRig rig="threePt" dir="t"/>
+    </dgm:scene3d>
+    <dgm:sp3d/>
+    <dgm:txPr/>
+    <dgm:style>
+      <a:lnRef idx="2">
+        <a:scrgbClr r="0" g="0" b="0"/>
+      </a:lnRef>
+      <a:fillRef idx="1">
+        <a:scrgbClr r="0" g="0" b="0"/>
+      </a:fillRef>
+      <a:effectRef idx="0">
+        <a:scrgbClr r="0" g="0" b="0"/>
+      </a:effectRef>
+      <a:fontRef idx="minor">
+        <a:schemeClr val="lt1"/>
+      </a:fontRef>
+    </dgm:style>
+  </dgm:styleLbl>
+  <dgm:styleLbl name="vennNode1">
+    <dgm:scene3d>
+      <a:camera prst="orthographicFront"/>
+      <a:lightRig rig="threePt" dir="t"/>
+    </dgm:scene3d>
+    <dgm:sp3d/>
+    <dgm:txPr/>
+    <dgm:style>
+      <a:lnRef idx="2">
+        <a:scrgbClr r="0" g="0" b="0"/>
+      </a:lnRef>
+      <a:fillRef idx="1">
+        <a:scrgbClr r="0" g="0" b="0"/>
+      </a:fillRef>
+      <a:effectRef idx="0">
+        <a:scrgbClr r="0" g="0" b="0"/>
+      </a:effectRef>
+      <a:fontRef idx="minor">
+        <a:schemeClr val="tx1"/>
+      </a:fontRef>
+    </dgm:style>
+  </dgm:styleLbl>
+  <dgm:styleLbl name="alignNode1">
+    <dgm:scene3d>
+      <a:camera prst="orthographicFront"/>
+      <a:lightRig rig="threePt" dir="t"/>
+    </dgm:scene3d>
+    <dgm:sp3d/>
+    <dgm:txPr/>
+    <dgm:style>
+      <a:lnRef idx="2">
+        <a:scrgbClr r="0" g="0" b="0"/>
+      </a:lnRef>
+      <a:fillRef idx="1">
+        <a:scrgbClr r="0" g="0" b="0"/>
+      </a:fillRef>
+      <a:effectRef idx="0">
+        <a:scrgbClr r="0" g="0" b="0"/>
+      </a:effectRef>
+      <a:fontRef idx="minor">
+        <a:schemeClr val="lt1"/>
+      </a:fontRef>
+    </dgm:style>
+  </dgm:styleLbl>
+  <dgm:styleLbl name="node1">
+    <dgm:scene3d>
+      <a:camera prst="orthographicFront"/>
+      <a:lightRig rig="threePt" dir="t"/>
+    </dgm:scene3d>
+    <dgm:sp3d/>
+    <dgm:txPr/>
+    <dgm:style>
+      <a:lnRef idx="2">
+        <a:scrgbClr r="0" g="0" b="0"/>
+      </a:lnRef>
+      <a:fillRef idx="1">
+        <a:scrgbClr r="0" g="0" b="0"/>
+      </a:fillRef>
+      <a:effectRef idx="0">
+        <a:scrgbClr r="0" g="0" b="0"/>
+      </a:effectRef>
+      <a:fontRef idx="minor">
+        <a:schemeClr val="lt1"/>
+      </a:fontRef>
+    </dgm:style>
+  </dgm:styleLbl>
+  <dgm:styleLbl name="node2">
+    <dgm:scene3d>
+      <a:camera prst="orthographicFront"/>
+      <a:lightRig rig="threePt" dir="t"/>
+    </dgm:scene3d>
+    <dgm:sp3d/>
+    <dgm:txPr/>
+    <dgm:style>
+      <a:lnRef idx="2">
+        <a:scrgbClr r="0" g="0" b="0"/>
+      </a:lnRef>
+      <a:fillRef idx="1">
+        <a:scrgbClr r="0" g="0" b="0"/>
+      </a:fillRef>
+      <a:effectRef idx="0">
+        <a:scrgbClr r="0" g="0" b="0"/>
+      </a:effectRef>
+      <a:fontRef idx="minor">
+        <a:schemeClr val="lt1"/>
+      </a:fontRef>
+    </dgm:style>
+  </dgm:styleLbl>
+  <dgm:styleLbl name="node3">
+    <dgm:scene3d>
+      <a:camera prst="orthographicFront"/>
+      <a:lightRig rig="threePt" dir="t"/>
+    </dgm:scene3d>
+    <dgm:sp3d/>
+    <dgm:txPr/>
+    <dgm:style>
+      <a:lnRef idx="2">
+        <a:scrgbClr r="0" g="0" b="0"/>
+      </a:lnRef>
+      <a:fillRef idx="1">
+        <a:scrgbClr r="0" g="0" b="0"/>
+      </a:fillRef>
+      <a:effectRef idx="0">
+        <a:scrgbClr r="0" g="0" b="0"/>
+      </a:effectRef>
+      <a:fontRef idx="minor">
+        <a:schemeClr val="lt1"/>
+      </a:fontRef>
+    </dgm:style>
+  </dgm:styleLbl>
+  <dgm:styleLbl name="node4">
+    <dgm:scene3d>
+      <a:camera prst="orthographicFront"/>
+      <a:lightRig rig="threePt" dir="t"/>
+    </dgm:scene3d>
+    <dgm:sp3d/>
+    <dgm:txPr/>
+    <dgm:style>
+      <a:lnRef idx="2">
+        <a:scrgbClr r="0" g="0" b="0"/>
+      </a:lnRef>
+      <a:fillRef idx="1">
+        <a:scrgbClr r="0" g="0" b="0"/>
+      </a:fillRef>
+      <a:effectRef idx="0">
+        <a:scrgbClr r="0" g="0" b="0"/>
+      </a:effectRef>
+      <a:fontRef idx="minor">
+        <a:schemeClr val="lt1"/>
+      </a:fontRef>
+    </dgm:style>
+  </dgm:styleLbl>
+  <dgm:styleLbl name="fgImgPlace1">
+    <dgm:scene3d>
+      <a:camera prst="orthographicFront"/>
+      <a:lightRig rig="threePt" dir="t"/>
+    </dgm:scene3d>
+    <dgm:sp3d/>
+    <dgm:txPr/>
+    <dgm:style>
+      <a:lnRef idx="2">
+        <a:scrgbClr r="0" g="0" b="0"/>
+      </a:lnRef>
+      <a:fillRef idx="1">
+        <a:scrgbClr r="0" g="0" b="0"/>
+      </a:fillRef>
+      <a:effectRef idx="0">
+        <a:scrgbClr r="0" g="0" b="0"/>
+      </a:effectRef>
+      <a:fontRef idx="minor"/>
+    </dgm:style>
+  </dgm:styleLbl>
+  <dgm:styleLbl name="alignImgPlace1">
+    <dgm:scene3d>
+      <a:camera prst="orthographicFront"/>
+      <a:lightRig rig="threePt" dir="t"/>
+    </dgm:scene3d>
+    <dgm:sp3d/>
+    <dgm:txPr/>
+    <dgm:style>
+      <a:lnRef idx="2">
+        <a:scrgbClr r="0" g="0" b="0"/>
+      </a:lnRef>
+      <a:fillRef idx="1">
+        <a:scrgbClr r="0" g="0" b="0"/>
+      </a:fillRef>
+      <a:effectRef idx="0">
+        <a:scrgbClr r="0" g="0" b="0"/>
+      </a:effectRef>
+      <a:fontRef idx="minor"/>
+    </dgm:style>
+  </dgm:styleLbl>
+  <dgm:styleLbl name="bgImgPlace1">
+    <dgm:scene3d>
+      <a:camera prst="orthographicFront"/>
+      <a:lightRig rig="threePt" dir="t"/>
+    </dgm:scene3d>
+    <dgm:sp3d/>
+    <dgm:txPr/>
+    <dgm:style>
+      <a:lnRef idx="2">
+        <a:scrgbClr r="0" g="0" b="0"/>
+      </a:lnRef>
+      <a:fillRef idx="1">
+        <a:scrgbClr r="0" g="0" b="0"/>
+      </a:fillRef>
+      <a:effectRef idx="0">
+        <a:scrgbClr r="0" g="0" b="0"/>
+      </a:effectRef>
+      <a:fontRef idx="minor"/>
+    </dgm:style>
+  </dgm:styleLbl>
+  <dgm:styleLbl name="sibTrans2D1">
+    <dgm:scene3d>
+      <a:camera prst="orthographicFront"/>
+      <a:lightRig rig="threePt" dir="t"/>
+    </dgm:scene3d>
+    <dgm:sp3d/>
+    <dgm:txPr/>
+    <dgm:style>
+      <a:lnRef idx="0">
+        <a:scrgbClr r="0" g="0" b="0"/>
+      </a:lnRef>
+      <a:fillRef idx="1">
+        <a:scrgbClr r="0" g="0" b="0"/>
+      </a:fillRef>
+      <a:effectRef idx="0">
+        <a:scrgbClr r="0" g="0" b="0"/>
+      </a:effectRef>
+      <a:fontRef idx="minor">
+        <a:schemeClr val="lt1"/>
+      </a:fontRef>
+    </dgm:style>
+  </dgm:styleLbl>
+  <dgm:styleLbl name="fgSibTrans2D1">
+    <dgm:scene3d>
+      <a:camera prst="orthographicFront"/>
+      <a:lightRig rig="threePt" dir="t"/>
+    </dgm:scene3d>
+    <dgm:sp3d/>
+    <dgm:txPr/>
+    <dgm:style>
+      <a:lnRef idx="0">
+        <a:scrgbClr r="0" g="0" b="0"/>
+      </a:lnRef>
+      <a:fillRef idx="1">
+        <a:scrgbClr r="0" g="0" b="0"/>
+      </a:fillRef>
+      <a:effectRef idx="0">
+        <a:scrgbClr r="0" g="0" b="0"/>
+      </a:effectRef>
+      <a:fontRef idx="minor">
+        <a:schemeClr val="lt1"/>
+      </a:fontRef>
+    </dgm:style>
+  </dgm:styleLbl>
+  <dgm:styleLbl name="bgSibTrans2D1">
+    <dgm:scene3d>
+      <a:camera prst="orthographicFront"/>
+      <a:lightRig rig="threePt" dir="t"/>
+    </dgm:scene3d>
+    <dgm:sp3d/>
+    <dgm:txPr/>
+    <dgm:style>
+      <a:lnRef idx="0">
+        <a:scrgbClr r="0" g="0" b="0"/>
+      </a:lnRef>
+      <a:fillRef idx="1">
+        <a:scrgbClr r="0" g="0" b="0"/>
+      </a:fillRef>
+      <a:effectRef idx="0">
+        <a:scrgbClr r="0" g="0" b="0"/>
+      </a:effectRef>
+      <a:fontRef idx="minor">
+        <a:schemeClr val="lt1"/>
+      </a:fontRef>
+    </dgm:style>
+  </dgm:styleLbl>
+  <dgm:styleLbl name="sibTrans1D1">
+    <dgm:scene3d>
+      <a:camera prst="orthographicFront"/>
+      <a:lightRig rig="threePt" dir="t"/>
+    </dgm:scene3d>
+    <dgm:sp3d/>
+    <dgm:txPr/>
+    <dgm:style>
+      <a:lnRef idx="1">
+        <a:scrgbClr r="0" g="0" b="0"/>
+      </a:lnRef>
+      <a:fillRef idx="0">
+        <a:scrgbClr r="0" g="0" b="0"/>
+      </a:fillRef>
+      <a:effectRef idx="0">
+        <a:scrgbClr r="0" g="0" b="0"/>
+      </a:effectRef>
+      <a:fontRef idx="minor"/>
+    </dgm:style>
+  </dgm:styleLbl>
+  <dgm:styleLbl name="callout">
+    <dgm:scene3d>
+      <a:camera prst="orthographicFront"/>
+      <a:lightRig rig="threePt" dir="t"/>
+    </dgm:scene3d>
+    <dgm:sp3d/>
+    <dgm:txPr/>
+    <dgm:style>
+      <a:lnRef idx="2">
+        <a:scrgbClr r="0" g="0" b="0"/>
+      </a:lnRef>
+      <a:fillRef idx="1">
+        <a:scrgbClr r="0" g="0" b="0"/>
+      </a:fillRef>
+      <a:effectRef idx="0">
+        <a:scrgbClr r="0" g="0" b="0"/>
+      </a:effectRef>
+      <a:fontRef idx="minor"/>
+    </dgm:style>
+  </dgm:styleLbl>
+  <dgm:styleLbl name="asst0">
+    <dgm:scene3d>
+      <a:camera prst="orthographicFront"/>
+      <a:lightRig rig="threePt" dir="t"/>
+    </dgm:scene3d>
+    <dgm:sp3d/>
+    <dgm:txPr/>
+    <dgm:style>
+      <a:lnRef idx="2">
+        <a:scrgbClr r="0" g="0" b="0"/>
+      </a:lnRef>
+      <a:fillRef idx="1">
+        <a:scrgbClr r="0" g="0" b="0"/>
+      </a:fillRef>
+      <a:effectRef idx="0">
+        <a:scrgbClr r="0" g="0" b="0"/>
+      </a:effectRef>
+      <a:fontRef idx="minor">
+        <a:schemeClr val="lt1"/>
+      </a:fontRef>
+    </dgm:style>
+  </dgm:styleLbl>
+  <dgm:styleLbl name="asst1">
+    <dgm:scene3d>
+      <a:camera prst="orthographicFront"/>
+      <a:lightRig rig="threePt" dir="t"/>
+    </dgm:scene3d>
+    <dgm:sp3d/>
+    <dgm:txPr/>
+    <dgm:style>
+      <a:lnRef idx="2">
+        <a:scrgbClr r="0" g="0" b="0"/>
+      </a:lnRef>
+      <a:fillRef idx="1">
+        <a:scrgbClr r="0" g="0" b="0"/>
+      </a:fillRef>
+      <a:effectRef idx="0">
+        <a:scrgbClr r="0" g="0" b="0"/>
+      </a:effectRef>
+      <a:fontRef idx="minor">
+        <a:schemeClr val="lt1"/>
+      </a:fontRef>
+    </dgm:style>
+  </dgm:styleLbl>
+  <dgm:styleLbl name="asst2">
+    <dgm:scene3d>
+      <a:camera prst="orthographicFront"/>
+      <a:lightRig rig="threePt" dir="t"/>
+    </dgm:scene3d>
+    <dgm:sp3d/>
+    <dgm:txPr/>
+    <dgm:style>
+      <a:lnRef idx="2">
+        <a:scrgbClr r="0" g="0" b="0"/>
+      </a:lnRef>
+      <a:fillRef idx="1">
+        <a:scrgbClr r="0" g="0" b="0"/>
+      </a:fillRef>
+      <a:effectRef idx="0">
+        <a:scrgbClr r="0" g="0" b="0"/>
+      </a:effectRef>
+      <a:fontRef idx="minor">
+        <a:schemeClr val="lt1"/>
+      </a:fontRef>
+    </dgm:style>
+  </dgm:styleLbl>
+  <dgm:styleLbl name="asst3">
+    <dgm:scene3d>
+      <a:camera prst="orthographicFront"/>
+      <a:lightRig rig="threePt" dir="t"/>
+    </dgm:scene3d>
+    <dgm:sp3d/>
+    <dgm:txPr/>
+    <dgm:style>
+      <a:lnRef idx="2">
+        <a:scrgbClr r="0" g="0" b="0"/>
+      </a:lnRef>
+      <a:fillRef idx="1">
+        <a:scrgbClr r="0" g="0" b="0"/>
+      </a:fillRef>
+      <a:effectRef idx="0">
+        <a:scrgbClr r="0" g="0" b="0"/>
+      </a:effectRef>
+      <a:fontRef idx="minor">
+        <a:schemeClr val="lt1"/>
+      </a:fontRef>
+    </dgm:style>
+  </dgm:styleLbl>
+  <dgm:styleLbl name="asst4">
+    <dgm:scene3d>
+      <a:camera prst="orthographicFront"/>
+      <a:lightRig rig="threePt" dir="t"/>
+    </dgm:scene3d>
+    <dgm:sp3d/>
+    <dgm:txPr/>
+    <dgm:style>
+      <a:lnRef idx="2">
+        <a:scrgbClr r="0" g="0" b="0"/>
+      </a:lnRef>
+      <a:fillRef idx="1">
+        <a:scrgbClr r="0" g="0" b="0"/>
+      </a:fillRef>
+      <a:effectRef idx="0">
+        <a:scrgbClr r="0" g="0" b="0"/>
+      </a:effectRef>
+      <a:fontRef idx="minor">
+        <a:schemeClr val="lt1"/>
+      </a:fontRef>
+    </dgm:style>
+  </dgm:styleLbl>
+  <dgm:styleLbl name="parChTrans2D1">
+    <dgm:scene3d>
+      <a:camera prst="orthographicFront"/>
+      <a:lightRig rig="threePt" dir="t"/>
+    </dgm:scene3d>
+    <dgm:sp3d/>
+    <dgm:txPr/>
+    <dgm:style>
+      <a:lnRef idx="2">
+        <a:scrgbClr r="0" g="0" b="0"/>
+      </a:lnRef>
+      <a:fillRef idx="1">
+        <a:scrgbClr r="0" g="0" b="0"/>
+      </a:fillRef>
+      <a:effectRef idx="0">
+        <a:scrgbClr r="0" g="0" b="0"/>
+      </a:effectRef>
+      <a:fontRef idx="minor">
+        <a:schemeClr val="lt1"/>
+      </a:fontRef>
+    </dgm:style>
+  </dgm:styleLbl>
+  <dgm:styleLbl name="parChTrans2D2">
+    <dgm:scene3d>
+      <a:camera prst="orthographicFront"/>
+      <a:lightRig rig="threePt" dir="t"/>
+    </dgm:scene3d>
+    <dgm:sp3d/>
+    <dgm:txPr/>
+    <dgm:style>
+      <a:lnRef idx="2">
+        <a:scrgbClr r="0" g="0" b="0"/>
+      </a:lnRef>
+      <a:fillRef idx="1">
+        <a:scrgbClr r="0" g="0" b="0"/>
+      </a:fillRef>
+      <a:effectRef idx="0">
+        <a:scrgbClr r="0" g="0" b="0"/>
+      </a:effectRef>
+      <a:fontRef idx="minor">
+        <a:schemeClr val="lt1"/>
+      </a:fontRef>
+    </dgm:style>
+  </dgm:styleLbl>
+  <dgm:styleLbl name="parChTrans2D3">
+    <dgm:scene3d>
+      <a:camera prst="orthographicFront"/>
+      <a:lightRig rig="threePt" dir="t"/>
+    </dgm:scene3d>
+    <dgm:sp3d/>
+    <dgm:txPr/>
+    <dgm:style>
+      <a:lnRef idx="2">
+        <a:scrgbClr r="0" g="0" b="0"/>
+      </a:lnRef>
+      <a:fillRef idx="1">
+        <a:scrgbClr r="0" g="0" b="0"/>
+      </a:fillRef>
+      <a:effectRef idx="0">
+        <a:scrgbClr r="0" g="0" b="0"/>
+      </a:effectRef>
+      <a:fontRef idx="minor">
+        <a:schemeClr val="lt1"/>
+      </a:fontRef>
+    </dgm:style>
+  </dgm:styleLbl>
+  <dgm:styleLbl name="parChTrans2D4">
+    <dgm:scene3d>
+      <a:camera prst="orthographicFront"/>
+      <a:lightRig rig="threePt" dir="t"/>
+    </dgm:scene3d>
+    <dgm:sp3d/>
+    <dgm:txPr/>
+    <dgm:style>
+      <a:lnRef idx="2">
+        <a:scrgbClr r="0" g="0" b="0"/>
+      </a:lnRef>
+      <a:fillRef idx="1">
+        <a:scrgbClr r="0" g="0" b="0"/>
+      </a:fillRef>
+      <a:effectRef idx="0">
+        <a:scrgbClr r="0" g="0" b="0"/>
+      </a:effectRef>
+      <a:fontRef idx="minor">
+        <a:schemeClr val="lt1"/>
+      </a:fontRef>
+    </dgm:style>
+  </dgm:styleLbl>
+  <dgm:styleLbl name="parChTrans1D1">
+    <dgm:scene3d>
+      <a:camera prst="orthographicFront"/>
+      <a:lightRig rig="threePt" dir="t"/>
+    </dgm:scene3d>
+    <dgm:sp3d/>
+    <dgm:txPr/>
+    <dgm:style>
+      <a:lnRef idx="2">
+        <a:scrgbClr r="0" g="0" b="0"/>
+      </a:lnRef>
+      <a:fillRef idx="0">
+        <a:scrgbClr r="0" g="0" b="0"/>
+      </a:fillRef>
+      <a:effectRef idx="0">
+        <a:scrgbClr r="0" g="0" b="0"/>
+      </a:effectRef>
+      <a:fontRef idx="minor"/>
+    </dgm:style>
+  </dgm:styleLbl>
+  <dgm:styleLbl name="parChTrans1D2">
+    <dgm:scene3d>
+      <a:camera prst="orthographicFront"/>
+      <a:lightRig rig="threePt" dir="t"/>
+    </dgm:scene3d>
+    <dgm:sp3d/>
+    <dgm:txPr/>
+    <dgm:style>
+      <a:lnRef idx="2">
+        <a:scrgbClr r="0" g="0" b="0"/>
+      </a:lnRef>
+      <a:fillRef idx="0">
+        <a:scrgbClr r="0" g="0" b="0"/>
+      </a:fillRef>
+      <a:effectRef idx="0">
+        <a:scrgbClr r="0" g="0" b="0"/>
+      </a:effectRef>
+      <a:fontRef idx="minor"/>
+    </dgm:style>
+  </dgm:styleLbl>
+  <dgm:styleLbl name="parChTrans1D3">
+    <dgm:scene3d>
+      <a:camera prst="orthographicFront"/>
+      <a:lightRig rig="threePt" dir="t"/>
+    </dgm:scene3d>
+    <dgm:sp3d/>
+    <dgm:txPr/>
+    <dgm:style>
+      <a:lnRef idx="2">
+        <a:scrgbClr r="0" g="0" b="0"/>
+      </a:lnRef>
+      <a:fillRef idx="0">
+        <a:scrgbClr r="0" g="0" b="0"/>
+      </a:fillRef>
+      <a:effectRef idx="0">
+        <a:scrgbClr r="0" g="0" b="0"/>
+      </a:effectRef>
+      <a:fontRef idx="minor"/>
+    </dgm:style>
+  </dgm:styleLbl>
+  <dgm:styleLbl name="parChTrans1D4">
+    <dgm:scene3d>
+      <a:camera prst="orthographicFront"/>
+      <a:lightRig rig="threePt" dir="t"/>
+    </dgm:scene3d>
+    <dgm:sp3d/>
+    <dgm:txPr/>
+    <dgm:style>
+      <a:lnRef idx="2">
+        <a:scrgbClr r="0" g="0" b="0"/>
+      </a:lnRef>
+      <a:fillRef idx="0">
+        <a:scrgbClr r="0" g="0" b="0"/>
+      </a:fillRef>
+      <a:effectRef idx="0">
+        <a:scrgbClr r="0" g="0" b="0"/>
+      </a:effectRef>
+      <a:fontRef idx="minor"/>
+    </dgm:style>
+  </dgm:styleLbl>
+  <dgm:styleLbl name="fgAcc1">
+    <dgm:scene3d>
+      <a:camera prst="orthographicFront"/>
+      <a:lightRig rig="threePt" dir="t"/>
+    </dgm:scene3d>
+    <dgm:sp3d/>
+    <dgm:txPr/>
+    <dgm:style>
+      <a:lnRef idx="2">
+        <a:scrgbClr r="0" g="0" b="0"/>
+      </a:lnRef>
+      <a:fillRef idx="1">
+        <a:scrgbClr r="0" g="0" b="0"/>
+      </a:fillRef>
+      <a:effectRef idx="0">
+        <a:scrgbClr r="0" g="0" b="0"/>
+      </a:effectRef>
+      <a:fontRef idx="minor"/>
+    </dgm:style>
+  </dgm:styleLbl>
+  <dgm:styleLbl name="conFgAcc1">
+    <dgm:scene3d>
+      <a:camera prst="orthographicFront"/>
+      <a:lightRig rig="threePt" dir="t"/>
+    </dgm:scene3d>
+    <dgm:sp3d/>
+    <dgm:txPr/>
+    <dgm:style>
+      <a:lnRef idx="2">
+        <a:scrgbClr r="0" g="0" b="0"/>
+      </a:lnRef>
+      <a:fillRef idx="1">
+        <a:scrgbClr r="0" g="0" b="0"/>
+      </a:fillRef>
+      <a:effectRef idx="0">
+        <a:scrgbClr r="0" g="0" b="0"/>
+      </a:effectRef>
+      <a:fontRef idx="minor"/>
+    </dgm:style>
+  </dgm:styleLbl>
+  <dgm:styleLbl name="alignAcc1">
+    <dgm:scene3d>
+      <a:camera prst="orthographicFront"/>
+      <a:lightRig rig="threePt" dir="t"/>
+    </dgm:scene3d>
+    <dgm:sp3d/>
+    <dgm:txPr/>
+    <dgm:style>
+      <a:lnRef idx="2">
+        <a:scrgbClr r="0" g="0" b="0"/>
+      </a:lnRef>
+      <a:fillRef idx="1">
+        <a:scrgbClr r="0" g="0" b="0"/>
+      </a:fillRef>
+      <a:effectRef idx="0">
+        <a:scrgbClr r="0" g="0" b="0"/>
+      </a:effectRef>
+      <a:fontRef idx="minor"/>
+    </dgm:style>
+  </dgm:styleLbl>
+  <dgm:styleLbl name="trAlignAcc1">
+    <dgm:scene3d>
+      <a:camera prst="orthographicFront"/>
+      <a:lightRig rig="threePt" dir="t"/>
+    </dgm:scene3d>
+    <dgm:sp3d/>
+    <dgm:txPr/>
+    <dgm:style>
+      <a:lnRef idx="1">
+        <a:scrgbClr r="0" g="0" b="0"/>
+      </a:lnRef>
+      <a:fillRef idx="1">
+        <a:scrgbClr r="0" g="0" b="0"/>
+      </a:fillRef>
+      <a:effectRef idx="0">
+        <a:scrgbClr r="0" g="0" b="0"/>
+      </a:effectRef>
+      <a:fontRef idx="minor"/>
+    </dgm:style>
+  </dgm:styleLbl>
+  <dgm:styleLbl name="bgAcc1">
+    <dgm:scene3d>
+      <a:camera prst="orthographicFront"/>
+      <a:lightRig rig="threePt" dir="t"/>
+    </dgm:scene3d>
+    <dgm:sp3d/>
+    <dgm:txPr/>
+    <dgm:style>
+      <a:lnRef idx="2">
+        <a:scrgbClr r="0" g="0" b="0"/>
+      </a:lnRef>
+      <a:fillRef idx="1">
+        <a:scrgbClr r="0" g="0" b="0"/>
+      </a:fillRef>
+      <a:effectRef idx="0">
+        <a:scrgbClr r="0" g="0" b="0"/>
+      </a:effectRef>
+      <a:fontRef idx="minor"/>
+    </dgm:style>
+  </dgm:styleLbl>
+  <dgm:styleLbl name="solidFgAcc1">
+    <dgm:scene3d>
+      <a:camera prst="orthographicFront"/>
+      <a:lightRig rig="threePt" dir="t"/>
+    </dgm:scene3d>
+    <dgm:sp3d/>
+    <dgm:txPr/>
+    <dgm:style>
+      <a:lnRef idx="2">
+        <a:scrgbClr r="0" g="0" b="0"/>
+      </a:lnRef>
+      <a:fillRef idx="1">
+        <a:scrgbClr r="0" g="0" b="0"/>
+      </a:fillRef>
+      <a:effectRef idx="0">
+        <a:scrgbClr r="0" g="0" b="0"/>
+      </a:effectRef>
+      <a:fontRef idx="minor"/>
+    </dgm:style>
+  </dgm:styleLbl>
+  <dgm:styleLbl name="solidAlignAcc1">
+    <dgm:scene3d>
+      <a:camera prst="orthographicFront"/>
+      <a:lightRig rig="threePt" dir="t"/>
+    </dgm:scene3d>
+    <dgm:sp3d/>
+    <dgm:txPr/>
+    <dgm:style>
+      <a:lnRef idx="2">
+        <a:scrgbClr r="0" g="0" b="0"/>
+      </a:lnRef>
+      <a:fillRef idx="1">
+        <a:scrgbClr r="0" g="0" b="0"/>
+      </a:fillRef>
+      <a:effectRef idx="0">
+        <a:scrgbClr r="0" g="0" b="0"/>
+      </a:effectRef>
+      <a:fontRef idx="minor"/>
+    </dgm:style>
+  </dgm:styleLbl>
+  <dgm:styleLbl name="solidBgAcc1">
+    <dgm:scene3d>
+      <a:camera prst="orthographicFront"/>
+      <a:lightRig rig="threePt" dir="t"/>
+    </dgm:scene3d>
+    <dgm:sp3d/>
+    <dgm:txPr/>
+    <dgm:style>
+      <a:lnRef idx="2">
+        <a:scrgbClr r="0" g="0" b="0"/>
+      </a:lnRef>
+      <a:fillRef idx="1">
+        <a:scrgbClr r="0" g="0" b="0"/>
+      </a:fillRef>
+      <a:effectRef idx="0">
+        <a:scrgbClr r="0" g="0" b="0"/>
+      </a:effectRef>
+      <a:fontRef idx="minor"/>
+    </dgm:style>
+  </dgm:styleLbl>
+  <dgm:styleLbl name="fgAccFollowNode1">
+    <dgm:scene3d>
+      <a:camera prst="orthographicFront"/>
+      <a:lightRig rig="threePt" dir="t"/>
+    </dgm:scene3d>
+    <dgm:sp3d/>
+    <dgm:txPr/>
+    <dgm:style>
+      <a:lnRef idx="2">
+        <a:scrgbClr r="0" g="0" b="0"/>
+      </a:lnRef>
+      <a:fillRef idx="1">
+        <a:scrgbClr r="0" g="0" b="0"/>
+      </a:fillRef>
+      <a:effectRef idx="0">
+        <a:scrgbClr r="0" g="0" b="0"/>
+      </a:effectRef>
+      <a:fontRef idx="minor"/>
+    </dgm:style>
+  </dgm:styleLbl>
+  <dgm:styleLbl name="alignAccFollowNode1">
+    <dgm:scene3d>
+      <a:camera prst="orthographicFront"/>
+      <a:lightRig rig="threePt" dir="t"/>
+    </dgm:scene3d>
+    <dgm:sp3d/>
+    <dgm:txPr/>
+    <dgm:style>
+      <a:lnRef idx="2">
+        <a:scrgbClr r="0" g="0" b="0"/>
+      </a:lnRef>
+      <a:fillRef idx="1">
+        <a:scrgbClr r="0" g="0" b="0"/>
+      </a:fillRef>
+      <a:effectRef idx="0">
+        <a:scrgbClr r="0" g="0" b="0"/>
+      </a:effectRef>
+      <a:fontRef idx="minor"/>
+    </dgm:style>
+  </dgm:styleLbl>
+  <dgm:styleLbl name="bgAccFollowNode1">
+    <dgm:scene3d>
+      <a:camera prst="orthographicFront"/>
+      <a:lightRig rig="threePt" dir="t"/>
+    </dgm:scene3d>
+    <dgm:sp3d/>
+    <dgm:txPr/>
+    <dgm:style>
+      <a:lnRef idx="2">
+        <a:scrgbClr r="0" g="0" b="0"/>
+      </a:lnRef>
+      <a:fillRef idx="1">
+        <a:scrgbClr r="0" g="0" b="0"/>
+      </a:fillRef>
+      <a:effectRef idx="0">
+        <a:scrgbClr r="0" g="0" b="0"/>
+      </a:effectRef>
+      <a:fontRef idx="minor"/>
+    </dgm:style>
+  </dgm:styleLbl>
+  <dgm:styleLbl name="fgAcc0">
+    <dgm:scene3d>
+      <a:camera prst="orthographicFront"/>
+      <a:lightRig rig="threePt" dir="t"/>
+    </dgm:scene3d>
+    <dgm:sp3d/>
+    <dgm:txPr/>
+    <dgm:style>
+      <a:lnRef idx="2">
+        <a:scrgbClr r="0" g="0" b="0"/>
+      </a:lnRef>
+      <a:fillRef idx="1">
+        <a:scrgbClr r="0" g="0" b="0"/>
+      </a:fillRef>
+      <a:effectRef idx="0">
+        <a:scrgbClr r="0" g="0" b="0"/>
+      </a:effectRef>
+      <a:fontRef idx="minor"/>
+    </dgm:style>
+  </dgm:styleLbl>
+  <dgm:styleLbl name="fgAcc2">
+    <dgm:scene3d>
+      <a:camera prst="orthographicFront"/>
+      <a:lightRig rig="threePt" dir="t"/>
+    </dgm:scene3d>
+    <dgm:sp3d/>
+    <dgm:txPr/>
+    <dgm:style>
+      <a:lnRef idx="2">
+        <a:scrgbClr r="0" g="0" b="0"/>
+      </a:lnRef>
+      <a:fillRef idx="1">
+        <a:scrgbClr r="0" g="0" b="0"/>
+      </a:fillRef>
+      <a:effectRef idx="0">
+        <a:scrgbClr r="0" g="0" b="0"/>
+      </a:effectRef>
+      <a:fontRef idx="minor"/>
+    </dgm:style>
+  </dgm:styleLbl>
+  <dgm:styleLbl name="fgAcc3">
+    <dgm:scene3d>
+      <a:camera prst="orthographicFront"/>
+      <a:lightRig rig="threePt" dir="t"/>
+    </dgm:scene3d>
+    <dgm:sp3d/>
+    <dgm:txPr/>
+    <dgm:style>
+      <a:lnRef idx="2">
+        <a:scrgbClr r="0" g="0" b="0"/>
+      </a:lnRef>
+      <a:fillRef idx="1">
+        <a:scrgbClr r="0" g="0" b="0"/>
+      </a:fillRef>
+      <a:effectRef idx="0">
+        <a:scrgbClr r="0" g="0" b="0"/>
+      </a:effectRef>
+      <a:fontRef idx="minor"/>
+    </dgm:style>
+  </dgm:styleLbl>
+  <dgm:styleLbl name="fgAcc4">
+    <dgm:scene3d>
+      <a:camera prst="orthographicFront"/>
+      <a:lightRig rig="threePt" dir="t"/>
+    </dgm:scene3d>
+    <dgm:sp3d/>
+    <dgm:txPr/>
+    <dgm:style>
+      <a:lnRef idx="2">
+        <a:scrgbClr r="0" g="0" b="0"/>
+      </a:lnRef>
+      <a:fillRef idx="1">
+        <a:scrgbClr r="0" g="0" b="0"/>
+      </a:fillRef>
+      <a:effectRef idx="0">
+        <a:scrgbClr r="0" g="0" b="0"/>
+      </a:effectRef>
+      <a:fontRef idx="minor"/>
+    </dgm:style>
+  </dgm:styleLbl>
+  <dgm:styleLbl name="bgShp">
+    <dgm:scene3d>
+      <a:camera prst="orthographicFront"/>
+      <a:lightRig rig="threePt" dir="t"/>
+    </dgm:scene3d>
+    <dgm:sp3d/>
+    <dgm:txPr/>
+    <dgm:style>
+      <a:lnRef idx="0">
+        <a:scrgbClr r="0" g="0" b="0"/>
+      </a:lnRef>
+      <a:fillRef idx="1">
+        <a:scrgbClr r="0" g="0" b="0"/>
+      </a:fillRef>
+      <a:effectRef idx="0">
+        <a:scrgbClr r="0" g="0" b="0"/>
+      </a:effectRef>
+      <a:fontRef idx="minor"/>
+    </dgm:style>
+  </dgm:styleLbl>
+  <dgm:styleLbl name="dkBgShp">
+    <dgm:scene3d>
+      <a:camera prst="orthographicFront"/>
+      <a:lightRig rig="threePt" dir="t"/>
+    </dgm:scene3d>
+    <dgm:sp3d/>
+    <dgm:txPr/>
+    <dgm:style>
+      <a:lnRef idx="0">
+        <a:scrgbClr r="0" g="0" b="0"/>
+      </a:lnRef>
+      <a:fillRef idx="1">
+        <a:scrgbClr r="0" g="0" b="0"/>
+      </a:fillRef>
+      <a:effectRef idx="0">
+        <a:scrgbClr r="0" g="0" b="0"/>
+      </a:effectRef>
+      <a:fontRef idx="minor"/>
+    </dgm:style>
+  </dgm:styleLbl>
+  <dgm:styleLbl name="trBgShp">
+    <dgm:scene3d>
+      <a:camera prst="orthographicFront"/>
+      <a:lightRig rig="threePt" dir="t"/>
+    </dgm:scene3d>
+    <dgm:sp3d/>
+    <dgm:txPr/>
+    <dgm:style>
+      <a:lnRef idx="0">
+        <a:scrgbClr r="0" g="0" b="0"/>
+      </a:lnRef>
+      <a:fillRef idx="1">
+        <a:scrgbClr r="0" g="0" b="0"/>
+      </a:fillRef>
+      <a:effectRef idx="0">
+        <a:scrgbClr r="0" g="0" b="0"/>
+      </a:effectRef>
+      <a:fontRef idx="minor"/>
+    </dgm:style>
+  </dgm:styleLbl>
+  <dgm:styleLbl name="fgShp">
+    <dgm:scene3d>
+      <a:camera prst="orthographicFront"/>
+      <a:lightRig rig="threePt" dir="t"/>
+    </dgm:scene3d>
+    <dgm:sp3d/>
+    <dgm:txPr/>
+    <dgm:style>
+      <a:lnRef idx="2">
+        <a:scrgbClr r="0" g="0" b="0"/>
+      </a:lnRef>
+      <a:fillRef idx="1">
+        <a:scrgbClr r="0" g="0" b="0"/>
+      </a:fillRef>
+      <a:effectRef idx="0">
+        <a:scrgbClr r="0" g="0" b="0"/>
+      </a:effectRef>
+      <a:fontRef idx="minor"/>
+    </dgm:style>
+  </dgm:styleLbl>
+  <dgm:styleLbl name="revTx">
+    <dgm:scene3d>
+      <a:camera prst="orthographicFront"/>
+      <a:lightRig rig="threePt" dir="t"/>
+    </dgm:scene3d>
+    <dgm:sp3d/>
+    <dgm:txPr/>
+    <dgm:style>
+      <a:lnRef idx="0">
+        <a:scrgbClr r="0" g="0" b="0"/>
+      </a:lnRef>
+      <a:fillRef idx="0">
+        <a:scrgbClr r="0" g="0" b="0"/>
+      </a:fillRef>
+      <a:effectRef idx="0">
+        <a:scrgbClr r="0" g="0" b="0"/>
+      </a:effectRef>
+      <a:fontRef idx="minor"/>
+    </dgm:style>
+  </dgm:styleLbl>
+</dgm:styleDef>
 </file>
 
 <file path=ppt/slideLayouts/slideLayout1.xml><?xml version="1.0" encoding="utf-8"?>
@@ -3600,6 +6804,14 @@
 <file path=ppt/slides/slide1.xml><?xml version="1.0" encoding="utf-8"?>
 <p:sld xmlns:a="http://schemas.openxmlformats.org/drawingml/2006/main" xmlns:r="http://schemas.openxmlformats.org/officeDocument/2006/relationships" xmlns:p="http://schemas.openxmlformats.org/presentationml/2006/main">
   <p:cSld>
+    <p:bg>
+      <p:bgPr>
+        <a:solidFill>
+          <a:schemeClr val="bg1"/>
+        </a:solidFill>
+        <a:effectLst/>
+      </p:bgPr>
+    </p:bg>
     <p:spTree>
       <p:nvGrpSpPr>
         <p:cNvPr id="1" name=""/>
@@ -3614,6 +6826,199 @@
           <a:chExt cx="0" cy="0"/>
         </a:xfrm>
       </p:grpSpPr>
+      <p:sp useBgFill="1">
+        <p:nvSpPr>
+          <p:cNvPr id="8" name="Rectangle 7">
+            <a:extLst>
+              <a:ext uri="{FF2B5EF4-FFF2-40B4-BE49-F238E27FC236}">
+                <a16:creationId xmlns:a16="http://schemas.microsoft.com/office/drawing/2014/main" id="{4522B21E-B2B9-4C72-9A71-C87EFD137480}"/>
+              </a:ext>
+              <a:ext uri="{C183D7F6-B498-43B3-948B-1728B52AA6E4}">
+                <adec:decorative xmlns:adec="http://schemas.microsoft.com/office/drawing/2017/decorative" val="1"/>
+              </a:ext>
+            </a:extLst>
+          </p:cNvPr>
+          <p:cNvSpPr>
+            <a:spLocks noGrp="1" noRot="1" noChangeAspect="1" noMove="1" noResize="1" noEditPoints="1" noAdjustHandles="1" noChangeArrowheads="1" noChangeShapeType="1" noTextEdit="1"/>
+          </p:cNvSpPr>
+          <p:nvPr>
+            <p:extLst>
+              <p:ext uri="{386F3935-93C4-4BCD-93E2-E3B085C9AB24}">
+                <p16:designElem xmlns:p16="http://schemas.microsoft.com/office/powerpoint/2015/main" val="1"/>
+              </p:ext>
+            </p:extLst>
+          </p:nvPr>
+        </p:nvSpPr>
+        <p:spPr>
+          <a:xfrm>
+            <a:off x="0" y="0"/>
+            <a:ext cx="12191999" cy="6857365"/>
+          </a:xfrm>
+          <a:prstGeom prst="rect">
+            <a:avLst/>
+          </a:prstGeom>
+          <a:ln>
+            <a:noFill/>
+          </a:ln>
+        </p:spPr>
+        <p:style>
+          <a:lnRef idx="2">
+            <a:schemeClr val="accent1">
+              <a:shade val="50000"/>
+            </a:schemeClr>
+          </a:lnRef>
+          <a:fillRef idx="1">
+            <a:schemeClr val="accent1"/>
+          </a:fillRef>
+          <a:effectRef idx="0">
+            <a:schemeClr val="accent1"/>
+          </a:effectRef>
+          <a:fontRef idx="minor">
+            <a:schemeClr val="lt1"/>
+          </a:fontRef>
+        </p:style>
+        <p:txBody>
+          <a:bodyPr rtlCol="0" anchor="ctr"/>
+          <a:lstStyle/>
+          <a:p>
+            <a:pPr algn="ctr"/>
+            <a:endParaRPr lang="en-US"/>
+          </a:p>
+        </p:txBody>
+      </p:sp>
+      <p:sp>
+        <p:nvSpPr>
+          <p:cNvPr id="10" name="Rectangle 9">
+            <a:extLst>
+              <a:ext uri="{FF2B5EF4-FFF2-40B4-BE49-F238E27FC236}">
+                <a16:creationId xmlns:a16="http://schemas.microsoft.com/office/drawing/2014/main" id="{5EB7D2A2-F448-44D4-938C-DC84CBCB3B1E}"/>
+              </a:ext>
+              <a:ext uri="{C183D7F6-B498-43B3-948B-1728B52AA6E4}">
+                <adec:decorative xmlns:adec="http://schemas.microsoft.com/office/drawing/2017/decorative" val="1"/>
+              </a:ext>
+            </a:extLst>
+          </p:cNvPr>
+          <p:cNvSpPr>
+            <a:spLocks noGrp="1" noRot="1" noChangeAspect="1" noMove="1" noResize="1" noEditPoints="1" noAdjustHandles="1" noChangeArrowheads="1" noChangeShapeType="1" noTextEdit="1"/>
+          </p:cNvSpPr>
+          <p:nvPr>
+            <p:extLst>
+              <p:ext uri="{386F3935-93C4-4BCD-93E2-E3B085C9AB24}">
+                <p16:designElem xmlns:p16="http://schemas.microsoft.com/office/powerpoint/2015/main" val="1"/>
+              </p:ext>
+            </p:extLst>
+          </p:nvPr>
+        </p:nvSpPr>
+        <p:spPr>
+          <a:xfrm>
+            <a:off x="0" y="2"/>
+            <a:ext cx="12192000" cy="4412583"/>
+          </a:xfrm>
+          <a:prstGeom prst="rect">
+            <a:avLst/>
+          </a:prstGeom>
+          <a:solidFill>
+            <a:schemeClr val="accent4"/>
+          </a:solidFill>
+          <a:ln>
+            <a:noFill/>
+          </a:ln>
+        </p:spPr>
+        <p:style>
+          <a:lnRef idx="2">
+            <a:schemeClr val="accent1">
+              <a:shade val="50000"/>
+            </a:schemeClr>
+          </a:lnRef>
+          <a:fillRef idx="1">
+            <a:schemeClr val="accent1"/>
+          </a:fillRef>
+          <a:effectRef idx="0">
+            <a:schemeClr val="accent1"/>
+          </a:effectRef>
+          <a:fontRef idx="minor">
+            <a:schemeClr val="lt1"/>
+          </a:fontRef>
+        </p:style>
+        <p:txBody>
+          <a:bodyPr rtlCol="0" anchor="ctr"/>
+          <a:lstStyle/>
+          <a:p>
+            <a:pPr algn="ctr"/>
+            <a:endParaRPr lang="en-US" dirty="0"/>
+          </a:p>
+        </p:txBody>
+      </p:sp>
+      <p:sp>
+        <p:nvSpPr>
+          <p:cNvPr id="12" name="Rectangle 11">
+            <a:extLst>
+              <a:ext uri="{FF2B5EF4-FFF2-40B4-BE49-F238E27FC236}">
+                <a16:creationId xmlns:a16="http://schemas.microsoft.com/office/drawing/2014/main" id="{871AEA07-1E14-44B4-8E55-64EF049CD66F}"/>
+              </a:ext>
+              <a:ext uri="{C183D7F6-B498-43B3-948B-1728B52AA6E4}">
+                <adec:decorative xmlns:adec="http://schemas.microsoft.com/office/drawing/2017/decorative" val="1"/>
+              </a:ext>
+            </a:extLst>
+          </p:cNvPr>
+          <p:cNvSpPr>
+            <a:spLocks noGrp="1" noRot="1" noChangeAspect="1" noMove="1" noResize="1" noEditPoints="1" noAdjustHandles="1" noChangeArrowheads="1" noChangeShapeType="1" noTextEdit="1"/>
+          </p:cNvSpPr>
+          <p:nvPr>
+            <p:extLst>
+              <p:ext uri="{386F3935-93C4-4BCD-93E2-E3B085C9AB24}">
+                <p16:designElem xmlns:p16="http://schemas.microsoft.com/office/powerpoint/2015/main" val="1"/>
+              </p:ext>
+            </p:extLst>
+          </p:nvPr>
+        </p:nvSpPr>
+        <p:spPr>
+          <a:xfrm>
+            <a:off x="596464" y="551962"/>
+            <a:ext cx="10999072" cy="4618549"/>
+          </a:xfrm>
+          <a:prstGeom prst="rect">
+            <a:avLst/>
+          </a:prstGeom>
+          <a:solidFill>
+            <a:schemeClr val="bg1"/>
+          </a:solidFill>
+          <a:ln>
+            <a:noFill/>
+          </a:ln>
+          <a:effectLst>
+            <a:outerShdw blurRad="139700" dist="127000" dir="5400000" algn="t" rotWithShape="0">
+              <a:prstClr val="black">
+                <a:alpha val="15000"/>
+              </a:prstClr>
+            </a:outerShdw>
+          </a:effectLst>
+        </p:spPr>
+        <p:style>
+          <a:lnRef idx="2">
+            <a:schemeClr val="accent1">
+              <a:shade val="50000"/>
+            </a:schemeClr>
+          </a:lnRef>
+          <a:fillRef idx="1">
+            <a:schemeClr val="accent1"/>
+          </a:fillRef>
+          <a:effectRef idx="0">
+            <a:schemeClr val="accent1"/>
+          </a:effectRef>
+          <a:fontRef idx="minor">
+            <a:schemeClr val="lt1"/>
+          </a:fontRef>
+        </p:style>
+        <p:txBody>
+          <a:bodyPr rtlCol="0" anchor="ctr"/>
+          <a:lstStyle/>
+          <a:p>
+            <a:pPr algn="ctr"/>
+            <a:endParaRPr lang="en-US"/>
+          </a:p>
+        </p:txBody>
+      </p:sp>
       <p:sp>
         <p:nvSpPr>
           <p:cNvPr id="2" name="タイトル 1">
@@ -3630,19 +7035,26 @@
             <p:ph type="ctrTitle"/>
           </p:nvPr>
         </p:nvSpPr>
-        <p:spPr/>
+        <p:spPr>
+          <a:xfrm>
+            <a:off x="1524000" y="1293338"/>
+            <a:ext cx="9144000" cy="3274592"/>
+          </a:xfrm>
+        </p:spPr>
         <p:txBody>
-          <a:bodyPr/>
+          <a:bodyPr anchor="ctr">
+            <a:normAutofit/>
+          </a:bodyPr>
           <a:lstStyle/>
           <a:p>
             <a:r>
-              <a:rPr kumimoji="1" lang="en-US" altLang="ja-JP" dirty="0">
+              <a:rPr kumimoji="1" lang="en-US" altLang="ja-JP" sz="7200">
                 <a:latin typeface="ＭＳ ゴシック" panose="020B0609070205080204" pitchFamily="49" charset="-128"/>
                 <a:ea typeface="ＭＳ ゴシック" panose="020B0609070205080204" pitchFamily="49" charset="-128"/>
               </a:rPr>
               <a:t>IdeaStream</a:t>
             </a:r>
-            <a:endParaRPr kumimoji="1" lang="ja-JP" altLang="en-US" dirty="0">
+            <a:endParaRPr kumimoji="1" lang="ja-JP" altLang="en-US" sz="7200">
               <a:latin typeface="ＭＳ ゴシック" panose="020B0609070205080204" pitchFamily="49" charset="-128"/>
               <a:ea typeface="ＭＳ ゴシック" panose="020B0609070205080204" pitchFamily="49" charset="-128"/>
             </a:endParaRPr>
@@ -3665,9 +7077,16 @@
             <p:ph type="subTitle" idx="1"/>
           </p:nvPr>
         </p:nvSpPr>
-        <p:spPr/>
+        <p:spPr>
+          <a:xfrm>
+            <a:off x="1524000" y="5514052"/>
+            <a:ext cx="9144000" cy="651910"/>
+          </a:xfrm>
+        </p:spPr>
         <p:txBody>
-          <a:bodyPr/>
+          <a:bodyPr anchor="ctr">
+            <a:normAutofit/>
+          </a:bodyPr>
           <a:lstStyle/>
           <a:p>
             <a:r>
@@ -3684,6 +7103,58 @@
           </a:p>
         </p:txBody>
       </p:sp>
+      <p:cxnSp>
+        <p:nvCxnSpPr>
+          <p:cNvPr id="14" name="Straight Connector 13">
+            <a:extLst>
+              <a:ext uri="{FF2B5EF4-FFF2-40B4-BE49-F238E27FC236}">
+                <a16:creationId xmlns:a16="http://schemas.microsoft.com/office/drawing/2014/main" id="{F7C8EA93-3210-4C62-99E9-153C275E3A87}"/>
+              </a:ext>
+              <a:ext uri="{C183D7F6-B498-43B3-948B-1728B52AA6E4}">
+                <adec:decorative xmlns:adec="http://schemas.microsoft.com/office/drawing/2017/decorative" val="1"/>
+              </a:ext>
+            </a:extLst>
+          </p:cNvPr>
+          <p:cNvCxnSpPr>
+            <a:cxnSpLocks noGrp="1" noRot="1" noChangeAspect="1" noMove="1" noResize="1" noEditPoints="1" noAdjustHandles="1" noChangeArrowheads="1" noChangeShapeType="1"/>
+          </p:cNvCxnSpPr>
+          <p:nvPr>
+            <p:extLst>
+              <p:ext uri="{386F3935-93C4-4BCD-93E2-E3B085C9AB24}">
+                <p16:designElem xmlns:p16="http://schemas.microsoft.com/office/powerpoint/2015/main" val="1"/>
+              </p:ext>
+            </p:extLst>
+          </p:nvPr>
+        </p:nvCxnSpPr>
+        <p:spPr>
+          <a:xfrm flipH="1">
+            <a:off x="596464" y="6354708"/>
+            <a:ext cx="11000232" cy="0"/>
+          </a:xfrm>
+          <a:prstGeom prst="line">
+            <a:avLst/>
+          </a:prstGeom>
+          <a:ln w="101600">
+            <a:solidFill>
+              <a:schemeClr val="accent4"/>
+            </a:solidFill>
+          </a:ln>
+        </p:spPr>
+        <p:style>
+          <a:lnRef idx="1">
+            <a:schemeClr val="accent1"/>
+          </a:lnRef>
+          <a:fillRef idx="0">
+            <a:schemeClr val="accent1"/>
+          </a:fillRef>
+          <a:effectRef idx="0">
+            <a:schemeClr val="accent1"/>
+          </a:effectRef>
+          <a:fontRef idx="minor">
+            <a:schemeClr val="tx1"/>
+          </a:fontRef>
+        </p:style>
+      </p:cxnSp>
     </p:spTree>
     <p:extLst>
       <p:ext uri="{BB962C8B-B14F-4D97-AF65-F5344CB8AC3E}">
@@ -3700,6 +7171,14 @@
 <file path=ppt/slides/slide2.xml><?xml version="1.0" encoding="utf-8"?>
 <p:sld xmlns:a="http://schemas.openxmlformats.org/drawingml/2006/main" xmlns:r="http://schemas.openxmlformats.org/officeDocument/2006/relationships" xmlns:p="http://schemas.openxmlformats.org/presentationml/2006/main">
   <p:cSld>
+    <p:bg>
+      <p:bgPr>
+        <a:solidFill>
+          <a:schemeClr val="bg1"/>
+        </a:solidFill>
+        <a:effectLst/>
+      </p:bgPr>
+    </p:bg>
     <p:spTree>
       <p:nvGrpSpPr>
         <p:cNvPr id="1" name=""/>
@@ -3714,15 +7193,351 @@
           <a:chExt cx="0" cy="0"/>
         </a:xfrm>
       </p:grpSpPr>
+      <p:sp useBgFill="1">
+        <p:nvSpPr>
+          <p:cNvPr id="8" name="Rectangle 7">
+            <a:extLst>
+              <a:ext uri="{FF2B5EF4-FFF2-40B4-BE49-F238E27FC236}">
+                <a16:creationId xmlns:a16="http://schemas.microsoft.com/office/drawing/2014/main" id="{B6CDA21F-E7AF-4C75-8395-33F58D5B0E45}"/>
+              </a:ext>
+              <a:ext uri="{C183D7F6-B498-43B3-948B-1728B52AA6E4}">
+                <adec:decorative xmlns:adec="http://schemas.microsoft.com/office/drawing/2017/decorative" val="1"/>
+              </a:ext>
+            </a:extLst>
+          </p:cNvPr>
+          <p:cNvSpPr>
+            <a:spLocks noGrp="1" noRot="1" noChangeAspect="1" noMove="1" noResize="1" noEditPoints="1" noAdjustHandles="1" noChangeArrowheads="1" noChangeShapeType="1" noTextEdit="1"/>
+          </p:cNvSpPr>
+          <p:nvPr>
+            <p:extLst>
+              <p:ext uri="{386F3935-93C4-4BCD-93E2-E3B085C9AB24}">
+                <p16:designElem xmlns:p16="http://schemas.microsoft.com/office/powerpoint/2015/main" val="1"/>
+              </p:ext>
+            </p:extLst>
+          </p:nvPr>
+        </p:nvSpPr>
+        <p:spPr>
+          <a:xfrm>
+            <a:off x="0" y="0"/>
+            <a:ext cx="12191999" cy="6857365"/>
+          </a:xfrm>
+          <a:prstGeom prst="rect">
+            <a:avLst/>
+          </a:prstGeom>
+          <a:ln>
+            <a:noFill/>
+          </a:ln>
+        </p:spPr>
+        <p:style>
+          <a:lnRef idx="2">
+            <a:schemeClr val="accent1">
+              <a:shade val="50000"/>
+            </a:schemeClr>
+          </a:lnRef>
+          <a:fillRef idx="1">
+            <a:schemeClr val="accent1"/>
+          </a:fillRef>
+          <a:effectRef idx="0">
+            <a:schemeClr val="accent1"/>
+          </a:effectRef>
+          <a:fontRef idx="minor">
+            <a:schemeClr val="lt1"/>
+          </a:fontRef>
+        </p:style>
+        <p:txBody>
+          <a:bodyPr rtlCol="0" anchor="ctr"/>
+          <a:lstStyle/>
+          <a:p>
+            <a:pPr algn="ctr"/>
+            <a:endParaRPr lang="en-US"/>
+          </a:p>
+        </p:txBody>
+      </p:sp>
+      <p:grpSp>
+        <p:nvGrpSpPr>
+          <p:cNvPr id="10" name="Group 9">
+            <a:extLst>
+              <a:ext uri="{FF2B5EF4-FFF2-40B4-BE49-F238E27FC236}">
+                <a16:creationId xmlns:a16="http://schemas.microsoft.com/office/drawing/2014/main" id="{AE1C45F0-260A-458C-96ED-C1F6D2151219}"/>
+              </a:ext>
+              <a:ext uri="{C183D7F6-B498-43B3-948B-1728B52AA6E4}">
+                <adec:decorative xmlns:adec="http://schemas.microsoft.com/office/drawing/2017/decorative" val="1"/>
+              </a:ext>
+            </a:extLst>
+          </p:cNvPr>
+          <p:cNvGrpSpPr>
+            <a:grpSpLocks noGrp="1" noUngrp="1" noRot="1" noChangeAspect="1" noMove="1" noResize="1"/>
+          </p:cNvGrpSpPr>
+          <p:nvPr>
+            <p:extLst>
+              <p:ext uri="{386F3935-93C4-4BCD-93E2-E3B085C9AB24}">
+                <p16:designElem xmlns:p16="http://schemas.microsoft.com/office/powerpoint/2015/main" val="1"/>
+              </p:ext>
+            </p:extLst>
+          </p:nvPr>
+        </p:nvGrpSpPr>
+        <p:grpSpPr>
+          <a:xfrm>
+            <a:off x="4" y="1216597"/>
+            <a:ext cx="731521" cy="673460"/>
+            <a:chOff x="3940602" y="308034"/>
+            <a:chExt cx="2116791" cy="3428999"/>
+          </a:xfrm>
+          <a:solidFill>
+            <a:schemeClr val="accent4"/>
+          </a:solidFill>
+        </p:grpSpPr>
+        <p:sp>
+          <p:nvSpPr>
+            <p:cNvPr id="11" name="Rectangle 10">
+              <a:extLst>
+                <a:ext uri="{FF2B5EF4-FFF2-40B4-BE49-F238E27FC236}">
+                  <a16:creationId xmlns:a16="http://schemas.microsoft.com/office/drawing/2014/main" id="{A6604B49-AD5C-4590-B051-06C8222ECD99}"/>
+                </a:ext>
+                <a:ext uri="{C183D7F6-B498-43B3-948B-1728B52AA6E4}">
+                  <adec:decorative xmlns:adec="http://schemas.microsoft.com/office/drawing/2017/decorative" val="1"/>
+                </a:ext>
+              </a:extLst>
+            </p:cNvPr>
+            <p:cNvSpPr/>
+            <p:nvPr>
+              <p:extLst>
+                <p:ext uri="{386F3935-93C4-4BCD-93E2-E3B085C9AB24}">
+                  <p16:designElem xmlns:p16="http://schemas.microsoft.com/office/powerpoint/2015/main" val="1"/>
+                </p:ext>
+              </p:extLst>
+            </p:nvPr>
+          </p:nvSpPr>
+          <p:spPr>
+            <a:xfrm>
+              <a:off x="3940602" y="308034"/>
+              <a:ext cx="566743" cy="3428999"/>
+            </a:xfrm>
+            <a:prstGeom prst="rect">
+              <a:avLst/>
+            </a:prstGeom>
+            <a:grpFill/>
+            <a:ln>
+              <a:noFill/>
+            </a:ln>
+          </p:spPr>
+          <p:style>
+            <a:lnRef idx="2">
+              <a:schemeClr val="accent1">
+                <a:shade val="50000"/>
+              </a:schemeClr>
+            </a:lnRef>
+            <a:fillRef idx="1">
+              <a:schemeClr val="accent1"/>
+            </a:fillRef>
+            <a:effectRef idx="0">
+              <a:schemeClr val="accent1"/>
+            </a:effectRef>
+            <a:fontRef idx="minor">
+              <a:schemeClr val="lt1"/>
+            </a:fontRef>
+          </p:style>
+          <p:txBody>
+            <a:bodyPr rtlCol="0" anchor="ctr"/>
+            <a:lstStyle/>
+            <a:p>
+              <a:pPr algn="ctr"/>
+              <a:endParaRPr lang="en-US"/>
+            </a:p>
+          </p:txBody>
+        </p:sp>
+        <p:sp>
+          <p:nvSpPr>
+            <p:cNvPr id="12" name="Rectangle 11">
+              <a:extLst>
+                <a:ext uri="{FF2B5EF4-FFF2-40B4-BE49-F238E27FC236}">
+                  <a16:creationId xmlns:a16="http://schemas.microsoft.com/office/drawing/2014/main" id="{743ECCAF-29C5-4537-947C-7EA1292463DB}"/>
+                </a:ext>
+                <a:ext uri="{C183D7F6-B498-43B3-948B-1728B52AA6E4}">
+                  <adec:decorative xmlns:adec="http://schemas.microsoft.com/office/drawing/2017/decorative" val="1"/>
+                </a:ext>
+              </a:extLst>
+            </p:cNvPr>
+            <p:cNvSpPr/>
+            <p:nvPr>
+              <p:extLst>
+                <p:ext uri="{386F3935-93C4-4BCD-93E2-E3B085C9AB24}">
+                  <p16:designElem xmlns:p16="http://schemas.microsoft.com/office/powerpoint/2015/main" val="1"/>
+                </p:ext>
+              </p:extLst>
+            </p:nvPr>
+          </p:nvSpPr>
+          <p:spPr>
+            <a:xfrm>
+              <a:off x="4715626" y="308034"/>
+              <a:ext cx="566743" cy="3428999"/>
+            </a:xfrm>
+            <a:prstGeom prst="rect">
+              <a:avLst/>
+            </a:prstGeom>
+            <a:grpFill/>
+            <a:ln>
+              <a:noFill/>
+            </a:ln>
+          </p:spPr>
+          <p:style>
+            <a:lnRef idx="2">
+              <a:schemeClr val="accent1">
+                <a:shade val="50000"/>
+              </a:schemeClr>
+            </a:lnRef>
+            <a:fillRef idx="1">
+              <a:schemeClr val="accent1"/>
+            </a:fillRef>
+            <a:effectRef idx="0">
+              <a:schemeClr val="accent1"/>
+            </a:effectRef>
+            <a:fontRef idx="minor">
+              <a:schemeClr val="lt1"/>
+            </a:fontRef>
+          </p:style>
+          <p:txBody>
+            <a:bodyPr rtlCol="0" anchor="ctr"/>
+            <a:lstStyle/>
+            <a:p>
+              <a:pPr algn="ctr"/>
+              <a:endParaRPr lang="en-US"/>
+            </a:p>
+          </p:txBody>
+        </p:sp>
+        <p:sp>
+          <p:nvSpPr>
+            <p:cNvPr id="13" name="Rectangle 12">
+              <a:extLst>
+                <a:ext uri="{FF2B5EF4-FFF2-40B4-BE49-F238E27FC236}">
+                  <a16:creationId xmlns:a16="http://schemas.microsoft.com/office/drawing/2014/main" id="{ED49787B-8DE6-4467-AD0A-8DECC6E0C2D6}"/>
+                </a:ext>
+                <a:ext uri="{C183D7F6-B498-43B3-948B-1728B52AA6E4}">
+                  <adec:decorative xmlns:adec="http://schemas.microsoft.com/office/drawing/2017/decorative" val="1"/>
+                </a:ext>
+              </a:extLst>
+            </p:cNvPr>
+            <p:cNvSpPr/>
+            <p:nvPr>
+              <p:extLst>
+                <p:ext uri="{386F3935-93C4-4BCD-93E2-E3B085C9AB24}">
+                  <p16:designElem xmlns:p16="http://schemas.microsoft.com/office/powerpoint/2015/main" val="1"/>
+                </p:ext>
+              </p:extLst>
+            </p:nvPr>
+          </p:nvSpPr>
+          <p:spPr>
+            <a:xfrm>
+              <a:off x="5490650" y="308034"/>
+              <a:ext cx="566743" cy="3428999"/>
+            </a:xfrm>
+            <a:prstGeom prst="rect">
+              <a:avLst/>
+            </a:prstGeom>
+            <a:grpFill/>
+            <a:ln>
+              <a:noFill/>
+            </a:ln>
+          </p:spPr>
+          <p:style>
+            <a:lnRef idx="2">
+              <a:schemeClr val="accent1">
+                <a:shade val="50000"/>
+              </a:schemeClr>
+            </a:lnRef>
+            <a:fillRef idx="1">
+              <a:schemeClr val="accent1"/>
+            </a:fillRef>
+            <a:effectRef idx="0">
+              <a:schemeClr val="accent1"/>
+            </a:effectRef>
+            <a:fontRef idx="minor">
+              <a:schemeClr val="lt1"/>
+            </a:fontRef>
+          </p:style>
+          <p:txBody>
+            <a:bodyPr rtlCol="0" anchor="ctr"/>
+            <a:lstStyle/>
+            <a:p>
+              <a:pPr algn="ctr"/>
+              <a:endParaRPr lang="en-US"/>
+            </a:p>
+          </p:txBody>
+        </p:sp>
+      </p:grpSp>
       <p:sp>
         <p:nvSpPr>
-          <p:cNvPr id="2" name="タイトル 1">
+          <p:cNvPr id="15" name="Rectangle 14">
             <a:extLst>
               <a:ext uri="{FF2B5EF4-FFF2-40B4-BE49-F238E27FC236}">
-                <a16:creationId xmlns:a16="http://schemas.microsoft.com/office/drawing/2014/main" id="{A11F550E-378E-3B4D-1834-C97BBD738946}"/>
+                <a16:creationId xmlns:a16="http://schemas.microsoft.com/office/drawing/2014/main" id="{D5B0017B-2ECA-49AF-B397-DC140825DF8D}"/>
+              </a:ext>
+              <a:ext uri="{C183D7F6-B498-43B3-948B-1728B52AA6E4}">
+                <adec:decorative xmlns:adec="http://schemas.microsoft.com/office/drawing/2017/decorative" val="1"/>
               </a:ext>
             </a:extLst>
           </p:cNvPr>
+          <p:cNvSpPr>
+            <a:spLocks noGrp="1" noRot="1" noChangeAspect="1" noMove="1" noResize="1" noEditPoints="1" noAdjustHandles="1" noChangeArrowheads="1" noChangeShapeType="1" noTextEdit="1"/>
+          </p:cNvSpPr>
+          <p:nvPr>
+            <p:extLst>
+              <p:ext uri="{386F3935-93C4-4BCD-93E2-E3B085C9AB24}">
+                <p16:designElem xmlns:p16="http://schemas.microsoft.com/office/powerpoint/2015/main" val="1"/>
+              </p:ext>
+            </p:extLst>
+          </p:nvPr>
+        </p:nvSpPr>
+        <p:spPr>
+          <a:xfrm>
+            <a:off x="640079" y="613954"/>
+            <a:ext cx="10907487" cy="1894116"/>
+          </a:xfrm>
+          <a:prstGeom prst="rect">
+            <a:avLst/>
+          </a:prstGeom>
+          <a:solidFill>
+            <a:schemeClr val="bg1"/>
+          </a:solidFill>
+          <a:ln>
+            <a:noFill/>
+          </a:ln>
+          <a:effectLst>
+            <a:outerShdw blurRad="139700" dist="127000" dir="5400000" algn="t" rotWithShape="0">
+              <a:prstClr val="black">
+                <a:alpha val="15000"/>
+              </a:prstClr>
+            </a:outerShdw>
+          </a:effectLst>
+        </p:spPr>
+        <p:style>
+          <a:lnRef idx="2">
+            <a:schemeClr val="accent1">
+              <a:shade val="50000"/>
+            </a:schemeClr>
+          </a:lnRef>
+          <a:fillRef idx="1">
+            <a:schemeClr val="accent1"/>
+          </a:fillRef>
+          <a:effectRef idx="0">
+            <a:schemeClr val="accent1"/>
+          </a:effectRef>
+          <a:fontRef idx="minor">
+            <a:schemeClr val="lt1"/>
+          </a:fontRef>
+        </p:style>
+        <p:txBody>
+          <a:bodyPr rtlCol="0" anchor="ctr"/>
+          <a:lstStyle/>
+          <a:p>
+            <a:pPr algn="ctr"/>
+            <a:endParaRPr lang="en-US"/>
+          </a:p>
+        </p:txBody>
+      </p:sp>
+      <p:sp>
+        <p:nvSpPr>
+          <p:cNvPr id="2" name="Title 1"/>
           <p:cNvSpPr>
             <a:spLocks noGrp="1"/>
           </p:cNvSpPr>
@@ -3730,24 +7545,31 @@
             <p:ph type="title"/>
           </p:nvPr>
         </p:nvSpPr>
-        <p:spPr/>
+        <p:spPr>
+          <a:xfrm>
+            <a:off x="1043631" y="809898"/>
+            <a:ext cx="9942716" cy="1554480"/>
+          </a:xfrm>
+        </p:spPr>
         <p:txBody>
-          <a:bodyPr/>
+          <a:bodyPr anchor="ctr">
+            <a:normAutofit/>
+          </a:bodyPr>
           <a:lstStyle/>
           <a:p>
-            <a:endParaRPr kumimoji="1" lang="ja-JP" altLang="en-US"/>
+            <a:r>
+              <a:rPr lang="ja-JP" altLang="en-US" sz="4800">
+                <a:latin typeface="ＭＳ ゴシック" panose="020B0609070205080204" pitchFamily="49" charset="-128"/>
+                <a:ea typeface="ＭＳ ゴシック" panose="020B0609070205080204" pitchFamily="49" charset="-128"/>
+              </a:rPr>
+              <a:t>企画概要</a:t>
+            </a:r>
           </a:p>
         </p:txBody>
       </p:sp>
       <p:sp>
         <p:nvSpPr>
-          <p:cNvPr id="3" name="コンテンツ プレースホルダー 2">
-            <a:extLst>
-              <a:ext uri="{FF2B5EF4-FFF2-40B4-BE49-F238E27FC236}">
-                <a16:creationId xmlns:a16="http://schemas.microsoft.com/office/drawing/2014/main" id="{624A5672-EF9F-CB37-55EB-712615B0E380}"/>
-              </a:ext>
-            </a:extLst>
-          </p:cNvPr>
+          <p:cNvPr id="3" name="Content Placeholder 2"/>
           <p:cNvSpPr>
             <a:spLocks noGrp="1"/>
           </p:cNvSpPr>
@@ -3755,21 +7577,212 @@
             <p:ph idx="1"/>
           </p:nvPr>
         </p:nvSpPr>
-        <p:spPr/>
+        <p:spPr>
+          <a:xfrm>
+            <a:off x="1045028" y="3017522"/>
+            <a:ext cx="9941319" cy="3124658"/>
+          </a:xfrm>
+        </p:spPr>
         <p:txBody>
-          <a:bodyPr/>
+          <a:bodyPr anchor="ctr">
+            <a:normAutofit/>
+          </a:bodyPr>
           <a:lstStyle/>
           <a:p>
-            <a:endParaRPr kumimoji="1" lang="ja-JP" altLang="en-US"/>
+            <a:endParaRPr lang="ja-JP" altLang="en-US" sz="1300" dirty="0"/>
+          </a:p>
+          <a:p>
+            <a:pPr>
+              <a:tabLst>
+                <a:tab pos="1879600" algn="l"/>
+              </a:tabLst>
+            </a:pPr>
+            <a:r>
+              <a:rPr lang="en-US" altLang="ja-JP" sz="1300" dirty="0"/>
+              <a:t>IdeaStream </a:t>
+            </a:r>
+            <a:br>
+              <a:rPr lang="en-US" altLang="ja-JP" sz="1300" dirty="0"/>
+            </a:br>
+            <a:r>
+              <a:rPr lang="ja-JP" altLang="en-US" sz="1300" dirty="0"/>
+              <a:t>アイデア（テキスト／画像／音声）を素早く記録・整理し、</a:t>
+            </a:r>
+            <a:r>
+              <a:rPr lang="en-US" altLang="ja-JP" sz="1300" dirty="0"/>
+              <a:t>AI</a:t>
+            </a:r>
+            <a:r>
+              <a:rPr lang="ja-JP" altLang="en-US" sz="1300" dirty="0"/>
+              <a:t>でタグ抽出して検索・管理できるモバイルアプリ。</a:t>
+            </a:r>
+          </a:p>
+          <a:p>
+            <a:r>
+              <a:rPr lang="ja-JP" altLang="en-US" sz="1300" dirty="0"/>
+              <a:t>課題と目的</a:t>
+            </a:r>
+            <a:br>
+              <a:rPr lang="ja-JP" altLang="en-US" sz="1300" dirty="0"/>
+            </a:br>
+            <a:r>
+              <a:rPr lang="ja-JP" altLang="en-US" sz="1300" dirty="0"/>
+              <a:t>課題</a:t>
+            </a:r>
+            <a:r>
+              <a:rPr lang="en-US" altLang="ja-JP" sz="1300" dirty="0"/>
+              <a:t>: </a:t>
+            </a:r>
+            <a:r>
+              <a:rPr lang="ja-JP" altLang="en-US" sz="1300" dirty="0"/>
+              <a:t>日常のひらめきやメモが散逸し管理しづらい。</a:t>
+            </a:r>
+          </a:p>
+          <a:p>
+            <a:r>
+              <a:rPr lang="ja-JP" altLang="en-US" sz="1300" dirty="0"/>
+              <a:t>目的</a:t>
+            </a:r>
+            <a:r>
+              <a:rPr lang="en-US" altLang="ja-JP" sz="1300" dirty="0"/>
+              <a:t>: </a:t>
+            </a:r>
+            <a:r>
+              <a:rPr lang="ja-JP" altLang="en-US" sz="1300" dirty="0"/>
+              <a:t>いつでも素早く記録→自動タグ付け→簡単検索でアイデアの活用性を高める。</a:t>
+            </a:r>
+          </a:p>
+          <a:p>
+            <a:r>
+              <a:rPr lang="ja-JP" altLang="en-US" sz="1300" dirty="0"/>
+              <a:t>主な機能</a:t>
+            </a:r>
+            <a:br>
+              <a:rPr lang="ja-JP" altLang="en-US" sz="1300" dirty="0"/>
+            </a:br>
+            <a:r>
+              <a:rPr lang="ja-JP" altLang="en-US" sz="1300" dirty="0"/>
+              <a:t>アイデア一覧（カード表示）</a:t>
+            </a:r>
+            <a:br>
+              <a:rPr lang="ja-JP" altLang="en-US" sz="1300" dirty="0"/>
+            </a:br>
+            <a:r>
+              <a:rPr lang="ja-JP" altLang="en-US" sz="1300" dirty="0"/>
+              <a:t>作成（テキスト／画像／音声）</a:t>
+            </a:r>
+            <a:br>
+              <a:rPr lang="ja-JP" altLang="en-US" sz="1300" dirty="0"/>
+            </a:br>
+            <a:r>
+              <a:rPr lang="en-US" altLang="ja-JP" sz="1300" dirty="0"/>
+              <a:t>AI</a:t>
+            </a:r>
+            <a:r>
+              <a:rPr lang="ja-JP" altLang="en-US" sz="1300" dirty="0"/>
+              <a:t>自動タグ抽出（</a:t>
+            </a:r>
+            <a:r>
+              <a:rPr lang="en-US" altLang="ja-JP" sz="1300" dirty="0" err="1"/>
+              <a:t>AiService</a:t>
+            </a:r>
+            <a:r>
+              <a:rPr lang="ja-JP" altLang="en-US" sz="1300" dirty="0"/>
+              <a:t>）</a:t>
+            </a:r>
+            <a:br>
+              <a:rPr lang="ja-JP" altLang="en-US" sz="1300" dirty="0"/>
+            </a:br>
+            <a:r>
+              <a:rPr lang="ja-JP" altLang="en-US" sz="1300" dirty="0"/>
+              <a:t>ローカル永続化（</a:t>
+            </a:r>
+            <a:r>
+              <a:rPr lang="en-US" altLang="ja-JP" sz="1300" dirty="0" err="1"/>
+              <a:t>ideas.json</a:t>
+            </a:r>
+            <a:r>
+              <a:rPr lang="ja-JP" altLang="en-US" sz="1300" dirty="0"/>
+              <a:t>）</a:t>
+            </a:r>
+            <a:br>
+              <a:rPr lang="ja-JP" altLang="en-US" sz="1300" dirty="0"/>
+            </a:br>
+            <a:r>
+              <a:rPr lang="ja-JP" altLang="en-US" sz="1300" dirty="0"/>
+              <a:t>検索（検索デリゲート）</a:t>
+            </a:r>
+            <a:br>
+              <a:rPr lang="ja-JP" altLang="en-US" sz="1300" dirty="0"/>
+            </a:br>
+            <a:r>
+              <a:rPr lang="ja-JP" altLang="en-US" sz="1300" dirty="0"/>
+              <a:t>設定画面・メディア管理（画像</a:t>
+            </a:r>
+            <a:r>
+              <a:rPr lang="en-US" altLang="ja-JP" sz="1300" dirty="0"/>
+              <a:t>/</a:t>
+            </a:r>
+            <a:r>
+              <a:rPr lang="ja-JP" altLang="en-US" sz="1300" dirty="0"/>
+              <a:t>音声保存）</a:t>
+            </a:r>
           </a:p>
         </p:txBody>
       </p:sp>
+      <p:cxnSp>
+        <p:nvCxnSpPr>
+          <p:cNvPr id="17" name="Straight Connector 16">
+            <a:extLst>
+              <a:ext uri="{FF2B5EF4-FFF2-40B4-BE49-F238E27FC236}">
+                <a16:creationId xmlns:a16="http://schemas.microsoft.com/office/drawing/2014/main" id="{6CF1BAF6-AD41-4082-B212-8A1F9A2E8779}"/>
+              </a:ext>
+              <a:ext uri="{C183D7F6-B498-43B3-948B-1728B52AA6E4}">
+                <adec:decorative xmlns:adec="http://schemas.microsoft.com/office/drawing/2017/decorative" val="1"/>
+              </a:ext>
+            </a:extLst>
+          </p:cNvPr>
+          <p:cNvCxnSpPr>
+            <a:cxnSpLocks noGrp="1" noRot="1" noChangeAspect="1" noMove="1" noResize="1" noEditPoints="1" noAdjustHandles="1" noChangeArrowheads="1" noChangeShapeType="1"/>
+          </p:cNvCxnSpPr>
+          <p:nvPr>
+            <p:extLst>
+              <p:ext uri="{386F3935-93C4-4BCD-93E2-E3B085C9AB24}">
+                <p16:designElem xmlns:p16="http://schemas.microsoft.com/office/powerpoint/2015/main" val="1"/>
+              </p:ext>
+            </p:extLst>
+          </p:nvPr>
+        </p:nvCxnSpPr>
+        <p:spPr>
+          <a:xfrm flipH="1">
+            <a:off x="838200" y="6485313"/>
+            <a:ext cx="10515600" cy="0"/>
+          </a:xfrm>
+          <a:prstGeom prst="line">
+            <a:avLst/>
+          </a:prstGeom>
+          <a:ln w="57150">
+            <a:solidFill>
+              <a:schemeClr val="accent4"/>
+            </a:solidFill>
+          </a:ln>
+        </p:spPr>
+        <p:style>
+          <a:lnRef idx="1">
+            <a:schemeClr val="accent1"/>
+          </a:lnRef>
+          <a:fillRef idx="0">
+            <a:schemeClr val="accent1"/>
+          </a:fillRef>
+          <a:effectRef idx="0">
+            <a:schemeClr val="accent1"/>
+          </a:effectRef>
+          <a:fontRef idx="minor">
+            <a:schemeClr val="tx1"/>
+          </a:fontRef>
+        </p:style>
+      </p:cxnSp>
     </p:spTree>
-    <p:extLst>
-      <p:ext uri="{BB962C8B-B14F-4D97-AF65-F5344CB8AC3E}">
-        <p14:creationId xmlns:p14="http://schemas.microsoft.com/office/powerpoint/2010/main" val="1542238859"/>
-      </p:ext>
-    </p:extLst>
   </p:cSld>
   <p:clrMapOvr>
     <a:masterClrMapping/>
@@ -3799,7 +7812,7 @@
           <p:cNvPr id="2" name="タイトル 1">
             <a:extLst>
               <a:ext uri="{FF2B5EF4-FFF2-40B4-BE49-F238E27FC236}">
-                <a16:creationId xmlns:a16="http://schemas.microsoft.com/office/drawing/2014/main" id="{7D0DD7BE-3E3D-BD3F-472B-D96DC5C0ABCB}"/>
+                <a16:creationId xmlns:a16="http://schemas.microsoft.com/office/drawing/2014/main" id="{A11F550E-378E-3B4D-1834-C97BBD738946}"/>
               </a:ext>
             </a:extLst>
           </p:cNvPr>
@@ -3824,7 +7837,7 @@
           <p:cNvPr id="3" name="コンテンツ プレースホルダー 2">
             <a:extLst>
               <a:ext uri="{FF2B5EF4-FFF2-40B4-BE49-F238E27FC236}">
-                <a16:creationId xmlns:a16="http://schemas.microsoft.com/office/drawing/2014/main" id="{2F016C1F-922C-A988-5DA7-BB71D4D565B8}"/>
+                <a16:creationId xmlns:a16="http://schemas.microsoft.com/office/drawing/2014/main" id="{624A5672-EF9F-CB37-55EB-712615B0E380}"/>
               </a:ext>
             </a:extLst>
           </p:cNvPr>
@@ -3847,7 +7860,7 @@
     </p:spTree>
     <p:extLst>
       <p:ext uri="{BB962C8B-B14F-4D97-AF65-F5344CB8AC3E}">
-        <p14:creationId xmlns:p14="http://schemas.microsoft.com/office/powerpoint/2010/main" val="2977075534"/>
+        <p14:creationId xmlns:p14="http://schemas.microsoft.com/office/powerpoint/2010/main" val="1542238859"/>
       </p:ext>
     </p:extLst>
   </p:cSld>
@@ -3860,6 +7873,14 @@
 <file path=ppt/slides/slide4.xml><?xml version="1.0" encoding="utf-8"?>
 <p:sld xmlns:a="http://schemas.openxmlformats.org/drawingml/2006/main" xmlns:r="http://schemas.openxmlformats.org/officeDocument/2006/relationships" xmlns:p="http://schemas.openxmlformats.org/presentationml/2006/main">
   <p:cSld>
+    <p:bg>
+      <p:bgPr>
+        <a:solidFill>
+          <a:schemeClr val="bg1"/>
+        </a:solidFill>
+        <a:effectLst/>
+      </p:bgPr>
+    </p:bg>
     <p:spTree>
       <p:nvGrpSpPr>
         <p:cNvPr id="1" name=""/>
@@ -3874,12 +7895,354 @@
           <a:chExt cx="0" cy="0"/>
         </a:xfrm>
       </p:grpSpPr>
+      <p:sp useBgFill="1">
+        <p:nvSpPr>
+          <p:cNvPr id="8" name="Rectangle 7">
+            <a:extLst>
+              <a:ext uri="{FF2B5EF4-FFF2-40B4-BE49-F238E27FC236}">
+                <a16:creationId xmlns:a16="http://schemas.microsoft.com/office/drawing/2014/main" id="{B6CDA21F-E7AF-4C75-8395-33F58D5B0E45}"/>
+              </a:ext>
+              <a:ext uri="{C183D7F6-B498-43B3-948B-1728B52AA6E4}">
+                <adec:decorative xmlns:adec="http://schemas.microsoft.com/office/drawing/2017/decorative" val="1"/>
+              </a:ext>
+            </a:extLst>
+          </p:cNvPr>
+          <p:cNvSpPr>
+            <a:spLocks noGrp="1" noRot="1" noChangeAspect="1" noMove="1" noResize="1" noEditPoints="1" noAdjustHandles="1" noChangeArrowheads="1" noChangeShapeType="1" noTextEdit="1"/>
+          </p:cNvSpPr>
+          <p:nvPr>
+            <p:extLst>
+              <p:ext uri="{386F3935-93C4-4BCD-93E2-E3B085C9AB24}">
+                <p16:designElem xmlns:p16="http://schemas.microsoft.com/office/powerpoint/2015/main" val="1"/>
+              </p:ext>
+            </p:extLst>
+          </p:nvPr>
+        </p:nvSpPr>
+        <p:spPr>
+          <a:xfrm>
+            <a:off x="0" y="0"/>
+            <a:ext cx="12191999" cy="6857365"/>
+          </a:xfrm>
+          <a:prstGeom prst="rect">
+            <a:avLst/>
+          </a:prstGeom>
+          <a:ln>
+            <a:noFill/>
+          </a:ln>
+        </p:spPr>
+        <p:style>
+          <a:lnRef idx="2">
+            <a:schemeClr val="accent1">
+              <a:shade val="50000"/>
+            </a:schemeClr>
+          </a:lnRef>
+          <a:fillRef idx="1">
+            <a:schemeClr val="accent1"/>
+          </a:fillRef>
+          <a:effectRef idx="0">
+            <a:schemeClr val="accent1"/>
+          </a:effectRef>
+          <a:fontRef idx="minor">
+            <a:schemeClr val="lt1"/>
+          </a:fontRef>
+        </p:style>
+        <p:txBody>
+          <a:bodyPr rtlCol="0" anchor="ctr"/>
+          <a:lstStyle/>
+          <a:p>
+            <a:pPr algn="ctr"/>
+            <a:endParaRPr lang="en-US"/>
+          </a:p>
+        </p:txBody>
+      </p:sp>
+      <p:grpSp>
+        <p:nvGrpSpPr>
+          <p:cNvPr id="10" name="Group 9">
+            <a:extLst>
+              <a:ext uri="{FF2B5EF4-FFF2-40B4-BE49-F238E27FC236}">
+                <a16:creationId xmlns:a16="http://schemas.microsoft.com/office/drawing/2014/main" id="{AE1C45F0-260A-458C-96ED-C1F6D2151219}"/>
+              </a:ext>
+              <a:ext uri="{C183D7F6-B498-43B3-948B-1728B52AA6E4}">
+                <adec:decorative xmlns:adec="http://schemas.microsoft.com/office/drawing/2017/decorative" val="1"/>
+              </a:ext>
+            </a:extLst>
+          </p:cNvPr>
+          <p:cNvGrpSpPr>
+            <a:grpSpLocks noGrp="1" noUngrp="1" noRot="1" noChangeAspect="1" noMove="1" noResize="1"/>
+          </p:cNvGrpSpPr>
+          <p:nvPr>
+            <p:extLst>
+              <p:ext uri="{386F3935-93C4-4BCD-93E2-E3B085C9AB24}">
+                <p16:designElem xmlns:p16="http://schemas.microsoft.com/office/powerpoint/2015/main" val="1"/>
+              </p:ext>
+            </p:extLst>
+          </p:nvPr>
+        </p:nvGrpSpPr>
+        <p:grpSpPr>
+          <a:xfrm>
+            <a:off x="4" y="1216597"/>
+            <a:ext cx="731521" cy="673460"/>
+            <a:chOff x="3940602" y="308034"/>
+            <a:chExt cx="2116791" cy="3428999"/>
+          </a:xfrm>
+          <a:solidFill>
+            <a:schemeClr val="accent4"/>
+          </a:solidFill>
+        </p:grpSpPr>
+        <p:sp>
+          <p:nvSpPr>
+            <p:cNvPr id="11" name="Rectangle 10">
+              <a:extLst>
+                <a:ext uri="{FF2B5EF4-FFF2-40B4-BE49-F238E27FC236}">
+                  <a16:creationId xmlns:a16="http://schemas.microsoft.com/office/drawing/2014/main" id="{A6604B49-AD5C-4590-B051-06C8222ECD99}"/>
+                </a:ext>
+                <a:ext uri="{C183D7F6-B498-43B3-948B-1728B52AA6E4}">
+                  <adec:decorative xmlns:adec="http://schemas.microsoft.com/office/drawing/2017/decorative" val="1"/>
+                </a:ext>
+              </a:extLst>
+            </p:cNvPr>
+            <p:cNvSpPr/>
+            <p:nvPr>
+              <p:extLst>
+                <p:ext uri="{386F3935-93C4-4BCD-93E2-E3B085C9AB24}">
+                  <p16:designElem xmlns:p16="http://schemas.microsoft.com/office/powerpoint/2015/main" val="1"/>
+                </p:ext>
+              </p:extLst>
+            </p:nvPr>
+          </p:nvSpPr>
+          <p:spPr>
+            <a:xfrm>
+              <a:off x="3940602" y="308034"/>
+              <a:ext cx="566743" cy="3428999"/>
+            </a:xfrm>
+            <a:prstGeom prst="rect">
+              <a:avLst/>
+            </a:prstGeom>
+            <a:grpFill/>
+            <a:ln>
+              <a:noFill/>
+            </a:ln>
+          </p:spPr>
+          <p:style>
+            <a:lnRef idx="2">
+              <a:schemeClr val="accent1">
+                <a:shade val="50000"/>
+              </a:schemeClr>
+            </a:lnRef>
+            <a:fillRef idx="1">
+              <a:schemeClr val="accent1"/>
+            </a:fillRef>
+            <a:effectRef idx="0">
+              <a:schemeClr val="accent1"/>
+            </a:effectRef>
+            <a:fontRef idx="minor">
+              <a:schemeClr val="lt1"/>
+            </a:fontRef>
+          </p:style>
+          <p:txBody>
+            <a:bodyPr rtlCol="0" anchor="ctr"/>
+            <a:lstStyle/>
+            <a:p>
+              <a:pPr algn="ctr"/>
+              <a:endParaRPr lang="en-US"/>
+            </a:p>
+          </p:txBody>
+        </p:sp>
+        <p:sp>
+          <p:nvSpPr>
+            <p:cNvPr id="12" name="Rectangle 11">
+              <a:extLst>
+                <a:ext uri="{FF2B5EF4-FFF2-40B4-BE49-F238E27FC236}">
+                  <a16:creationId xmlns:a16="http://schemas.microsoft.com/office/drawing/2014/main" id="{743ECCAF-29C5-4537-947C-7EA1292463DB}"/>
+                </a:ext>
+                <a:ext uri="{C183D7F6-B498-43B3-948B-1728B52AA6E4}">
+                  <adec:decorative xmlns:adec="http://schemas.microsoft.com/office/drawing/2017/decorative" val="1"/>
+                </a:ext>
+              </a:extLst>
+            </p:cNvPr>
+            <p:cNvSpPr/>
+            <p:nvPr>
+              <p:extLst>
+                <p:ext uri="{386F3935-93C4-4BCD-93E2-E3B085C9AB24}">
+                  <p16:designElem xmlns:p16="http://schemas.microsoft.com/office/powerpoint/2015/main" val="1"/>
+                </p:ext>
+              </p:extLst>
+            </p:nvPr>
+          </p:nvSpPr>
+          <p:spPr>
+            <a:xfrm>
+              <a:off x="4715626" y="308034"/>
+              <a:ext cx="566743" cy="3428999"/>
+            </a:xfrm>
+            <a:prstGeom prst="rect">
+              <a:avLst/>
+            </a:prstGeom>
+            <a:grpFill/>
+            <a:ln>
+              <a:noFill/>
+            </a:ln>
+          </p:spPr>
+          <p:style>
+            <a:lnRef idx="2">
+              <a:schemeClr val="accent1">
+                <a:shade val="50000"/>
+              </a:schemeClr>
+            </a:lnRef>
+            <a:fillRef idx="1">
+              <a:schemeClr val="accent1"/>
+            </a:fillRef>
+            <a:effectRef idx="0">
+              <a:schemeClr val="accent1"/>
+            </a:effectRef>
+            <a:fontRef idx="minor">
+              <a:schemeClr val="lt1"/>
+            </a:fontRef>
+          </p:style>
+          <p:txBody>
+            <a:bodyPr rtlCol="0" anchor="ctr"/>
+            <a:lstStyle/>
+            <a:p>
+              <a:pPr algn="ctr"/>
+              <a:endParaRPr lang="en-US"/>
+            </a:p>
+          </p:txBody>
+        </p:sp>
+        <p:sp>
+          <p:nvSpPr>
+            <p:cNvPr id="13" name="Rectangle 12">
+              <a:extLst>
+                <a:ext uri="{FF2B5EF4-FFF2-40B4-BE49-F238E27FC236}">
+                  <a16:creationId xmlns:a16="http://schemas.microsoft.com/office/drawing/2014/main" id="{ED49787B-8DE6-4467-AD0A-8DECC6E0C2D6}"/>
+                </a:ext>
+                <a:ext uri="{C183D7F6-B498-43B3-948B-1728B52AA6E4}">
+                  <adec:decorative xmlns:adec="http://schemas.microsoft.com/office/drawing/2017/decorative" val="1"/>
+                </a:ext>
+              </a:extLst>
+            </p:cNvPr>
+            <p:cNvSpPr/>
+            <p:nvPr>
+              <p:extLst>
+                <p:ext uri="{386F3935-93C4-4BCD-93E2-E3B085C9AB24}">
+                  <p16:designElem xmlns:p16="http://schemas.microsoft.com/office/powerpoint/2015/main" val="1"/>
+                </p:ext>
+              </p:extLst>
+            </p:nvPr>
+          </p:nvSpPr>
+          <p:spPr>
+            <a:xfrm>
+              <a:off x="5490650" y="308034"/>
+              <a:ext cx="566743" cy="3428999"/>
+            </a:xfrm>
+            <a:prstGeom prst="rect">
+              <a:avLst/>
+            </a:prstGeom>
+            <a:grpFill/>
+            <a:ln>
+              <a:noFill/>
+            </a:ln>
+          </p:spPr>
+          <p:style>
+            <a:lnRef idx="2">
+              <a:schemeClr val="accent1">
+                <a:shade val="50000"/>
+              </a:schemeClr>
+            </a:lnRef>
+            <a:fillRef idx="1">
+              <a:schemeClr val="accent1"/>
+            </a:fillRef>
+            <a:effectRef idx="0">
+              <a:schemeClr val="accent1"/>
+            </a:effectRef>
+            <a:fontRef idx="minor">
+              <a:schemeClr val="lt1"/>
+            </a:fontRef>
+          </p:style>
+          <p:txBody>
+            <a:bodyPr rtlCol="0" anchor="ctr"/>
+            <a:lstStyle/>
+            <a:p>
+              <a:pPr algn="ctr"/>
+              <a:endParaRPr lang="en-US"/>
+            </a:p>
+          </p:txBody>
+        </p:sp>
+      </p:grpSp>
+      <p:sp>
+        <p:nvSpPr>
+          <p:cNvPr id="15" name="Rectangle 14">
+            <a:extLst>
+              <a:ext uri="{FF2B5EF4-FFF2-40B4-BE49-F238E27FC236}">
+                <a16:creationId xmlns:a16="http://schemas.microsoft.com/office/drawing/2014/main" id="{D5B0017B-2ECA-49AF-B397-DC140825DF8D}"/>
+              </a:ext>
+              <a:ext uri="{C183D7F6-B498-43B3-948B-1728B52AA6E4}">
+                <adec:decorative xmlns:adec="http://schemas.microsoft.com/office/drawing/2017/decorative" val="1"/>
+              </a:ext>
+            </a:extLst>
+          </p:cNvPr>
+          <p:cNvSpPr>
+            <a:spLocks noGrp="1" noRot="1" noChangeAspect="1" noMove="1" noResize="1" noEditPoints="1" noAdjustHandles="1" noChangeArrowheads="1" noChangeShapeType="1" noTextEdit="1"/>
+          </p:cNvSpPr>
+          <p:nvPr>
+            <p:extLst>
+              <p:ext uri="{386F3935-93C4-4BCD-93E2-E3B085C9AB24}">
+                <p16:designElem xmlns:p16="http://schemas.microsoft.com/office/powerpoint/2015/main" val="1"/>
+              </p:ext>
+            </p:extLst>
+          </p:nvPr>
+        </p:nvSpPr>
+        <p:spPr>
+          <a:xfrm>
+            <a:off x="640079" y="613954"/>
+            <a:ext cx="10907487" cy="1894116"/>
+          </a:xfrm>
+          <a:prstGeom prst="rect">
+            <a:avLst/>
+          </a:prstGeom>
+          <a:solidFill>
+            <a:schemeClr val="bg1"/>
+          </a:solidFill>
+          <a:ln>
+            <a:noFill/>
+          </a:ln>
+          <a:effectLst>
+            <a:outerShdw blurRad="139700" dist="127000" dir="5400000" algn="t" rotWithShape="0">
+              <a:prstClr val="black">
+                <a:alpha val="15000"/>
+              </a:prstClr>
+            </a:outerShdw>
+          </a:effectLst>
+        </p:spPr>
+        <p:style>
+          <a:lnRef idx="2">
+            <a:schemeClr val="accent1">
+              <a:shade val="50000"/>
+            </a:schemeClr>
+          </a:lnRef>
+          <a:fillRef idx="1">
+            <a:schemeClr val="accent1"/>
+          </a:fillRef>
+          <a:effectRef idx="0">
+            <a:schemeClr val="accent1"/>
+          </a:effectRef>
+          <a:fontRef idx="minor">
+            <a:schemeClr val="lt1"/>
+          </a:fontRef>
+        </p:style>
+        <p:txBody>
+          <a:bodyPr rtlCol="0" anchor="ctr"/>
+          <a:lstStyle/>
+          <a:p>
+            <a:pPr algn="ctr"/>
+            <a:endParaRPr lang="en-US"/>
+          </a:p>
+        </p:txBody>
+      </p:sp>
       <p:sp>
         <p:nvSpPr>
           <p:cNvPr id="2" name="タイトル 1">
             <a:extLst>
               <a:ext uri="{FF2B5EF4-FFF2-40B4-BE49-F238E27FC236}">
-                <a16:creationId xmlns:a16="http://schemas.microsoft.com/office/drawing/2014/main" id="{C1DB4415-491A-25CB-04A7-5CDC989250E3}"/>
+                <a16:creationId xmlns:a16="http://schemas.microsoft.com/office/drawing/2014/main" id="{7D0DD7BE-3E3D-BD3F-472B-D96DC5C0ABCB}"/>
               </a:ext>
             </a:extLst>
           </p:cNvPr>
@@ -3890,14 +8253,21 @@
             <p:ph type="title"/>
           </p:nvPr>
         </p:nvSpPr>
-        <p:spPr/>
+        <p:spPr>
+          <a:xfrm>
+            <a:off x="1043631" y="809898"/>
+            <a:ext cx="9942716" cy="1554480"/>
+          </a:xfrm>
+        </p:spPr>
         <p:txBody>
-          <a:bodyPr/>
+          <a:bodyPr anchor="ctr">
+            <a:normAutofit/>
+          </a:bodyPr>
           <a:lstStyle/>
           <a:p>
             <a:r>
-              <a:rPr kumimoji="1" lang="ja-JP" altLang="en-US" dirty="0"/>
-              <a:t>開発環境バージョン一覧</a:t>
+              <a:rPr kumimoji="1" lang="ja-JP" altLang="en-US" sz="4800" dirty="0"/>
+              <a:t>参考サイト</a:t>
             </a:r>
           </a:p>
         </p:txBody>
@@ -3907,7 +8277,7 @@
           <p:cNvPr id="3" name="コンテンツ プレースホルダー 2">
             <a:extLst>
               <a:ext uri="{FF2B5EF4-FFF2-40B4-BE49-F238E27FC236}">
-                <a16:creationId xmlns:a16="http://schemas.microsoft.com/office/drawing/2014/main" id="{15B5AD94-0DD0-3086-2ABD-671914A12B99}"/>
+                <a16:creationId xmlns:a16="http://schemas.microsoft.com/office/drawing/2014/main" id="{2F016C1F-922C-A988-5DA7-BB71D4D565B8}"/>
               </a:ext>
             </a:extLst>
           </p:cNvPr>
@@ -3918,41 +8288,82 @@
             <p:ph idx="1"/>
           </p:nvPr>
         </p:nvSpPr>
-        <p:spPr/>
+        <p:spPr>
+          <a:xfrm>
+            <a:off x="1045028" y="3017522"/>
+            <a:ext cx="9941319" cy="3124658"/>
+          </a:xfrm>
+        </p:spPr>
         <p:txBody>
-          <a:bodyPr/>
+          <a:bodyPr anchor="ctr">
+            <a:normAutofit/>
+          </a:bodyPr>
           <a:lstStyle/>
           <a:p>
             <a:r>
-              <a:rPr kumimoji="1" lang="en-US" altLang="ja-JP" dirty="0"/>
-              <a:t>VSCode:1.119.0</a:t>
-            </a:r>
-          </a:p>
-          <a:p>
-            <a:r>
-              <a:rPr lang="en-US" altLang="ja-JP" dirty="0"/>
-              <a:t>Android SDK:36.1.0</a:t>
-            </a:r>
-          </a:p>
-          <a:p>
-            <a:r>
-              <a:rPr kumimoji="1" lang="en-US" altLang="ja-JP" dirty="0"/>
-              <a:t>Flutter:3.35.6</a:t>
-            </a:r>
-          </a:p>
-          <a:p>
-            <a:r>
-              <a:rPr lang="en-US" altLang="ja-JP"/>
-              <a:t>Dart:3.9.2</a:t>
-            </a:r>
-            <a:endParaRPr kumimoji="1" lang="ja-JP" altLang="en-US"/>
+              <a:rPr lang="en-US" altLang="ja-JP" sz="2400"/>
+              <a:t>https://note.com/yusuke_flutter/n/n4361f447b1a0</a:t>
+            </a:r>
+            <a:endParaRPr kumimoji="1" lang="ja-JP" altLang="en-US" sz="2400"/>
           </a:p>
         </p:txBody>
       </p:sp>
+      <p:cxnSp>
+        <p:nvCxnSpPr>
+          <p:cNvPr id="17" name="Straight Connector 16">
+            <a:extLst>
+              <a:ext uri="{FF2B5EF4-FFF2-40B4-BE49-F238E27FC236}">
+                <a16:creationId xmlns:a16="http://schemas.microsoft.com/office/drawing/2014/main" id="{6CF1BAF6-AD41-4082-B212-8A1F9A2E8779}"/>
+              </a:ext>
+              <a:ext uri="{C183D7F6-B498-43B3-948B-1728B52AA6E4}">
+                <adec:decorative xmlns:adec="http://schemas.microsoft.com/office/drawing/2017/decorative" val="1"/>
+              </a:ext>
+            </a:extLst>
+          </p:cNvPr>
+          <p:cNvCxnSpPr>
+            <a:cxnSpLocks noGrp="1" noRot="1" noChangeAspect="1" noMove="1" noResize="1" noEditPoints="1" noAdjustHandles="1" noChangeArrowheads="1" noChangeShapeType="1"/>
+          </p:cNvCxnSpPr>
+          <p:nvPr>
+            <p:extLst>
+              <p:ext uri="{386F3935-93C4-4BCD-93E2-E3B085C9AB24}">
+                <p16:designElem xmlns:p16="http://schemas.microsoft.com/office/powerpoint/2015/main" val="1"/>
+              </p:ext>
+            </p:extLst>
+          </p:nvPr>
+        </p:nvCxnSpPr>
+        <p:spPr>
+          <a:xfrm flipH="1">
+            <a:off x="838200" y="6485313"/>
+            <a:ext cx="10515600" cy="0"/>
+          </a:xfrm>
+          <a:prstGeom prst="line">
+            <a:avLst/>
+          </a:prstGeom>
+          <a:ln w="57150">
+            <a:solidFill>
+              <a:schemeClr val="accent4"/>
+            </a:solidFill>
+          </a:ln>
+        </p:spPr>
+        <p:style>
+          <a:lnRef idx="1">
+            <a:schemeClr val="accent1"/>
+          </a:lnRef>
+          <a:fillRef idx="0">
+            <a:schemeClr val="accent1"/>
+          </a:fillRef>
+          <a:effectRef idx="0">
+            <a:schemeClr val="accent1"/>
+          </a:effectRef>
+          <a:fontRef idx="minor">
+            <a:schemeClr val="tx1"/>
+          </a:fontRef>
+        </p:style>
+      </p:cxnSp>
     </p:spTree>
     <p:extLst>
       <p:ext uri="{BB962C8B-B14F-4D97-AF65-F5344CB8AC3E}">
-        <p14:creationId xmlns:p14="http://schemas.microsoft.com/office/powerpoint/2010/main" val="3563080057"/>
+        <p14:creationId xmlns:p14="http://schemas.microsoft.com/office/powerpoint/2010/main" val="2977075534"/>
       </p:ext>
     </p:extLst>
   </p:cSld>
@@ -3963,78 +8374,381 @@
 </file>
 
 <file path=ppt/slides/slide5.xml><?xml version="1.0" encoding="utf-8"?>
-<p:sld xmlns:a="http://schemas.openxmlformats.org/drawingml/2006/main" xmlns:p="http://schemas.openxmlformats.org/presentationml/2006/main" xmlns:r="http://schemas.openxmlformats.org/officeDocument/2006/relationships">
+<p:sld xmlns:a="http://schemas.openxmlformats.org/drawingml/2006/main" xmlns:r="http://schemas.openxmlformats.org/officeDocument/2006/relationships" xmlns:p="http://schemas.openxmlformats.org/presentationml/2006/main">
   <p:cSld>
+    <p:bg>
+      <p:bgPr>
+        <a:solidFill>
+          <a:schemeClr val="bg1"/>
+        </a:solidFill>
+        <a:effectLst/>
+      </p:bgPr>
+    </p:bg>
     <p:spTree>
       <p:nvGrpSpPr>
         <p:cNvPr id="1" name=""/>
         <p:cNvGrpSpPr/>
         <p:nvPr/>
       </p:nvGrpSpPr>
-      <p:grpSpPr/>
+      <p:grpSpPr>
+        <a:xfrm>
+          <a:off x="0" y="0"/>
+          <a:ext cx="0" cy="0"/>
+          <a:chOff x="0" y="0"/>
+          <a:chExt cx="0" cy="0"/>
+        </a:xfrm>
+      </p:grpSpPr>
+      <p:sp useBgFill="1">
+        <p:nvSpPr>
+          <p:cNvPr id="9" name="Rectangle 8">
+            <a:extLst>
+              <a:ext uri="{FF2B5EF4-FFF2-40B4-BE49-F238E27FC236}">
+                <a16:creationId xmlns:a16="http://schemas.microsoft.com/office/drawing/2014/main" id="{56E9B3E6-E277-4D68-BA48-9CB43FFBD6E2}"/>
+              </a:ext>
+              <a:ext uri="{C183D7F6-B498-43B3-948B-1728B52AA6E4}">
+                <adec:decorative xmlns:adec="http://schemas.microsoft.com/office/drawing/2017/decorative" val="1"/>
+              </a:ext>
+            </a:extLst>
+          </p:cNvPr>
+          <p:cNvSpPr>
+            <a:spLocks noGrp="1" noRot="1" noChangeAspect="1" noMove="1" noResize="1" noEditPoints="1" noAdjustHandles="1" noChangeArrowheads="1" noChangeShapeType="1" noTextEdit="1"/>
+          </p:cNvSpPr>
+          <p:nvPr>
+            <p:extLst>
+              <p:ext uri="{386F3935-93C4-4BCD-93E2-E3B085C9AB24}">
+                <p16:designElem xmlns:p16="http://schemas.microsoft.com/office/powerpoint/2015/main" val="1"/>
+              </p:ext>
+            </p:extLst>
+          </p:nvPr>
+        </p:nvSpPr>
+        <p:spPr>
+          <a:xfrm>
+            <a:off x="0" y="0"/>
+            <a:ext cx="12191999" cy="6857365"/>
+          </a:xfrm>
+          <a:prstGeom prst="rect">
+            <a:avLst/>
+          </a:prstGeom>
+          <a:ln>
+            <a:noFill/>
+          </a:ln>
+        </p:spPr>
+        <p:style>
+          <a:lnRef idx="2">
+            <a:schemeClr val="accent1">
+              <a:shade val="50000"/>
+            </a:schemeClr>
+          </a:lnRef>
+          <a:fillRef idx="1">
+            <a:schemeClr val="accent1"/>
+          </a:fillRef>
+          <a:effectRef idx="0">
+            <a:schemeClr val="accent1"/>
+          </a:effectRef>
+          <a:fontRef idx="minor">
+            <a:schemeClr val="lt1"/>
+          </a:fontRef>
+        </p:style>
+        <p:txBody>
+          <a:bodyPr rtlCol="0" anchor="ctr"/>
+          <a:lstStyle/>
+          <a:p>
+            <a:pPr algn="ctr"/>
+            <a:endParaRPr lang="en-US"/>
+          </a:p>
+        </p:txBody>
+      </p:sp>
+      <p:grpSp>
+        <p:nvGrpSpPr>
+          <p:cNvPr id="11" name="Group 10">
+            <a:extLst>
+              <a:ext uri="{FF2B5EF4-FFF2-40B4-BE49-F238E27FC236}">
+                <a16:creationId xmlns:a16="http://schemas.microsoft.com/office/drawing/2014/main" id="{AE1C45F0-260A-458C-96ED-C1F6D2151219}"/>
+              </a:ext>
+              <a:ext uri="{C183D7F6-B498-43B3-948B-1728B52AA6E4}">
+                <adec:decorative xmlns:adec="http://schemas.microsoft.com/office/drawing/2017/decorative" val="1"/>
+              </a:ext>
+            </a:extLst>
+          </p:cNvPr>
+          <p:cNvGrpSpPr>
+            <a:grpSpLocks noGrp="1" noUngrp="1" noRot="1" noChangeAspect="1" noMove="1" noResize="1"/>
+          </p:cNvGrpSpPr>
+          <p:nvPr>
+            <p:extLst>
+              <p:ext uri="{386F3935-93C4-4BCD-93E2-E3B085C9AB24}">
+                <p16:designElem xmlns:p16="http://schemas.microsoft.com/office/powerpoint/2015/main" val="1"/>
+              </p:ext>
+            </p:extLst>
+          </p:nvPr>
+        </p:nvGrpSpPr>
+        <p:grpSpPr>
+          <a:xfrm>
+            <a:off x="4" y="1216597"/>
+            <a:ext cx="731521" cy="673460"/>
+            <a:chOff x="3940602" y="308034"/>
+            <a:chExt cx="2116791" cy="3428999"/>
+          </a:xfrm>
+          <a:solidFill>
+            <a:schemeClr val="accent4"/>
+          </a:solidFill>
+        </p:grpSpPr>
+        <p:sp>
+          <p:nvSpPr>
+            <p:cNvPr id="12" name="Rectangle 11">
+              <a:extLst>
+                <a:ext uri="{FF2B5EF4-FFF2-40B4-BE49-F238E27FC236}">
+                  <a16:creationId xmlns:a16="http://schemas.microsoft.com/office/drawing/2014/main" id="{A6604B49-AD5C-4590-B051-06C8222ECD99}"/>
+                </a:ext>
+                <a:ext uri="{C183D7F6-B498-43B3-948B-1728B52AA6E4}">
+                  <adec:decorative xmlns:adec="http://schemas.microsoft.com/office/drawing/2017/decorative" val="1"/>
+                </a:ext>
+              </a:extLst>
+            </p:cNvPr>
+            <p:cNvSpPr/>
+            <p:nvPr>
+              <p:extLst>
+                <p:ext uri="{386F3935-93C4-4BCD-93E2-E3B085C9AB24}">
+                  <p16:designElem xmlns:p16="http://schemas.microsoft.com/office/powerpoint/2015/main" val="1"/>
+                </p:ext>
+              </p:extLst>
+            </p:nvPr>
+          </p:nvSpPr>
+          <p:spPr>
+            <a:xfrm>
+              <a:off x="3940602" y="308034"/>
+              <a:ext cx="566743" cy="3428999"/>
+            </a:xfrm>
+            <a:prstGeom prst="rect">
+              <a:avLst/>
+            </a:prstGeom>
+            <a:grpFill/>
+            <a:ln>
+              <a:noFill/>
+            </a:ln>
+          </p:spPr>
+          <p:style>
+            <a:lnRef idx="2">
+              <a:schemeClr val="accent1">
+                <a:shade val="50000"/>
+              </a:schemeClr>
+            </a:lnRef>
+            <a:fillRef idx="1">
+              <a:schemeClr val="accent1"/>
+            </a:fillRef>
+            <a:effectRef idx="0">
+              <a:schemeClr val="accent1"/>
+            </a:effectRef>
+            <a:fontRef idx="minor">
+              <a:schemeClr val="lt1"/>
+            </a:fontRef>
+          </p:style>
+          <p:txBody>
+            <a:bodyPr rtlCol="0" anchor="ctr"/>
+            <a:lstStyle/>
+            <a:p>
+              <a:pPr algn="ctr"/>
+              <a:endParaRPr lang="en-US"/>
+            </a:p>
+          </p:txBody>
+        </p:sp>
+        <p:sp>
+          <p:nvSpPr>
+            <p:cNvPr id="13" name="Rectangle 12">
+              <a:extLst>
+                <a:ext uri="{FF2B5EF4-FFF2-40B4-BE49-F238E27FC236}">
+                  <a16:creationId xmlns:a16="http://schemas.microsoft.com/office/drawing/2014/main" id="{743ECCAF-29C5-4537-947C-7EA1292463DB}"/>
+                </a:ext>
+                <a:ext uri="{C183D7F6-B498-43B3-948B-1728B52AA6E4}">
+                  <adec:decorative xmlns:adec="http://schemas.microsoft.com/office/drawing/2017/decorative" val="1"/>
+                </a:ext>
+              </a:extLst>
+            </p:cNvPr>
+            <p:cNvSpPr/>
+            <p:nvPr>
+              <p:extLst>
+                <p:ext uri="{386F3935-93C4-4BCD-93E2-E3B085C9AB24}">
+                  <p16:designElem xmlns:p16="http://schemas.microsoft.com/office/powerpoint/2015/main" val="1"/>
+                </p:ext>
+              </p:extLst>
+            </p:nvPr>
+          </p:nvSpPr>
+          <p:spPr>
+            <a:xfrm>
+              <a:off x="4715626" y="308034"/>
+              <a:ext cx="566743" cy="3428999"/>
+            </a:xfrm>
+            <a:prstGeom prst="rect">
+              <a:avLst/>
+            </a:prstGeom>
+            <a:grpFill/>
+            <a:ln>
+              <a:noFill/>
+            </a:ln>
+          </p:spPr>
+          <p:style>
+            <a:lnRef idx="2">
+              <a:schemeClr val="accent1">
+                <a:shade val="50000"/>
+              </a:schemeClr>
+            </a:lnRef>
+            <a:fillRef idx="1">
+              <a:schemeClr val="accent1"/>
+            </a:fillRef>
+            <a:effectRef idx="0">
+              <a:schemeClr val="accent1"/>
+            </a:effectRef>
+            <a:fontRef idx="minor">
+              <a:schemeClr val="lt1"/>
+            </a:fontRef>
+          </p:style>
+          <p:txBody>
+            <a:bodyPr rtlCol="0" anchor="ctr"/>
+            <a:lstStyle/>
+            <a:p>
+              <a:pPr algn="ctr"/>
+              <a:endParaRPr lang="en-US"/>
+            </a:p>
+          </p:txBody>
+        </p:sp>
+        <p:sp>
+          <p:nvSpPr>
+            <p:cNvPr id="14" name="Rectangle 13">
+              <a:extLst>
+                <a:ext uri="{FF2B5EF4-FFF2-40B4-BE49-F238E27FC236}">
+                  <a16:creationId xmlns:a16="http://schemas.microsoft.com/office/drawing/2014/main" id="{ED49787B-8DE6-4467-AD0A-8DECC6E0C2D6}"/>
+                </a:ext>
+                <a:ext uri="{C183D7F6-B498-43B3-948B-1728B52AA6E4}">
+                  <adec:decorative xmlns:adec="http://schemas.microsoft.com/office/drawing/2017/decorative" val="1"/>
+                </a:ext>
+              </a:extLst>
+            </p:cNvPr>
+            <p:cNvSpPr/>
+            <p:nvPr>
+              <p:extLst>
+                <p:ext uri="{386F3935-93C4-4BCD-93E2-E3B085C9AB24}">
+                  <p16:designElem xmlns:p16="http://schemas.microsoft.com/office/powerpoint/2015/main" val="1"/>
+                </p:ext>
+              </p:extLst>
+            </p:nvPr>
+          </p:nvSpPr>
+          <p:spPr>
+            <a:xfrm>
+              <a:off x="5490650" y="308034"/>
+              <a:ext cx="566743" cy="3428999"/>
+            </a:xfrm>
+            <a:prstGeom prst="rect">
+              <a:avLst/>
+            </a:prstGeom>
+            <a:grpFill/>
+            <a:ln>
+              <a:noFill/>
+            </a:ln>
+          </p:spPr>
+          <p:style>
+            <a:lnRef idx="2">
+              <a:schemeClr val="accent1">
+                <a:shade val="50000"/>
+              </a:schemeClr>
+            </a:lnRef>
+            <a:fillRef idx="1">
+              <a:schemeClr val="accent1"/>
+            </a:fillRef>
+            <a:effectRef idx="0">
+              <a:schemeClr val="accent1"/>
+            </a:effectRef>
+            <a:fontRef idx="minor">
+              <a:schemeClr val="lt1"/>
+            </a:fontRef>
+          </p:style>
+          <p:txBody>
+            <a:bodyPr rtlCol="0" anchor="ctr"/>
+            <a:lstStyle/>
+            <a:p>
+              <a:pPr algn="ctr"/>
+              <a:endParaRPr lang="en-US"/>
+            </a:p>
+          </p:txBody>
+        </p:sp>
+      </p:grpSp>
       <p:sp>
         <p:nvSpPr>
-          <p:cNvPr id="2" name="Title 1"/>
+          <p:cNvPr id="16" name="Rectangle 15">
+            <a:extLst>
+              <a:ext uri="{FF2B5EF4-FFF2-40B4-BE49-F238E27FC236}">
+                <a16:creationId xmlns:a16="http://schemas.microsoft.com/office/drawing/2014/main" id="{D5B0017B-2ECA-49AF-B397-DC140825DF8D}"/>
+              </a:ext>
+              <a:ext uri="{C183D7F6-B498-43B3-948B-1728B52AA6E4}">
+                <adec:decorative xmlns:adec="http://schemas.microsoft.com/office/drawing/2017/decorative" val="1"/>
+              </a:ext>
+            </a:extLst>
+          </p:cNvPr>
           <p:cNvSpPr>
-            <a:spLocks noGrp="1"/>
+            <a:spLocks noGrp="1" noRot="1" noChangeAspect="1" noMove="1" noResize="1" noEditPoints="1" noAdjustHandles="1" noChangeArrowheads="1" noChangeShapeType="1" noTextEdit="1"/>
           </p:cNvSpPr>
           <p:nvPr>
-            <p:ph type="ctrTitle"/>
+            <p:extLst>
+              <p:ext uri="{386F3935-93C4-4BCD-93E2-E3B085C9AB24}">
+                <p16:designElem xmlns:p16="http://schemas.microsoft.com/office/powerpoint/2015/main" val="1"/>
+              </p:ext>
+            </p:extLst>
           </p:nvPr>
         </p:nvSpPr>
-        <p:spPr/>
+        <p:spPr>
+          <a:xfrm>
+            <a:off x="640079" y="613954"/>
+            <a:ext cx="10907487" cy="1894116"/>
+          </a:xfrm>
+          <a:prstGeom prst="rect">
+            <a:avLst/>
+          </a:prstGeom>
+          <a:solidFill>
+            <a:schemeClr val="bg1"/>
+          </a:solidFill>
+          <a:ln>
+            <a:noFill/>
+          </a:ln>
+          <a:effectLst>
+            <a:outerShdw blurRad="139700" dist="127000" dir="5400000" algn="t" rotWithShape="0">
+              <a:prstClr val="black">
+                <a:alpha val="15000"/>
+              </a:prstClr>
+            </a:outerShdw>
+          </a:effectLst>
+        </p:spPr>
+        <p:style>
+          <a:lnRef idx="2">
+            <a:schemeClr val="accent1">
+              <a:shade val="50000"/>
+            </a:schemeClr>
+          </a:lnRef>
+          <a:fillRef idx="1">
+            <a:schemeClr val="accent1"/>
+          </a:fillRef>
+          <a:effectRef idx="0">
+            <a:schemeClr val="accent1"/>
+          </a:effectRef>
+          <a:fontRef idx="minor">
+            <a:schemeClr val="lt1"/>
+          </a:fontRef>
+        </p:style>
         <p:txBody>
-          <a:bodyPr/>
+          <a:bodyPr rtlCol="0" anchor="ctr"/>
           <a:lstStyle/>
           <a:p>
-            <a:r>
-              <a:t>IdeaStream — 企画書概要</a:t>
-            </a:r>
+            <a:pPr algn="ctr"/>
+            <a:endParaRPr lang="en-US"/>
           </a:p>
         </p:txBody>
       </p:sp>
       <p:sp>
         <p:nvSpPr>
-          <p:cNvPr id="3" name="Subtitle 2"/>
-          <p:cNvSpPr>
-            <a:spLocks noGrp="1"/>
-          </p:cNvSpPr>
-          <p:nvPr>
-            <p:ph type="subTitle" idx="1"/>
-          </p:nvPr>
-        </p:nvSpPr>
-        <p:spPr/>
-        <p:txBody>
-          <a:bodyPr/>
-          <a:lstStyle/>
-          <a:p>
-            <a:r>
-              <a:t>抽出日: 2026-05-13</a:t>
-            </a:r>
-          </a:p>
-        </p:txBody>
-      </p:sp>
-    </p:spTree>
-  </p:cSld>
-  <p:clrMapOvr>
-    <a:masterClrMapping/>
-  </p:clrMapOvr>
-</p:sld>
-</file>
-
-<file path=ppt/slides/slide6.xml><?xml version="1.0" encoding="utf-8"?>
-<p:sld xmlns:a="http://schemas.openxmlformats.org/drawingml/2006/main" xmlns:p="http://schemas.openxmlformats.org/presentationml/2006/main" xmlns:r="http://schemas.openxmlformats.org/officeDocument/2006/relationships">
-  <p:cSld>
-    <p:spTree>
-      <p:nvGrpSpPr>
-        <p:cNvPr id="1" name=""/>
-        <p:cNvGrpSpPr/>
-        <p:nvPr/>
-      </p:nvGrpSpPr>
-      <p:grpSpPr/>
-      <p:sp>
-        <p:nvSpPr>
-          <p:cNvPr id="2" name="Title 1"/>
+          <p:cNvPr id="2" name="タイトル 1">
+            <a:extLst>
+              <a:ext uri="{FF2B5EF4-FFF2-40B4-BE49-F238E27FC236}">
+                <a16:creationId xmlns:a16="http://schemas.microsoft.com/office/drawing/2014/main" id="{C1DB4415-491A-25CB-04A7-5CDC989250E3}"/>
+              </a:ext>
+            </a:extLst>
+          </p:cNvPr>
           <p:cNvSpPr>
             <a:spLocks noGrp="1"/>
           </p:cNvSpPr>
@@ -4042,111 +8756,117 @@
             <p:ph type="title"/>
           </p:nvPr>
         </p:nvSpPr>
-        <p:spPr/>
+        <p:spPr>
+          <a:xfrm>
+            <a:off x="1043631" y="809898"/>
+            <a:ext cx="10173010" cy="1554480"/>
+          </a:xfrm>
+        </p:spPr>
         <p:txBody>
-          <a:bodyPr/>
+          <a:bodyPr anchor="ctr">
+            <a:normAutofit/>
+          </a:bodyPr>
           <a:lstStyle/>
           <a:p>
             <a:r>
-              <a:t>企画書の要点</a:t>
+              <a:rPr kumimoji="1" lang="ja-JP" altLang="en-US" sz="4800">
+                <a:latin typeface="ＭＳ ゴシック" panose="020B0609070205080204" pitchFamily="49" charset="-128"/>
+                <a:ea typeface="ＭＳ ゴシック" panose="020B0609070205080204" pitchFamily="49" charset="-128"/>
+              </a:rPr>
+              <a:t>開発環境バージョン一覧</a:t>
             </a:r>
           </a:p>
         </p:txBody>
       </p:sp>
-      <p:sp>
-        <p:nvSpPr>
-          <p:cNvPr id="3" name="Content Placeholder 2"/>
-          <p:cNvSpPr>
-            <a:spLocks noGrp="1"/>
-          </p:cNvSpPr>
+      <p:cxnSp>
+        <p:nvCxnSpPr>
+          <p:cNvPr id="18" name="Straight Connector 17">
+            <a:extLst>
+              <a:ext uri="{FF2B5EF4-FFF2-40B4-BE49-F238E27FC236}">
+                <a16:creationId xmlns:a16="http://schemas.microsoft.com/office/drawing/2014/main" id="{6CF1BAF6-AD41-4082-B212-8A1F9A2E8779}"/>
+              </a:ext>
+              <a:ext uri="{C183D7F6-B498-43B3-948B-1728B52AA6E4}">
+                <adec:decorative xmlns:adec="http://schemas.microsoft.com/office/drawing/2017/decorative" val="1"/>
+              </a:ext>
+            </a:extLst>
+          </p:cNvPr>
+          <p:cNvCxnSpPr>
+            <a:cxnSpLocks noGrp="1" noRot="1" noChangeAspect="1" noMove="1" noResize="1" noEditPoints="1" noAdjustHandles="1" noChangeArrowheads="1" noChangeShapeType="1"/>
+          </p:cNvCxnSpPr>
+          <p:nvPr>
+            <p:extLst>
+              <p:ext uri="{386F3935-93C4-4BCD-93E2-E3B085C9AB24}">
+                <p16:designElem xmlns:p16="http://schemas.microsoft.com/office/powerpoint/2015/main" val="1"/>
+              </p:ext>
+            </p:extLst>
+          </p:nvPr>
+        </p:nvCxnSpPr>
+        <p:spPr>
+          <a:xfrm flipH="1">
+            <a:off x="838200" y="6485313"/>
+            <a:ext cx="10515600" cy="0"/>
+          </a:xfrm>
+          <a:prstGeom prst="line">
+            <a:avLst/>
+          </a:prstGeom>
+          <a:ln w="57150">
+            <a:solidFill>
+              <a:schemeClr val="accent4"/>
+            </a:solidFill>
+          </a:ln>
+        </p:spPr>
+        <p:style>
+          <a:lnRef idx="1">
+            <a:schemeClr val="accent1"/>
+          </a:lnRef>
+          <a:fillRef idx="0">
+            <a:schemeClr val="accent1"/>
+          </a:fillRef>
+          <a:effectRef idx="0">
+            <a:schemeClr val="accent1"/>
+          </a:effectRef>
+          <a:fontRef idx="minor">
+            <a:schemeClr val="tx1"/>
+          </a:fontRef>
+        </p:style>
+      </p:cxnSp>
+      <p:graphicFrame>
+        <p:nvGraphicFramePr>
+          <p:cNvPr id="5" name="コンテンツ プレースホルダー 2">
+            <a:extLst>
+              <a:ext uri="{FF2B5EF4-FFF2-40B4-BE49-F238E27FC236}">
+                <a16:creationId xmlns:a16="http://schemas.microsoft.com/office/drawing/2014/main" id="{BE1D18FD-CF07-5D31-E747-FA4EAC7E15E2}"/>
+              </a:ext>
+            </a:extLst>
+          </p:cNvPr>
+          <p:cNvGraphicFramePr>
+            <a:graphicFrameLocks noGrp="1"/>
+          </p:cNvGraphicFramePr>
           <p:nvPr>
             <p:ph idx="1"/>
+            <p:extLst>
+              <p:ext uri="{D42A27DB-BD31-4B8C-83A1-F6EECF244321}">
+                <p14:modId xmlns:p14="http://schemas.microsoft.com/office/powerpoint/2010/main" val="1067061168"/>
+              </p:ext>
+            </p:extLst>
           </p:nvPr>
-        </p:nvSpPr>
-        <p:spPr/>
-        <p:txBody>
-          <a:bodyPr/>
-          <a:lstStyle/>
-          <a:p/>
-          <a:p>
-            <a:pPr/>
-            <a:r>
-              <a:t>IdeaStream — 企画書 (概要)</a:t>
-            </a:r>
-            <a:br/>
-            <a:r>
-              <a:t>要約</a:t>
-            </a:r>
-            <a:br/>
-            <a:r>
-              <a:t>アイデア（テキスト／画像／音声）を素早く記録・整理し、AIでタグ抽出して検索・管理できるモバイルアプリ。</a:t>
-            </a:r>
-          </a:p>
-          <a:p>
-            <a:pPr/>
-            <a:r>
-              <a:t>課題と目的</a:t>
-            </a:r>
-            <a:br/>
-            <a:r>
-              <a:t>課題: 日常のひらめきやメモが散逸し管理しづらい。</a:t>
-            </a:r>
-          </a:p>
-          <a:p>
-            <a:pPr/>
-            <a:r>
-              <a:t>目的: いつでも素早く記録→自動タグ付け→簡単検索でアイデアの活用性を高める。</a:t>
-            </a:r>
-          </a:p>
-          <a:p>
-            <a:pPr/>
-            <a:r>
-              <a:t>ターゲットユーザー</a:t>
-            </a:r>
-            <a:br/>
-            <a:r>
-              <a:t>企画者、プロダクト開発者、クリエイター、学生、日常メモを整理したい一般ユーザー。</a:t>
-            </a:r>
-          </a:p>
-          <a:p>
-            <a:pPr/>
-            <a:r>
-              <a:t>主な機能</a:t>
-            </a:r>
-            <a:br/>
-            <a:r>
-              <a:t>アイデア一覧（カード表示）</a:t>
-            </a:r>
-            <a:br/>
-            <a:r>
-              <a:t>作成（テキスト／画像／音声）</a:t>
-            </a:r>
-            <a:br/>
-            <a:r>
-              <a:t>AI自動タグ抽出（AiService）</a:t>
-            </a:r>
-            <a:br/>
-            <a:r>
-              <a:t>ローカル永続化（ideas.</a:t>
-            </a:r>
-          </a:p>
-          <a:p>
-            <a:pPr/>
-            <a:r>
-              <a:t>json）</a:t>
-            </a:r>
-            <a:br/>
-            <a:r>
-              <a:t>検索（検索デリゲート）</a:t>
-            </a:r>
-            <a:br/>
-            <a:r>
-              <a:t>設定画面・メディア管理（画像/音声保存）</a:t>
-            </a:r>
-          </a:p>
-        </p:txBody>
-      </p:sp>
+        </p:nvGraphicFramePr>
+        <p:xfrm>
+          <a:off x="904602" y="3017519"/>
+          <a:ext cx="10378440" cy="3209902"/>
+        </p:xfrm>
+        <a:graphic>
+          <a:graphicData uri="http://schemas.openxmlformats.org/drawingml/2006/diagram">
+            <dgm:relIds xmlns:dgm="http://schemas.openxmlformats.org/drawingml/2006/diagram" xmlns:r="http://schemas.openxmlformats.org/officeDocument/2006/relationships" r:dm="rId2" r:lo="rId3" r:qs="rId4" r:cs="rId5"/>
+          </a:graphicData>
+        </a:graphic>
+      </p:graphicFrame>
     </p:spTree>
+    <p:extLst>
+      <p:ext uri="{BB962C8B-B14F-4D97-AF65-F5344CB8AC3E}">
+        <p14:creationId xmlns:p14="http://schemas.microsoft.com/office/powerpoint/2010/main" val="3563080057"/>
+      </p:ext>
+    </p:extLst>
   </p:cSld>
   <p:clrMapOvr>
     <a:masterClrMapping/>
